--- a/slides/m100_agent_deck.pptx
+++ b/slides/m100_agent_deck.pptx
@@ -13,6 +13,7 @@
     <p:sldId id="261" r:id="rId13"/>
     <p:sldId id="262" r:id="rId14"/>
     <p:sldId id="263" r:id="rId15"/>
+    <p:sldId id="264" r:id="rId16"/>
   </p:sldIdLst>
   <p:sldSz cx="12191695" cy="6858000" type="screen4x3"/>
   <p:notesSz cx="6858000" cy="9144000"/>
@@ -522,7 +523,7 @@
                 <a:ea typeface="Microsoft YaHei"/>
                 <a:cs typeface="Microsoft YaHei"/>
               </a:rPr>
-              <a:t>【1 / 8 · 适配成本 · 约 85 秒（1:25）】</a:t>
+              <a:t>【1 / 9 · 适配成本 · 约 85 秒（1:25）】</a:t>
             </a:r>
           </a:p>
           <a:p>
@@ -749,7 +750,7 @@
                 <a:ea typeface="Microsoft YaHei"/>
                 <a:cs typeface="Microsoft YaHei"/>
               </a:rPr>
-              <a:t>【2 / 8 · 软件栈 · 约 65 秒（1:05）】</a:t>
+              <a:t>【2 / 9 · 软件栈 · 约 65 秒（1:05）】</a:t>
             </a:r>
           </a:p>
           <a:p>
@@ -976,7 +977,7 @@
                 <a:ea typeface="Microsoft YaHei"/>
                 <a:cs typeface="Microsoft YaHei"/>
               </a:rPr>
-              <a:t>【3 / 8 · 两个 Agent 纵览 · 约 110 秒（1:50）】</a:t>
+              <a:t>【3 / 9 · 两个 Agent 纵览 · 约 110 秒（1:50）】</a:t>
             </a:r>
           </a:p>
           <a:p>
@@ -1221,7 +1222,7 @@
                 <a:ea typeface="Microsoft YaHei"/>
                 <a:cs typeface="Microsoft YaHei"/>
               </a:rPr>
-              <a:t>【4 / 8 · 模型层 · 执行迭代 · 约 105 秒（1:45）】</a:t>
+              <a:t>【4 / 9 · 模型层 · 一次任务怎么跑完 · 约 140 秒（2:20）】</a:t>
             </a:r>
           </a:p>
           <a:p>
@@ -1239,7 +1240,7 @@
                 <a:ea typeface="Microsoft YaHei"/>
                 <a:cs typeface="Microsoft YaHei"/>
               </a:rPr>
-              <a:t>这一页是模型层的工作方式：人定目标，Agent 在固定约束内迭代，结果交回人验收。</a:t>
+              <a:t>这一页讲模型层的一次任务是怎么跑完的：人定目标，Agent 跑完四个阶段，结果交回人验收。</a:t>
             </a:r>
           </a:p>
           <a:p>
@@ -1257,7 +1258,7 @@
                 <a:ea typeface="Microsoft YaHei"/>
                 <a:cs typeface="Microsoft YaHei"/>
               </a:rPr>
-              <a:t>最上面一行是三个阶段：架构接入做新架构的逐层验收，性能调优在实测环境下迭代，持续优化按 Trace 长期迭代。今天重点是中间这条。</a:t>
+              <a:t>顶上这一行先交代范围。三条命令线共用同一套契约——架构接入、性能调优、持续优化；今天讲中间这条。</a:t>
             </a:r>
           </a:p>
           <a:p>
@@ -1293,7 +1294,25 @@
                 <a:ea typeface="Microsoft YaHei"/>
                 <a:cs typeface="Microsoft YaHei"/>
               </a:rPr>
-              <a:t>中间整段无人值守。A 先完成预检再验收基线；B 独立采样 Trace，只用于诊断，不计入收益；C 是候选迭代，小步改动、逐轮验证收益，右边那个回环标注的就是它；D 最终复验，重测基线与候选，独立复验一遍。</a:t>
+              <a:t>中间整段无人值守，四个阶段，每个阶段都有明确产出，这是看懂这条链的关键。A 先完成预检再跑全量评测，产出基线指标和一套可复现的启动方式；B 用独立进程采 Trace，不参与计时，产出热点清单，只用来选方向，不计入任何收益；C 是候选迭代，小步改动、逐个按三道条件验收，产出通过筛选的候选和各自收益，下一页整页展开；D 最终复验，重测基线再独立复验每个候选，产出可交付的那一个。</a:t>
+            </a:r>
+          </a:p>
+          <a:p>
+            <a:pPr>
+              <a:spcAft>
+                <a:spcPts val="600"/>
+              </a:spcAft>
+            </a:pPr>
+            <a:r>
+              <a:rPr sz="1200" b="0">
+                <a:solidFill>
+                  <a:srgbClr val="16202A"/>
+                </a:solidFill>
+                <a:latin typeface="Microsoft YaHei"/>
+                <a:ea typeface="Microsoft YaHei"/>
+                <a:cs typeface="Microsoft YaHei"/>
+              </a:rPr>
+              <a:t>D 为什么不能省：C 阶段的收益是在筛选过程中测出来的，基线和候选分处不同时间段。重新测一遍基线、再独立复验一次，数才算数。</a:t>
             </a:r>
           </a:p>
           <a:p>
@@ -1484,7 +1503,7 @@
                 <a:ea typeface="Microsoft YaHei"/>
                 <a:cs typeface="Microsoft YaHei"/>
               </a:rPr>
-              <a:t>【5 / 8 · 模型层 · 候选验收 · 约 100 秒（1:40）】</a:t>
+              <a:t>【5 / 9 · 模型层 · 候选验收与可信度 · 约 135 秒（2:15）】</a:t>
             </a:r>
           </a:p>
           <a:p>
@@ -1502,7 +1521,7 @@
                 <a:ea typeface="Microsoft YaHei"/>
                 <a:cs typeface="Microsoft YaHei"/>
               </a:rPr>
-              <a:t>这一页放大上一页的 C 阶段：里面每一个候选，都要走完左边这条流水线。</a:t>
+              <a:t>上一页 C 阶段里的每一个候选，都要走完这一页。但这一页真正回答的是另一个问题：Agent 报出来的收益，凭什么可信。</a:t>
             </a:r>
           </a:p>
           <a:p>
@@ -1538,7 +1557,7 @@
                 <a:ea typeface="Microsoft YaHei"/>
                 <a:cs typeface="Microsoft YaHei"/>
               </a:rPr>
-              <a:t>然后三道条件，顺序按成本由低到高。第一道看输出有没有变，判据是贪心 token 完全一致；第二道看质量，正确率与解析率都不许降；第三道看是不是确实更快，收益要大于 3%、回归不超过 5%，重复压测取中位，还要大于噪声极差。任一道不过就停止后续测试，不再占用设备时间，但失败证据保留。</a:t>
+              <a:t>然后三道条件，顺序按成本由低到高。第一道看输出有没有变，判据是贪心 token 完全一致；第二道看质量，正确率与解析率都不许降；第三道看是不是确实更快，收益要大于 3%、回归不超过 5%，重复压测取中位，还要大于噪声极差。任一道不过就停止后续测试，不再占用设备时间，但失败证据保留。为什么按这个顺序——越靠前的越便宜，先用几秒钟的对比挡掉大部分不合格的候选。</a:t>
             </a:r>
           </a:p>
           <a:p>
@@ -1556,7 +1575,7 @@
                 <a:ea typeface="Microsoft YaHei"/>
                 <a:cs typeface="Microsoft YaHei"/>
               </a:rPr>
-              <a:t>下面两条保证候选之间可比：输入、精度、上下文与缓存条件全部固定，prompt 的 token 数必须等于冻结值；诊断和正式压测分开，收益由关闭 profiler 的独立复测确认——不能靠减少实际工作量换速度。</a:t>
+              <a:t>下面三条是这一页的落点，三条防止自欺的约束。第一，口径先冻结：模型、负载、阈值与预算随任务写定，改了之后已有结果不再沿用。第二，测的是同一个候选：隔离副本、记录产物身份、启动时核对，不会出现测 A 报 B。第三，不能靠少干活变快：输入、精度、上下文与缓存全部冻结，prompt 的 token 数必须等于冻结值，诊断和正式压测分开跑。</a:t>
             </a:r>
           </a:p>
           <a:p>
@@ -1574,7 +1593,7 @@
                 <a:ea typeface="Microsoft YaHei"/>
                 <a:cs typeface="Microsoft YaHei"/>
               </a:rPr>
-              <a:t>右边放这条流水线判出来的结果。口径要强调：只有独立复验通过的收益才进入最终交付，筛选阶段看起来有收益、复验没过的，一个都不算。</a:t>
+              <a:t>右边放这条流水线判出来的实际结果。最后一条口径：只有独立复验通过的收益才进入最终交付，筛选阶段看起来有收益、复验没过的，一个都不算。</a:t>
             </a:r>
           </a:p>
           <a:p>
@@ -1729,7 +1748,7 @@
                 <a:ea typeface="Microsoft YaHei"/>
                 <a:cs typeface="Microsoft YaHei"/>
               </a:rPr>
-              <a:t>【6 / 8 · 算子层 · 生成与迭代 · 约 100 秒（1:40）】</a:t>
+              <a:t>【6 / 9 · 算子层 · 生成与迭代 · 约 100 秒（1:40）】</a:t>
             </a:r>
           </a:p>
           <a:p>
@@ -1974,7 +1993,7 @@
                 <a:ea typeface="Microsoft YaHei"/>
                 <a:cs typeface="Microsoft YaHei"/>
               </a:rPr>
-              <a:t>【7 / 8 · 局部加速到整体收益 · 约 105 秒（1:45）】</a:t>
+              <a:t>【7 / 9 · 回到模型层看收益 · 约 115 秒（1:55）】</a:t>
             </a:r>
           </a:p>
           <a:p>
@@ -2028,7 +2047,7 @@
                 <a:ea typeface="Microsoft YaHei"/>
                 <a:cs typeface="Microsoft YaHei"/>
               </a:rPr>
-              <a:t>两个场景，区别只在算子占比。场景 A 偏 GEMM，GEMM 占 80%、Attention 占 10%；场景 B 里 Attention 涨到 40%，GEMM 降到 50%。</a:t>
+              <a:t>两个场景，区别只在算子占比，而占比是由输入形状决定的。场景 A 是短输入，GEMM 占 80%、Attention 占 10%；场景 B 是长上下文，Attention 涨到 40%，GEMM 降到 50%。</a:t>
             </a:r>
           </a:p>
           <a:p>
@@ -2064,7 +2083,7 @@
                 <a:ea typeface="Microsoft YaHei"/>
                 <a:cs typeface="Microsoft YaHei"/>
               </a:rPr>
-              <a:t>右边三条是为什么要回到模型看收益。第一，占比决定直接收益，占比小的算子再快也带不动整步。第二，整步耗时还不是服务容量，排队、批次、缓存和时延目标都会改变最终结果。第三，每轮优化之后瓶颈可能转移，下一轮要按新的 Trace 重排优先级。</a:t>
+              <a:t>右边三条是为什么要回到模型看收益。第一，占比决定直接收益，占比小的算子再快也带不动整步。第二，整步耗时还不是服务容量，排队、批次、缓存和时延目标都会改变最终结果——下一页给出完整的换算办法。第三，每轮优化之后瓶颈可能转移，下一轮要按新的 Trace 重排优先级。</a:t>
             </a:r>
           </a:p>
           <a:p>
@@ -2237,7 +2256,7 @@
                 <a:ea typeface="Microsoft YaHei"/>
                 <a:cs typeface="Microsoft YaHei"/>
               </a:rPr>
-              <a:t>【8 / 8 · 算子耗时到服务容量 · 约 105 秒（1:45）】</a:t>
+              <a:t>【8 / 9 · 算子耗时到服务容量 · 约 110 秒（1:50）】</a:t>
             </a:r>
           </a:p>
           <a:p>
@@ -2255,7 +2274,7 @@
                 <a:ea typeface="Microsoft YaHei"/>
                 <a:cs typeface="Microsoft YaHei"/>
               </a:rPr>
-              <a:t>最后一页讲方法：从算子耗时一路算到单机容量，这条链怎么用。</a:t>
+              <a:t>上一页留了个问题：怎么系统地判断该先优化哪个算子。这一页就是那个办法——从算子耗时一路算到单机容量。</a:t>
             </a:r>
           </a:p>
           <a:p>
@@ -2327,7 +2346,7 @@
                 <a:ea typeface="Microsoft YaHei"/>
                 <a:cs typeface="Microsoft YaHei"/>
               </a:rPr>
-              <a:t>一句话收尾：这条链只用于排优先级；任何进入交付的收益，都以整模型实测为准。</a:t>
+              <a:t>一句话过渡：这条链只用于排优先级；任何进入交付的收益，都以整模型实测为准。</a:t>
             </a:r>
           </a:p>
           <a:p>
@@ -2382,6 +2401,251 @@
                 <a:cs typeface="Microsoft YaHei"/>
               </a:rPr>
               <a:t>容量定义是满足 SLO 的最大请求到达率，依赖具体的 TTFT / TPOT 目标；换一组业务目标，排序可能变化。</a:t>
+            </a:r>
+          </a:p>
+          <a:p>
+            <a:pPr>
+              <a:spcAft>
+                <a:spcPts val="600"/>
+              </a:spcAft>
+            </a:pPr>
+            <a:r>
+              <a:rPr sz="1200" b="0">
+                <a:solidFill>
+                  <a:srgbClr val="66727F"/>
+                </a:solidFill>
+                <a:latin typeface="Microsoft YaHei"/>
+                <a:ea typeface="Microsoft YaHei"/>
+                <a:cs typeface="Microsoft YaHei"/>
+              </a:rPr>
+              <a:t>这条链按单实例算容量。多机与 PD 分离下还要叠加跨机通信与路由，不在本页范围内。</a:t>
+            </a:r>
+          </a:p>
+        </p:txBody>
+      </p:sp>
+      <p:sp>
+        <p:nvSpPr>
+          <p:cNvPr id="4" name="Slide Number Placeholder 3"/>
+          <p:cNvSpPr>
+            <a:spLocks noGrp="1"/>
+          </p:cNvSpPr>
+          <p:nvPr>
+            <p:ph type="sldNum" idx="5" sz="quarter"/>
+          </p:nvPr>
+        </p:nvSpPr>
+        <p:spPr/>
+      </p:sp>
+    </p:spTree>
+  </p:cSld>
+  <p:clrMapOvr>
+    <a:masterClrMapping/>
+  </p:clrMapOvr>
+</p:notes>
+</file>
+
+<file path=ppt/notesSlides/notesSlide9.xml><?xml version="1.0" encoding="utf-8"?>
+<p:notes xmlns:a="http://schemas.openxmlformats.org/drawingml/2006/main" xmlns:p="http://schemas.openxmlformats.org/presentationml/2006/main" xmlns:r="http://schemas.openxmlformats.org/officeDocument/2006/relationships">
+  <p:cSld>
+    <p:spTree>
+      <p:nvGrpSpPr>
+        <p:cNvPr id="1" name=""/>
+        <p:cNvGrpSpPr/>
+        <p:nvPr/>
+      </p:nvGrpSpPr>
+      <p:grpSpPr>
+        <a:xfrm>
+          <a:off x="0" y="0"/>
+          <a:ext cx="0" cy="0"/>
+          <a:chOff x="0" y="0"/>
+          <a:chExt cx="0" cy="0"/>
+        </a:xfrm>
+      </p:grpSpPr>
+      <p:sp>
+        <p:nvSpPr>
+          <p:cNvPr id="2" name="Slide Image Placeholder 1"/>
+          <p:cNvSpPr>
+            <a:spLocks noGrp="1"/>
+          </p:cNvSpPr>
+          <p:nvPr>
+            <p:ph type="sldImg" idx="2"/>
+          </p:nvPr>
+        </p:nvSpPr>
+        <p:spPr/>
+      </p:sp>
+      <p:sp>
+        <p:nvSpPr>
+          <p:cNvPr id="3" name="Notes Placeholder 2"/>
+          <p:cNvSpPr>
+            <a:spLocks noGrp="1"/>
+          </p:cNvSpPr>
+          <p:nvPr>
+            <p:ph type="body" idx="3" sz="quarter"/>
+          </p:nvPr>
+        </p:nvSpPr>
+        <p:spPr/>
+        <p:txBody>
+          <a:bodyPr/>
+          <a:lstStyle/>
+          <a:p>
+            <a:pPr>
+              <a:spcAft>
+                <a:spcPts val="600"/>
+              </a:spcAft>
+            </a:pPr>
+            <a:r>
+              <a:rPr sz="1200" b="1">
+                <a:solidFill>
+                  <a:srgbClr val="66727F"/>
+                </a:solidFill>
+                <a:latin typeface="Microsoft YaHei"/>
+                <a:ea typeface="Microsoft YaHei"/>
+                <a:cs typeface="Microsoft YaHei"/>
+              </a:rPr>
+              <a:t>【9 / 9 · 现状与下一步 · 约 75 秒（1:15）】</a:t>
+            </a:r>
+          </a:p>
+          <a:p>
+            <a:pPr>
+              <a:spcAft>
+                <a:spcPts val="600"/>
+              </a:spcAft>
+            </a:pPr>
+            <a:r>
+              <a:rPr sz="1200" b="0">
+                <a:solidFill>
+                  <a:srgbClr val="16202A"/>
+                </a:solidFill>
+                <a:latin typeface="Microsoft YaHei"/>
+                <a:ea typeface="Microsoft YaHei"/>
+                <a:cs typeface="Microsoft YaHei"/>
+              </a:rPr>
+              <a:t>最后回到第 1 页的命题，如实对一次账。</a:t>
+            </a:r>
+          </a:p>
+          <a:p>
+            <a:pPr>
+              <a:spcAft>
+                <a:spcPts val="600"/>
+              </a:spcAft>
+            </a:pPr>
+            <a:r>
+              <a:rPr sz="1200" b="0">
+                <a:solidFill>
+                  <a:srgbClr val="16202A"/>
+                </a:solidFill>
+                <a:latin typeface="Microsoft YaHei"/>
+                <a:ea typeface="Microsoft YaHei"/>
+                <a:cs typeface="Microsoft YaHei"/>
+              </a:rPr>
+              <a:t>左边这列已经能自动跑：基线建立与全量评测、候选迭代与三道条件验收、Trace 采集与热点定位、失败证据与逐轮回放。这几件人不在回路里，跑完才看结果。</a:t>
+            </a:r>
+          </a:p>
+          <a:p>
+            <a:pPr>
+              <a:spcAft>
+                <a:spcPts val="600"/>
+              </a:spcAft>
+            </a:pPr>
+            <a:r>
+              <a:rPr sz="1200" b="0">
+                <a:solidFill>
+                  <a:srgbClr val="16202A"/>
+                </a:solidFill>
+                <a:latin typeface="Microsoft YaHei"/>
+                <a:ea typeface="Microsoft YaHei"/>
+                <a:cs typeface="Microsoft YaHei"/>
+              </a:rPr>
+              <a:t>中间这列仍然靠人：定目标和冻结验收口径、新架构的接入判断、未知缺陷的根因定位，以及交付与否的最终决定。这几项短期内不打算交出去。</a:t>
+            </a:r>
+          </a:p>
+          <a:p>
+            <a:pPr>
+              <a:spcAft>
+                <a:spcPts val="600"/>
+              </a:spcAft>
+            </a:pPr>
+            <a:r>
+              <a:rPr sz="1200" b="0">
+                <a:solidFill>
+                  <a:srgbClr val="16202A"/>
+                </a:solidFill>
+                <a:latin typeface="Microsoft YaHei"/>
+                <a:ea typeface="Microsoft YaHei"/>
+                <a:cs typeface="Microsoft YaHei"/>
+              </a:rPr>
+              <a:t>右边这列还没做：换算链在 M100 上校准、模型层与算子层的自动交接、规则与补丁沉淀为可复用知识，以及适配成本本身的量化对账。顺序是定的——先校准再谈预测，没有校准的预测只能排序，不能报数。</a:t>
+            </a:r>
+          </a:p>
+          <a:p>
+            <a:pPr>
+              <a:spcAft>
+                <a:spcPts val="600"/>
+              </a:spcAft>
+            </a:pPr>
+            <a:r>
+              <a:rPr sz="1200" b="0">
+                <a:solidFill>
+                  <a:srgbClr val="16202A"/>
+                </a:solidFill>
+                <a:latin typeface="Microsoft YaHei"/>
+                <a:ea typeface="Microsoft YaHei"/>
+                <a:cs typeface="Microsoft YaHei"/>
+              </a:rPr>
+              <a:t>命题没有变：把重复判断交给 Agent，一个模型一个模型往下压。</a:t>
+            </a:r>
+          </a:p>
+          <a:p>
+            <a:pPr>
+              <a:spcAft>
+                <a:spcPts val="600"/>
+              </a:spcAft>
+            </a:pPr>
+            <a:r>
+              <a:rPr sz="1200" b="1">
+                <a:solidFill>
+                  <a:srgbClr val="66727F"/>
+                </a:solidFill>
+                <a:latin typeface="Microsoft YaHei"/>
+                <a:ea typeface="Microsoft YaHei"/>
+                <a:cs typeface="Microsoft YaHei"/>
+              </a:rPr>
+              <a:t>被问到再说 ——</a:t>
+            </a:r>
+          </a:p>
+          <a:p>
+            <a:pPr>
+              <a:spcAft>
+                <a:spcPts val="600"/>
+              </a:spcAft>
+            </a:pPr>
+            <a:r>
+              <a:rPr sz="1200" b="0">
+                <a:solidFill>
+                  <a:srgbClr val="66727F"/>
+                </a:solidFill>
+                <a:latin typeface="Microsoft YaHei"/>
+                <a:ea typeface="Microsoft YaHei"/>
+                <a:cs typeface="Microsoft YaHei"/>
+              </a:rPr>
+              <a:t>左列那四项已经在 M100 上跑通，但样本是单模型；规模化之后哪些规则需要调整，现在没有数据，不要说成已经验证。</a:t>
+            </a:r>
+          </a:p>
+          <a:p>
+            <a:pPr>
+              <a:spcAft>
+                <a:spcPts val="600"/>
+              </a:spcAft>
+            </a:pPr>
+            <a:r>
+              <a:rPr sz="1200" b="0">
+                <a:solidFill>
+                  <a:srgbClr val="66727F"/>
+                </a:solidFill>
+                <a:latin typeface="Microsoft YaHei"/>
+                <a:ea typeface="Microsoft YaHei"/>
+                <a:cs typeface="Microsoft YaHei"/>
+              </a:rPr>
+              <a:t>适配成本的量化对账还没做。第 1 页那三个待填的数就是对账口径——人周、算子缺口数、复验轮次。被问到省了多少成本时，如实说这个数还没有。</a:t>
             </a:r>
           </a:p>
         </p:txBody>
@@ -6948,7 +7212,7 @@
                 <a:ea typeface="Microsoft YaHei"/>
                 <a:cs typeface="Microsoft YaHei"/>
               </a:rPr>
-              <a:t>1 / 8</a:t>
+              <a:t>1 / 9</a:t>
             </a:r>
           </a:p>
         </p:txBody>
@@ -8499,7 +8763,7 @@
                 <a:ea typeface="Microsoft YaHei"/>
                 <a:cs typeface="Microsoft YaHei"/>
               </a:rPr>
-              <a:t>2 / 8</a:t>
+              <a:t>2 / 9</a:t>
             </a:r>
           </a:p>
         </p:txBody>
@@ -10623,7 +10887,7 @@
                 <a:ea typeface="Microsoft YaHei"/>
                 <a:cs typeface="Microsoft YaHei"/>
               </a:rPr>
-              <a:t>3 / 8</a:t>
+              <a:t>3 / 9</a:t>
             </a:r>
           </a:p>
         </p:txBody>
@@ -10688,7 +10952,7 @@
                 <a:ea typeface="Microsoft YaHei"/>
                 <a:cs typeface="Microsoft YaHei"/>
               </a:rPr>
-              <a:t>模型层 · 人与 AGENT 的分工</a:t>
+              <a:t>模型层 · 一次任务怎么跑完</a:t>
             </a:r>
           </a:p>
         </p:txBody>
@@ -10782,21 +11046,167 @@
                 <a:ea typeface="Microsoft YaHei"/>
                 <a:cs typeface="Microsoft YaHei"/>
               </a:rPr>
-              <a:t>已有流程可自动执行；新架构、未知缺陷与关键决策仍需要人工参与</a:t>
-            </a:r>
-          </a:p>
-        </p:txBody>
-      </p:sp>
-      <p:sp>
-        <p:nvSpPr>
-          <p:cNvPr id="5" name="Rectangle 4"/>
+              <a:t>人只在两头定目标与判交付；中间四个阶段无人值守，每个阶段都有明确产出</a:t>
+            </a:r>
+          </a:p>
+        </p:txBody>
+      </p:sp>
+      <p:sp>
+        <p:nvSpPr>
+          <p:cNvPr id="5" name="TextBox 4"/>
+          <p:cNvSpPr txBox="1"/>
+          <p:nvPr/>
+        </p:nvSpPr>
+        <p:spPr>
+          <a:xfrm>
+            <a:off x="548640" y="1664208"/>
+            <a:ext cx="11094415" cy="274320"/>
+          </a:xfrm>
+          <a:prstGeom prst="rect">
+            <a:avLst/>
+          </a:prstGeom>
+          <a:noFill/>
+        </p:spPr>
+        <p:txBody>
+          <a:bodyPr wrap="square" anchor="ctr" lIns="0" tIns="0" rIns="0" bIns="0">
+            <a:noAutofit/>
+          </a:bodyPr>
+          <a:lstStyle/>
+          <a:p>
+            <a:pPr algn="l" latinLnBrk="0">
+              <a:lnSpc>
+                <a:spcPct val="100000"/>
+              </a:lnSpc>
+              <a:spcBef>
+                <a:spcPts val="0"/>
+              </a:spcBef>
+              <a:spcAft>
+                <a:spcPts val="0"/>
+              </a:spcAft>
+            </a:pPr>
+            <a:r>
+              <a:rPr sz="1000" b="0">
+                <a:solidFill>
+                  <a:srgbClr val="66727F"/>
+                </a:solidFill>
+                <a:latin typeface="Microsoft YaHei"/>
+                <a:ea typeface="Microsoft YaHei"/>
+                <a:cs typeface="Microsoft YaHei"/>
+              </a:rPr>
+              <a:t>三条命令线共用同一套契约　</a:t>
+            </a:r>
+            <a:r>
+              <a:rPr sz="1050" b="1">
+                <a:solidFill>
+                  <a:srgbClr val="16202A"/>
+                </a:solidFill>
+                <a:latin typeface="Microsoft YaHei"/>
+                <a:ea typeface="Microsoft YaHei"/>
+                <a:cs typeface="Microsoft YaHei"/>
+              </a:rPr>
+              <a:t>架构接入</a:t>
+            </a:r>
+            <a:r>
+              <a:rPr sz="950" b="0">
+                <a:solidFill>
+                  <a:srgbClr val="66727F"/>
+                </a:solidFill>
+                <a:latin typeface="Consolas"/>
+                <a:ea typeface="Microsoft YaHei"/>
+                <a:cs typeface="Microsoft YaHei"/>
+              </a:rPr>
+              <a:t> onboard-*</a:t>
+            </a:r>
+            <a:r>
+              <a:rPr sz="1000" b="0">
+                <a:solidFill>
+                  <a:srgbClr val="8C96A1"/>
+                </a:solidFill>
+                <a:latin typeface="Microsoft YaHei"/>
+                <a:ea typeface="Microsoft YaHei"/>
+                <a:cs typeface="Microsoft YaHei"/>
+              </a:rPr>
+              <a:t>　→　</a:t>
+            </a:r>
+            <a:r>
+              <a:rPr sz="1050" b="1">
+                <a:solidFill>
+                  <a:srgbClr val="C0612C"/>
+                </a:solidFill>
+                <a:latin typeface="Microsoft YaHei"/>
+                <a:ea typeface="Microsoft YaHei"/>
+                <a:cs typeface="Microsoft YaHei"/>
+              </a:rPr>
+              <a:t>性能调优</a:t>
+            </a:r>
+            <a:r>
+              <a:rPr sz="950" b="0">
+                <a:solidFill>
+                  <a:srgbClr val="C0612C"/>
+                </a:solidFill>
+                <a:latin typeface="Consolas"/>
+                <a:ea typeface="Microsoft YaHei"/>
+                <a:cs typeface="Microsoft YaHei"/>
+              </a:rPr>
+              <a:t> run / resume</a:t>
+            </a:r>
+            <a:r>
+              <a:rPr sz="1000" b="0">
+                <a:solidFill>
+                  <a:srgbClr val="8C96A1"/>
+                </a:solidFill>
+                <a:latin typeface="Microsoft YaHei"/>
+                <a:ea typeface="Microsoft YaHei"/>
+                <a:cs typeface="Microsoft YaHei"/>
+              </a:rPr>
+              <a:t>　→　</a:t>
+            </a:r>
+            <a:r>
+              <a:rPr sz="1050" b="1">
+                <a:solidFill>
+                  <a:srgbClr val="16202A"/>
+                </a:solidFill>
+                <a:latin typeface="Microsoft YaHei"/>
+                <a:ea typeface="Microsoft YaHei"/>
+                <a:cs typeface="Microsoft YaHei"/>
+              </a:rPr>
+              <a:t>持续优化</a:t>
+            </a:r>
+            <a:r>
+              <a:rPr sz="950" b="0">
+                <a:solidFill>
+                  <a:srgbClr val="66727F"/>
+                </a:solidFill>
+                <a:latin typeface="Consolas"/>
+                <a:ea typeface="Microsoft YaHei"/>
+                <a:cs typeface="Microsoft YaHei"/>
+              </a:rPr>
+              <a:t> optimize-*</a:t>
+            </a:r>
+            <a:r>
+              <a:rPr sz="1000" b="0">
+                <a:solidFill>
+                  <a:srgbClr val="66727F"/>
+                </a:solidFill>
+                <a:latin typeface="Microsoft YaHei"/>
+                <a:ea typeface="Microsoft YaHei"/>
+                <a:cs typeface="Microsoft YaHei"/>
+              </a:rPr>
+              <a:t>　　本页讲中间这条</a:t>
+            </a:r>
+          </a:p>
+        </p:txBody>
+      </p:sp>
+      <p:sp>
+        <p:nvSpPr>
+          <p:cNvPr id="6" name="Rectangle 5"/>
           <p:cNvSpPr/>
           <p:nvPr/>
         </p:nvSpPr>
         <p:spPr>
           <a:xfrm>
-            <a:off x="548640" y="1682496"/>
-            <a:ext cx="3515258" cy="457200"/>
+            <a:off x="548640" y="2011680"/>
+            <a:ext cx="2286000" cy="3255264"/>
           </a:xfrm>
           <a:prstGeom prst="rect">
             <a:avLst/>
@@ -10818,318 +11228,13 @@
       </p:sp>
       <p:sp>
         <p:nvSpPr>
-          <p:cNvPr id="6" name="TextBox 5"/>
-          <p:cNvSpPr txBox="1"/>
-          <p:nvPr/>
-        </p:nvSpPr>
-        <p:spPr>
-          <a:xfrm>
-            <a:off x="749808" y="1682496"/>
-            <a:ext cx="3112922" cy="457200"/>
-          </a:xfrm>
-          <a:prstGeom prst="rect">
-            <a:avLst/>
-          </a:prstGeom>
-          <a:noFill/>
-        </p:spPr>
-        <p:txBody>
-          <a:bodyPr wrap="square" anchor="ctr" lIns="0" tIns="0" rIns="0" bIns="0">
-            <a:noAutofit/>
-          </a:bodyPr>
-          <a:lstStyle/>
-          <a:p>
-            <a:pPr algn="l" latinLnBrk="0">
-              <a:lnSpc>
-                <a:spcPct val="100000"/>
-              </a:lnSpc>
-              <a:spcBef>
-                <a:spcPts val="0"/>
-              </a:spcBef>
-              <a:spcAft>
-                <a:spcPts val="0"/>
-              </a:spcAft>
-            </a:pPr>
-            <a:r>
-              <a:rPr sz="1150" b="1">
-                <a:solidFill>
-                  <a:srgbClr val="16202A"/>
-                </a:solidFill>
-                <a:latin typeface="Microsoft YaHei"/>
-                <a:ea typeface="Microsoft YaHei"/>
-                <a:cs typeface="Microsoft YaHei"/>
-              </a:rPr>
-              <a:t>架构接入</a:t>
-            </a:r>
-            <a:r>
-              <a:rPr sz="1000" b="0">
-                <a:solidFill>
-                  <a:srgbClr val="35424F"/>
-                </a:solidFill>
-                <a:latin typeface="Microsoft YaHei"/>
-                <a:ea typeface="Microsoft YaHei"/>
-                <a:cs typeface="Microsoft YaHei"/>
-              </a:rPr>
-              <a:t>　新架构逐层验收</a:t>
-            </a:r>
-          </a:p>
-        </p:txBody>
-      </p:sp>
-      <p:sp>
-        <p:nvSpPr>
           <p:cNvPr id="7" name="Rectangle 6"/>
           <p:cNvSpPr/>
           <p:nvPr/>
         </p:nvSpPr>
         <p:spPr>
           <a:xfrm>
-            <a:off x="4338218" y="1682496"/>
-            <a:ext cx="3515258" cy="457200"/>
-          </a:xfrm>
-          <a:prstGeom prst="rect">
-            <a:avLst/>
-          </a:prstGeom>
-          <a:solidFill>
-            <a:srgbClr val="F8EADF"/>
-          </a:solidFill>
-          <a:ln>
-            <a:noFill/>
-          </a:ln>
-        </p:spPr>
-        <p:txBody>
-          <a:bodyPr rtlCol="0" anchor="ctr"/>
-          <a:lstStyle/>
-          <a:p>
-            <a:pPr algn="ctr"/>
-          </a:p>
-        </p:txBody>
-      </p:sp>
-      <p:sp>
-        <p:nvSpPr>
-          <p:cNvPr id="8" name="TextBox 7"/>
-          <p:cNvSpPr txBox="1"/>
-          <p:nvPr/>
-        </p:nvSpPr>
-        <p:spPr>
-          <a:xfrm>
-            <a:off x="4539386" y="1682496"/>
-            <a:ext cx="3112922" cy="457200"/>
-          </a:xfrm>
-          <a:prstGeom prst="rect">
-            <a:avLst/>
-          </a:prstGeom>
-          <a:noFill/>
-        </p:spPr>
-        <p:txBody>
-          <a:bodyPr wrap="square" anchor="ctr" lIns="0" tIns="0" rIns="0" bIns="0">
-            <a:noAutofit/>
-          </a:bodyPr>
-          <a:lstStyle/>
-          <a:p>
-            <a:pPr algn="l" latinLnBrk="0">
-              <a:lnSpc>
-                <a:spcPct val="100000"/>
-              </a:lnSpc>
-              <a:spcBef>
-                <a:spcPts val="0"/>
-              </a:spcBef>
-              <a:spcAft>
-                <a:spcPts val="0"/>
-              </a:spcAft>
-            </a:pPr>
-            <a:r>
-              <a:rPr sz="1150" b="1">
-                <a:solidFill>
-                  <a:srgbClr val="16202A"/>
-                </a:solidFill>
-                <a:latin typeface="Microsoft YaHei"/>
-                <a:ea typeface="Microsoft YaHei"/>
-                <a:cs typeface="Microsoft YaHei"/>
-              </a:rPr>
-              <a:t>性能调优</a:t>
-            </a:r>
-            <a:r>
-              <a:rPr sz="1000" b="0">
-                <a:solidFill>
-                  <a:srgbClr val="35424F"/>
-                </a:solidFill>
-                <a:latin typeface="Microsoft YaHei"/>
-                <a:ea typeface="Microsoft YaHei"/>
-                <a:cs typeface="Microsoft YaHei"/>
-              </a:rPr>
-              <a:t>　实测环境下迭代优化</a:t>
-            </a:r>
-          </a:p>
-        </p:txBody>
-      </p:sp>
-      <p:cxnSp>
-        <p:nvCxnSpPr>
-          <p:cNvPr id="9" name="Connector 8"/>
-          <p:cNvCxnSpPr/>
-          <p:nvPr/>
-        </p:nvCxnSpPr>
-        <p:spPr>
-          <a:xfrm>
-            <a:off x="4100474" y="1911095"/>
-            <a:ext cx="192024" cy="0"/>
-          </a:xfrm>
-          <a:prstGeom prst="line">
-            <a:avLst/>
-          </a:prstGeom>
-          <a:ln w="15875">
-            <a:solidFill>
-              <a:srgbClr val="C0612C"/>
-            </a:solidFill>
-            <a:tailEnd type="triangle" w="med" len="med"/>
-          </a:ln>
-        </p:spPr>
-      </p:cxnSp>
-      <p:sp>
-        <p:nvSpPr>
-          <p:cNvPr id="10" name="Rectangle 9"/>
-          <p:cNvSpPr/>
-          <p:nvPr/>
-        </p:nvSpPr>
-        <p:spPr>
-          <a:xfrm>
-            <a:off x="8127796" y="1682496"/>
-            <a:ext cx="3515258" cy="457200"/>
-          </a:xfrm>
-          <a:prstGeom prst="rect">
-            <a:avLst/>
-          </a:prstGeom>
-          <a:solidFill>
-            <a:srgbClr val="F6F7F9"/>
-          </a:solidFill>
-          <a:ln>
-            <a:noFill/>
-          </a:ln>
-        </p:spPr>
-        <p:txBody>
-          <a:bodyPr rtlCol="0" anchor="ctr"/>
-          <a:lstStyle/>
-          <a:p>
-            <a:pPr algn="ctr"/>
-          </a:p>
-        </p:txBody>
-      </p:sp>
-      <p:sp>
-        <p:nvSpPr>
-          <p:cNvPr id="11" name="TextBox 10"/>
-          <p:cNvSpPr txBox="1"/>
-          <p:nvPr/>
-        </p:nvSpPr>
-        <p:spPr>
-          <a:xfrm>
-            <a:off x="8328964" y="1682496"/>
-            <a:ext cx="3112922" cy="457200"/>
-          </a:xfrm>
-          <a:prstGeom prst="rect">
-            <a:avLst/>
-          </a:prstGeom>
-          <a:noFill/>
-        </p:spPr>
-        <p:txBody>
-          <a:bodyPr wrap="square" anchor="ctr" lIns="0" tIns="0" rIns="0" bIns="0">
-            <a:noAutofit/>
-          </a:bodyPr>
-          <a:lstStyle/>
-          <a:p>
-            <a:pPr algn="l" latinLnBrk="0">
-              <a:lnSpc>
-                <a:spcPct val="100000"/>
-              </a:lnSpc>
-              <a:spcBef>
-                <a:spcPts val="0"/>
-              </a:spcBef>
-              <a:spcAft>
-                <a:spcPts val="0"/>
-              </a:spcAft>
-            </a:pPr>
-            <a:r>
-              <a:rPr sz="1150" b="1">
-                <a:solidFill>
-                  <a:srgbClr val="16202A"/>
-                </a:solidFill>
-                <a:latin typeface="Microsoft YaHei"/>
-                <a:ea typeface="Microsoft YaHei"/>
-                <a:cs typeface="Microsoft YaHei"/>
-              </a:rPr>
-              <a:t>持续优化</a:t>
-            </a:r>
-            <a:r>
-              <a:rPr sz="1000" b="0">
-                <a:solidFill>
-                  <a:srgbClr val="35424F"/>
-                </a:solidFill>
-                <a:latin typeface="Microsoft YaHei"/>
-                <a:ea typeface="Microsoft YaHei"/>
-                <a:cs typeface="Microsoft YaHei"/>
-              </a:rPr>
-              <a:t>　按 Trace 持续迭代</a:t>
-            </a:r>
-          </a:p>
-        </p:txBody>
-      </p:sp>
-      <p:cxnSp>
-        <p:nvCxnSpPr>
-          <p:cNvPr id="12" name="Connector 11"/>
-          <p:cNvCxnSpPr/>
-          <p:nvPr/>
-        </p:nvCxnSpPr>
-        <p:spPr>
-          <a:xfrm>
-            <a:off x="7890052" y="1911095"/>
-            <a:ext cx="192024" cy="0"/>
-          </a:xfrm>
-          <a:prstGeom prst="line">
-            <a:avLst/>
-          </a:prstGeom>
-          <a:ln w="15875">
-            <a:solidFill>
-              <a:srgbClr val="C0612C"/>
-            </a:solidFill>
-            <a:tailEnd type="triangle" w="med" len="med"/>
-          </a:ln>
-        </p:spPr>
-      </p:cxnSp>
-      <p:sp>
-        <p:nvSpPr>
-          <p:cNvPr id="13" name="Rectangle 12"/>
-          <p:cNvSpPr/>
-          <p:nvPr/>
-        </p:nvSpPr>
-        <p:spPr>
-          <a:xfrm>
-            <a:off x="548640" y="2304288"/>
-            <a:ext cx="2286000" cy="2926080"/>
-          </a:xfrm>
-          <a:prstGeom prst="rect">
-            <a:avLst/>
-          </a:prstGeom>
-          <a:solidFill>
-            <a:srgbClr val="F6F7F9"/>
-          </a:solidFill>
-          <a:ln>
-            <a:noFill/>
-          </a:ln>
-        </p:spPr>
-        <p:txBody>
-          <a:bodyPr rtlCol="0" anchor="ctr"/>
-          <a:lstStyle/>
-          <a:p>
-            <a:pPr algn="ctr"/>
-          </a:p>
-        </p:txBody>
-      </p:sp>
-      <p:sp>
-        <p:nvSpPr>
-          <p:cNvPr id="14" name="Rectangle 13"/>
-          <p:cNvSpPr/>
-          <p:nvPr/>
-        </p:nvSpPr>
-        <p:spPr>
-          <a:xfrm>
-            <a:off x="548640" y="2304288"/>
+            <a:off x="548640" y="2011680"/>
             <a:ext cx="2286000" cy="45720"/>
           </a:xfrm>
           <a:prstGeom prst="rect">
@@ -11152,13 +11257,13 @@
       </p:sp>
       <p:sp>
         <p:nvSpPr>
-          <p:cNvPr id="15" name="TextBox 14"/>
+          <p:cNvPr id="8" name="TextBox 7"/>
           <p:cNvSpPr txBox="1"/>
           <p:nvPr/>
         </p:nvSpPr>
         <p:spPr>
           <a:xfrm>
-            <a:off x="749808" y="2432304"/>
+            <a:off x="749808" y="2139696"/>
             <a:ext cx="1883664" cy="310896"/>
           </a:xfrm>
           <a:prstGeom prst="rect">
@@ -11210,13 +11315,13 @@
       </p:sp>
       <p:sp>
         <p:nvSpPr>
-          <p:cNvPr id="16" name="Oval 15"/>
+          <p:cNvPr id="9" name="Oval 8"/>
           <p:cNvSpPr/>
           <p:nvPr/>
         </p:nvSpPr>
         <p:spPr>
           <a:xfrm>
-            <a:off x="749808" y="2999232"/>
+            <a:off x="749808" y="2706624"/>
             <a:ext cx="91440" cy="91440"/>
           </a:xfrm>
           <a:prstGeom prst="ellipse">
@@ -11239,13 +11344,13 @@
       </p:sp>
       <p:sp>
         <p:nvSpPr>
-          <p:cNvPr id="17" name="TextBox 16"/>
+          <p:cNvPr id="10" name="TextBox 9"/>
           <p:cNvSpPr txBox="1"/>
           <p:nvPr/>
         </p:nvSpPr>
         <p:spPr>
           <a:xfrm>
-            <a:off x="950976" y="2852928"/>
+            <a:off x="950976" y="2560320"/>
             <a:ext cx="1682496" cy="420624"/>
           </a:xfrm>
           <a:prstGeom prst="rect">
@@ -11286,13 +11391,13 @@
       </p:sp>
       <p:sp>
         <p:nvSpPr>
-          <p:cNvPr id="18" name="Oval 17"/>
+          <p:cNvPr id="11" name="Oval 10"/>
           <p:cNvSpPr/>
           <p:nvPr/>
         </p:nvSpPr>
         <p:spPr>
           <a:xfrm>
-            <a:off x="749808" y="3419856"/>
+            <a:off x="749808" y="3127248"/>
             <a:ext cx="91440" cy="91440"/>
           </a:xfrm>
           <a:prstGeom prst="ellipse">
@@ -11315,13 +11420,13 @@
       </p:sp>
       <p:sp>
         <p:nvSpPr>
-          <p:cNvPr id="19" name="TextBox 18"/>
+          <p:cNvPr id="12" name="TextBox 11"/>
           <p:cNvSpPr txBox="1"/>
           <p:nvPr/>
         </p:nvSpPr>
         <p:spPr>
           <a:xfrm>
-            <a:off x="950976" y="3273552"/>
+            <a:off x="950976" y="2980944"/>
             <a:ext cx="1682496" cy="420624"/>
           </a:xfrm>
           <a:prstGeom prst="rect">
@@ -11362,13 +11467,13 @@
       </p:sp>
       <p:sp>
         <p:nvSpPr>
-          <p:cNvPr id="20" name="Oval 19"/>
+          <p:cNvPr id="13" name="Oval 12"/>
           <p:cNvSpPr/>
           <p:nvPr/>
         </p:nvSpPr>
         <p:spPr>
           <a:xfrm>
-            <a:off x="749808" y="3840480"/>
+            <a:off x="749808" y="3547872"/>
             <a:ext cx="91440" cy="91440"/>
           </a:xfrm>
           <a:prstGeom prst="ellipse">
@@ -11391,13 +11496,13 @@
       </p:sp>
       <p:sp>
         <p:nvSpPr>
-          <p:cNvPr id="21" name="TextBox 20"/>
+          <p:cNvPr id="14" name="TextBox 13"/>
           <p:cNvSpPr txBox="1"/>
           <p:nvPr/>
         </p:nvSpPr>
         <p:spPr>
           <a:xfrm>
-            <a:off x="950976" y="3694176"/>
+            <a:off x="950976" y="3401568"/>
             <a:ext cx="1682496" cy="420624"/>
           </a:xfrm>
           <a:prstGeom prst="rect">
@@ -11438,13 +11543,13 @@
       </p:sp>
       <p:sp>
         <p:nvSpPr>
-          <p:cNvPr id="22" name="Oval 21"/>
+          <p:cNvPr id="15" name="Oval 14"/>
           <p:cNvSpPr/>
           <p:nvPr/>
         </p:nvSpPr>
         <p:spPr>
           <a:xfrm>
-            <a:off x="749808" y="4261104"/>
+            <a:off x="749808" y="3968496"/>
             <a:ext cx="91440" cy="91440"/>
           </a:xfrm>
           <a:prstGeom prst="ellipse">
@@ -11467,13 +11572,13 @@
       </p:sp>
       <p:sp>
         <p:nvSpPr>
-          <p:cNvPr id="23" name="TextBox 22"/>
+          <p:cNvPr id="16" name="TextBox 15"/>
           <p:cNvSpPr txBox="1"/>
           <p:nvPr/>
         </p:nvSpPr>
         <p:spPr>
           <a:xfrm>
-            <a:off x="950976" y="4114800"/>
+            <a:off x="950976" y="3822192"/>
             <a:ext cx="1682496" cy="420624"/>
           </a:xfrm>
           <a:prstGeom prst="rect">
@@ -11514,13 +11619,13 @@
       </p:sp>
       <p:sp>
         <p:nvSpPr>
-          <p:cNvPr id="24" name="TextBox 23"/>
+          <p:cNvPr id="17" name="TextBox 16"/>
           <p:cNvSpPr txBox="1"/>
           <p:nvPr/>
         </p:nvSpPr>
         <p:spPr>
           <a:xfrm>
-            <a:off x="749808" y="4754880"/>
+            <a:off x="749808" y="4791456"/>
             <a:ext cx="1883664" cy="274320"/>
           </a:xfrm>
           <a:prstGeom prst="rect">
@@ -11561,13 +11666,13 @@
       </p:sp>
       <p:sp>
         <p:nvSpPr>
-          <p:cNvPr id="25" name="TextBox 24"/>
+          <p:cNvPr id="18" name="TextBox 17"/>
           <p:cNvSpPr txBox="1"/>
           <p:nvPr/>
         </p:nvSpPr>
         <p:spPr>
           <a:xfrm>
-            <a:off x="548640" y="5010912"/>
+            <a:off x="548640" y="5047488"/>
             <a:ext cx="2286000" cy="201168"/>
           </a:xfrm>
           <a:prstGeom prst="rect">
@@ -11608,14 +11713,14 @@
       </p:sp>
       <p:sp>
         <p:nvSpPr>
-          <p:cNvPr id="26" name="Rectangle 25"/>
+          <p:cNvPr id="19" name="Rectangle 18"/>
           <p:cNvSpPr/>
           <p:nvPr/>
         </p:nvSpPr>
         <p:spPr>
           <a:xfrm>
-            <a:off x="3017520" y="2304288"/>
-            <a:ext cx="5760720" cy="2926080"/>
+            <a:off x="3017520" y="2011680"/>
+            <a:ext cx="5760720" cy="3255264"/>
           </a:xfrm>
           <a:prstGeom prst="rect">
             <a:avLst/>
@@ -11639,13 +11744,13 @@
       </p:sp>
       <p:sp>
         <p:nvSpPr>
-          <p:cNvPr id="27" name="TextBox 26"/>
+          <p:cNvPr id="20" name="TextBox 19"/>
           <p:cNvSpPr txBox="1"/>
           <p:nvPr/>
         </p:nvSpPr>
         <p:spPr>
           <a:xfrm>
-            <a:off x="3218688" y="2432304"/>
+            <a:off x="3218688" y="2139696"/>
             <a:ext cx="5358383" cy="310896"/>
           </a:xfrm>
           <a:prstGeom prst="rect">
@@ -11708,14 +11813,14 @@
       </p:sp>
       <p:sp>
         <p:nvSpPr>
-          <p:cNvPr id="28" name="Rectangle 27"/>
+          <p:cNvPr id="21" name="Rectangle 20"/>
           <p:cNvSpPr/>
           <p:nvPr/>
         </p:nvSpPr>
         <p:spPr>
           <a:xfrm>
-            <a:off x="3218688" y="2816352"/>
-            <a:ext cx="5358383" cy="493776"/>
+            <a:off x="3218688" y="2523744"/>
+            <a:ext cx="5358383" cy="621792"/>
           </a:xfrm>
           <a:prstGeom prst="rect">
             <a:avLst/>
@@ -11737,13 +11842,13 @@
       </p:sp>
       <p:sp>
         <p:nvSpPr>
-          <p:cNvPr id="29" name="Oval 28"/>
+          <p:cNvPr id="22" name="Oval 21"/>
           <p:cNvSpPr/>
           <p:nvPr/>
         </p:nvSpPr>
         <p:spPr>
           <a:xfrm>
-            <a:off x="3328416" y="2926080"/>
+            <a:off x="3328416" y="2697480"/>
             <a:ext cx="274320" cy="274320"/>
           </a:xfrm>
           <a:prstGeom prst="ellipse">
@@ -11789,14 +11894,14 @@
       </p:sp>
       <p:sp>
         <p:nvSpPr>
-          <p:cNvPr id="30" name="TextBox 29"/>
+          <p:cNvPr id="23" name="TextBox 22"/>
           <p:cNvSpPr txBox="1"/>
           <p:nvPr/>
         </p:nvSpPr>
         <p:spPr>
           <a:xfrm>
-            <a:off x="3694176" y="2816352"/>
-            <a:ext cx="1371600" cy="493776"/>
+            <a:off x="3694176" y="2523744"/>
+            <a:ext cx="1371600" cy="621792"/>
           </a:xfrm>
           <a:prstGeom prst="rect">
             <a:avLst/>
@@ -11836,14 +11941,14 @@
       </p:sp>
       <p:sp>
         <p:nvSpPr>
-          <p:cNvPr id="31" name="TextBox 30"/>
+          <p:cNvPr id="24" name="TextBox 23"/>
           <p:cNvSpPr txBox="1"/>
           <p:nvPr/>
         </p:nvSpPr>
         <p:spPr>
           <a:xfrm>
-            <a:off x="4892040" y="2816352"/>
-            <a:ext cx="3154680" cy="493776"/>
+            <a:off x="4892040" y="2578608"/>
+            <a:ext cx="3154680" cy="274320"/>
           </a:xfrm>
           <a:prstGeom prst="rect">
             <a:avLst/>
@@ -11876,21 +11981,68 @@
                 <a:ea typeface="Microsoft YaHei"/>
                 <a:cs typeface="Microsoft YaHei"/>
               </a:rPr>
-              <a:t>先完成预检，再验收基线</a:t>
-            </a:r>
-          </a:p>
-        </p:txBody>
-      </p:sp>
-      <p:sp>
-        <p:nvSpPr>
-          <p:cNvPr id="32" name="Rectangle 31"/>
+              <a:t>先完成预检，再跑全量评测</a:t>
+            </a:r>
+          </a:p>
+        </p:txBody>
+      </p:sp>
+      <p:sp>
+        <p:nvSpPr>
+          <p:cNvPr id="25" name="TextBox 24"/>
+          <p:cNvSpPr txBox="1"/>
+          <p:nvPr/>
+        </p:nvSpPr>
+        <p:spPr>
+          <a:xfrm>
+            <a:off x="4892040" y="2852928"/>
+            <a:ext cx="3154680" cy="256032"/>
+          </a:xfrm>
+          <a:prstGeom prst="rect">
+            <a:avLst/>
+          </a:prstGeom>
+          <a:noFill/>
+        </p:spPr>
+        <p:txBody>
+          <a:bodyPr wrap="square" anchor="ctr" lIns="0" tIns="0" rIns="0" bIns="0">
+            <a:noAutofit/>
+          </a:bodyPr>
+          <a:lstStyle/>
+          <a:p>
+            <a:pPr algn="l" latinLnBrk="0">
+              <a:lnSpc>
+                <a:spcPct val="100000"/>
+              </a:lnSpc>
+              <a:spcBef>
+                <a:spcPts val="0"/>
+              </a:spcBef>
+              <a:spcAft>
+                <a:spcPts val="0"/>
+              </a:spcAft>
+            </a:pPr>
+            <a:r>
+              <a:rPr sz="950" b="0">
+                <a:solidFill>
+                  <a:srgbClr val="66727F"/>
+                </a:solidFill>
+                <a:latin typeface="Microsoft YaHei"/>
+                <a:ea typeface="Microsoft YaHei"/>
+                <a:cs typeface="Microsoft YaHei"/>
+              </a:rPr>
+              <a:t>产出：基线指标与可复现的启动方式</a:t>
+            </a:r>
+          </a:p>
+        </p:txBody>
+      </p:sp>
+      <p:sp>
+        <p:nvSpPr>
+          <p:cNvPr id="26" name="Rectangle 25"/>
           <p:cNvSpPr/>
           <p:nvPr/>
         </p:nvSpPr>
         <p:spPr>
           <a:xfrm>
-            <a:off x="3218688" y="3346704"/>
-            <a:ext cx="5358383" cy="493776"/>
+            <a:off x="3218688" y="3182112"/>
+            <a:ext cx="5358383" cy="621792"/>
           </a:xfrm>
           <a:prstGeom prst="rect">
             <a:avLst/>
@@ -11912,13 +12064,13 @@
       </p:sp>
       <p:sp>
         <p:nvSpPr>
-          <p:cNvPr id="33" name="Oval 32"/>
+          <p:cNvPr id="27" name="Oval 26"/>
           <p:cNvSpPr/>
           <p:nvPr/>
         </p:nvSpPr>
         <p:spPr>
           <a:xfrm>
-            <a:off x="3328416" y="3456432"/>
+            <a:off x="3328416" y="3355848"/>
             <a:ext cx="274320" cy="274320"/>
           </a:xfrm>
           <a:prstGeom prst="ellipse">
@@ -11964,14 +12116,14 @@
       </p:sp>
       <p:sp>
         <p:nvSpPr>
-          <p:cNvPr id="34" name="TextBox 33"/>
+          <p:cNvPr id="28" name="TextBox 27"/>
           <p:cNvSpPr txBox="1"/>
           <p:nvPr/>
         </p:nvSpPr>
         <p:spPr>
           <a:xfrm>
-            <a:off x="3694176" y="3346704"/>
-            <a:ext cx="1371600" cy="493776"/>
+            <a:off x="3694176" y="3182112"/>
+            <a:ext cx="1371600" cy="621792"/>
           </a:xfrm>
           <a:prstGeom prst="rect">
             <a:avLst/>
@@ -12011,14 +12163,14 @@
       </p:sp>
       <p:sp>
         <p:nvSpPr>
-          <p:cNvPr id="35" name="TextBox 34"/>
+          <p:cNvPr id="29" name="TextBox 28"/>
           <p:cNvSpPr txBox="1"/>
           <p:nvPr/>
         </p:nvSpPr>
         <p:spPr>
           <a:xfrm>
-            <a:off x="4892040" y="3346704"/>
-            <a:ext cx="3154680" cy="493776"/>
+            <a:off x="4892040" y="3236976"/>
+            <a:ext cx="3154680" cy="274320"/>
           </a:xfrm>
           <a:prstGeom prst="rect">
             <a:avLst/>
@@ -12051,21 +12203,68 @@
                 <a:ea typeface="Microsoft YaHei"/>
                 <a:cs typeface="Microsoft YaHei"/>
               </a:rPr>
-              <a:t>独立采样，只用于诊断</a:t>
-            </a:r>
-          </a:p>
-        </p:txBody>
-      </p:sp>
-      <p:sp>
-        <p:nvSpPr>
-          <p:cNvPr id="36" name="Rectangle 35"/>
+              <a:t>独立进程采样，不参与计时</a:t>
+            </a:r>
+          </a:p>
+        </p:txBody>
+      </p:sp>
+      <p:sp>
+        <p:nvSpPr>
+          <p:cNvPr id="30" name="TextBox 29"/>
+          <p:cNvSpPr txBox="1"/>
+          <p:nvPr/>
+        </p:nvSpPr>
+        <p:spPr>
+          <a:xfrm>
+            <a:off x="4892040" y="3511296"/>
+            <a:ext cx="3154680" cy="256032"/>
+          </a:xfrm>
+          <a:prstGeom prst="rect">
+            <a:avLst/>
+          </a:prstGeom>
+          <a:noFill/>
+        </p:spPr>
+        <p:txBody>
+          <a:bodyPr wrap="square" anchor="ctr" lIns="0" tIns="0" rIns="0" bIns="0">
+            <a:noAutofit/>
+          </a:bodyPr>
+          <a:lstStyle/>
+          <a:p>
+            <a:pPr algn="l" latinLnBrk="0">
+              <a:lnSpc>
+                <a:spcPct val="100000"/>
+              </a:lnSpc>
+              <a:spcBef>
+                <a:spcPts val="0"/>
+              </a:spcBef>
+              <a:spcAft>
+                <a:spcPts val="0"/>
+              </a:spcAft>
+            </a:pPr>
+            <a:r>
+              <a:rPr sz="950" b="0">
+                <a:solidFill>
+                  <a:srgbClr val="66727F"/>
+                </a:solidFill>
+                <a:latin typeface="Microsoft YaHei"/>
+                <a:ea typeface="Microsoft YaHei"/>
+                <a:cs typeface="Microsoft YaHei"/>
+              </a:rPr>
+              <a:t>产出：热点清单，只用于选方向</a:t>
+            </a:r>
+          </a:p>
+        </p:txBody>
+      </p:sp>
+      <p:sp>
+        <p:nvSpPr>
+          <p:cNvPr id="31" name="Rectangle 30"/>
           <p:cNvSpPr/>
           <p:nvPr/>
         </p:nvSpPr>
         <p:spPr>
           <a:xfrm>
-            <a:off x="3218688" y="3877056"/>
-            <a:ext cx="5358383" cy="493776"/>
+            <a:off x="3218688" y="3840480"/>
+            <a:ext cx="5358383" cy="621792"/>
           </a:xfrm>
           <a:prstGeom prst="rect">
             <a:avLst/>
@@ -12087,13 +12286,13 @@
       </p:sp>
       <p:sp>
         <p:nvSpPr>
-          <p:cNvPr id="37" name="Oval 36"/>
+          <p:cNvPr id="32" name="Oval 31"/>
           <p:cNvSpPr/>
           <p:nvPr/>
         </p:nvSpPr>
         <p:spPr>
           <a:xfrm>
-            <a:off x="3328416" y="3986784"/>
+            <a:off x="3328416" y="4014216"/>
             <a:ext cx="274320" cy="274320"/>
           </a:xfrm>
           <a:prstGeom prst="ellipse">
@@ -12139,14 +12338,14 @@
       </p:sp>
       <p:sp>
         <p:nvSpPr>
-          <p:cNvPr id="38" name="TextBox 37"/>
+          <p:cNvPr id="33" name="TextBox 32"/>
           <p:cNvSpPr txBox="1"/>
           <p:nvPr/>
         </p:nvSpPr>
         <p:spPr>
           <a:xfrm>
-            <a:off x="3694176" y="3877056"/>
-            <a:ext cx="1371600" cy="493776"/>
+            <a:off x="3694176" y="3840480"/>
+            <a:ext cx="1371600" cy="621792"/>
           </a:xfrm>
           <a:prstGeom prst="rect">
             <a:avLst/>
@@ -12186,14 +12385,14 @@
       </p:sp>
       <p:sp>
         <p:nvSpPr>
-          <p:cNvPr id="39" name="TextBox 38"/>
+          <p:cNvPr id="34" name="TextBox 33"/>
           <p:cNvSpPr txBox="1"/>
           <p:nvPr/>
         </p:nvSpPr>
         <p:spPr>
           <a:xfrm>
-            <a:off x="4892040" y="3877056"/>
-            <a:ext cx="3154680" cy="493776"/>
+            <a:off x="4892040" y="3895344"/>
+            <a:ext cx="3154680" cy="274320"/>
           </a:xfrm>
           <a:prstGeom prst="rect">
             <a:avLst/>
@@ -12226,21 +12425,68 @@
                 <a:ea typeface="Microsoft YaHei"/>
                 <a:cs typeface="Microsoft YaHei"/>
               </a:rPr>
-              <a:t>小步改动，逐轮验证收益</a:t>
-            </a:r>
-          </a:p>
-        </p:txBody>
-      </p:sp>
-      <p:sp>
-        <p:nvSpPr>
-          <p:cNvPr id="40" name="Freeform 39"/>
+              <a:t>小步改动，逐个按三道条件验收</a:t>
+            </a:r>
+          </a:p>
+        </p:txBody>
+      </p:sp>
+      <p:sp>
+        <p:nvSpPr>
+          <p:cNvPr id="35" name="TextBox 34"/>
+          <p:cNvSpPr txBox="1"/>
+          <p:nvPr/>
+        </p:nvSpPr>
+        <p:spPr>
+          <a:xfrm>
+            <a:off x="4892040" y="4169664"/>
+            <a:ext cx="3154680" cy="256032"/>
+          </a:xfrm>
+          <a:prstGeom prst="rect">
+            <a:avLst/>
+          </a:prstGeom>
+          <a:noFill/>
+        </p:spPr>
+        <p:txBody>
+          <a:bodyPr wrap="square" anchor="ctr" lIns="0" tIns="0" rIns="0" bIns="0">
+            <a:noAutofit/>
+          </a:bodyPr>
+          <a:lstStyle/>
+          <a:p>
+            <a:pPr algn="l" latinLnBrk="0">
+              <a:lnSpc>
+                <a:spcPct val="100000"/>
+              </a:lnSpc>
+              <a:spcBef>
+                <a:spcPts val="0"/>
+              </a:spcBef>
+              <a:spcAft>
+                <a:spcPts val="0"/>
+              </a:spcAft>
+            </a:pPr>
+            <a:r>
+              <a:rPr sz="950" b="0">
+                <a:solidFill>
+                  <a:srgbClr val="C0612C"/>
+                </a:solidFill>
+                <a:latin typeface="Microsoft YaHei"/>
+                <a:ea typeface="Microsoft YaHei"/>
+                <a:cs typeface="Microsoft YaHei"/>
+              </a:rPr>
+              <a:t>产出：通过筛选的候选与各自收益　→ 下一页</a:t>
+            </a:r>
+          </a:p>
+        </p:txBody>
+      </p:sp>
+      <p:sp>
+        <p:nvSpPr>
+          <p:cNvPr id="36" name="Freeform 35"/>
           <p:cNvSpPr/>
           <p:nvPr/>
         </p:nvSpPr>
         <p:spPr>
           <a:xfrm>
             <a:off x="8138160" y="3968496"/>
-            <a:ext cx="237744" cy="310896"/>
+            <a:ext cx="237744" cy="365760"/>
           </a:xfrm>
           <a:custGeom>
             <a:avLst/>
@@ -12249,12 +12495,12 @@
             <a:cxnLst/>
             <a:rect l="l" t="t" r="r" b="b"/>
             <a:pathLst>
-              <a:path w="237744" h="310896">
+              <a:path w="237744" h="365760">
                 <a:moveTo>
-                  <a:pt x="0" y="310896"/>
+                  <a:pt x="0" y="365760"/>
                 </a:moveTo>
                 <a:lnTo>
-                  <a:pt x="237744" y="310896"/>
+                  <a:pt x="237744" y="365760"/>
                 </a:lnTo>
                 <a:lnTo>
                   <a:pt x="237744" y="0"/>
@@ -12283,14 +12529,14 @@
       </p:sp>
       <p:sp>
         <p:nvSpPr>
-          <p:cNvPr id="41" name="Rectangle 40"/>
+          <p:cNvPr id="37" name="Rectangle 36"/>
           <p:cNvSpPr/>
           <p:nvPr/>
         </p:nvSpPr>
         <p:spPr>
           <a:xfrm>
-            <a:off x="3218688" y="4407408"/>
-            <a:ext cx="5358383" cy="493776"/>
+            <a:off x="3218688" y="4498848"/>
+            <a:ext cx="5358383" cy="621792"/>
           </a:xfrm>
           <a:prstGeom prst="rect">
             <a:avLst/>
@@ -12312,13 +12558,13 @@
       </p:sp>
       <p:sp>
         <p:nvSpPr>
-          <p:cNvPr id="42" name="Oval 41"/>
+          <p:cNvPr id="38" name="Oval 37"/>
           <p:cNvSpPr/>
           <p:nvPr/>
         </p:nvSpPr>
         <p:spPr>
           <a:xfrm>
-            <a:off x="3328416" y="4517136"/>
+            <a:off x="3328416" y="4672584"/>
             <a:ext cx="274320" cy="274320"/>
           </a:xfrm>
           <a:prstGeom prst="ellipse">
@@ -12364,14 +12610,14 @@
       </p:sp>
       <p:sp>
         <p:nvSpPr>
-          <p:cNvPr id="43" name="TextBox 42"/>
+          <p:cNvPr id="39" name="TextBox 38"/>
           <p:cNvSpPr txBox="1"/>
           <p:nvPr/>
         </p:nvSpPr>
         <p:spPr>
           <a:xfrm>
-            <a:off x="3694176" y="4407408"/>
-            <a:ext cx="1371600" cy="493776"/>
+            <a:off x="3694176" y="4498848"/>
+            <a:ext cx="1371600" cy="621792"/>
           </a:xfrm>
           <a:prstGeom prst="rect">
             <a:avLst/>
@@ -12411,14 +12657,14 @@
       </p:sp>
       <p:sp>
         <p:nvSpPr>
-          <p:cNvPr id="44" name="TextBox 43"/>
+          <p:cNvPr id="40" name="TextBox 39"/>
           <p:cNvSpPr txBox="1"/>
           <p:nvPr/>
         </p:nvSpPr>
         <p:spPr>
           <a:xfrm>
-            <a:off x="4892040" y="4407408"/>
-            <a:ext cx="3154680" cy="493776"/>
+            <a:off x="4892040" y="4553712"/>
+            <a:ext cx="3154680" cy="274320"/>
           </a:xfrm>
           <a:prstGeom prst="rect">
             <a:avLst/>
@@ -12451,21 +12697,21 @@
                 <a:ea typeface="Microsoft YaHei"/>
                 <a:cs typeface="Microsoft YaHei"/>
               </a:rPr>
-              <a:t>重测基线与候选，独立复验</a:t>
-            </a:r>
-          </a:p>
-        </p:txBody>
-      </p:sp>
-      <p:sp>
-        <p:nvSpPr>
-          <p:cNvPr id="45" name="TextBox 44"/>
+              <a:t>重测基线，独立复验每个候选</a:t>
+            </a:r>
+          </a:p>
+        </p:txBody>
+      </p:sp>
+      <p:sp>
+        <p:nvSpPr>
+          <p:cNvPr id="41" name="TextBox 40"/>
           <p:cNvSpPr txBox="1"/>
           <p:nvPr/>
         </p:nvSpPr>
         <p:spPr>
           <a:xfrm>
-            <a:off x="4892040" y="4956048"/>
-            <a:ext cx="3611880" cy="237744"/>
+            <a:off x="4892040" y="4828032"/>
+            <a:ext cx="3154680" cy="256032"/>
           </a:xfrm>
           <a:prstGeom prst="rect">
             <a:avLst/>
@@ -12490,29 +12736,29 @@
               </a:spcAft>
             </a:pPr>
             <a:r>
-              <a:rPr sz="1000" b="0">
-                <a:solidFill>
-                  <a:srgbClr val="C0612C"/>
-                </a:solidFill>
-                <a:latin typeface="Microsoft YaHei"/>
-                <a:ea typeface="Microsoft YaHei"/>
-                <a:cs typeface="Microsoft YaHei"/>
-              </a:rPr>
-              <a:t>每个候选如何验收 → 下一页</a:t>
-            </a:r>
-          </a:p>
-        </p:txBody>
-      </p:sp>
-      <p:sp>
-        <p:nvSpPr>
-          <p:cNvPr id="46" name="Rectangle 45"/>
+              <a:rPr sz="950" b="0">
+                <a:solidFill>
+                  <a:srgbClr val="66727F"/>
+                </a:solidFill>
+                <a:latin typeface="Microsoft YaHei"/>
+                <a:ea typeface="Microsoft YaHei"/>
+                <a:cs typeface="Microsoft YaHei"/>
+              </a:rPr>
+              <a:t>产出：可交付的最优候选</a:t>
+            </a:r>
+          </a:p>
+        </p:txBody>
+      </p:sp>
+      <p:sp>
+        <p:nvSpPr>
+          <p:cNvPr id="42" name="Rectangle 41"/>
           <p:cNvSpPr/>
           <p:nvPr/>
         </p:nvSpPr>
         <p:spPr>
           <a:xfrm>
-            <a:off x="8961119" y="2304288"/>
-            <a:ext cx="2681935" cy="2926080"/>
+            <a:off x="8961119" y="2011680"/>
+            <a:ext cx="2681935" cy="3255264"/>
           </a:xfrm>
           <a:prstGeom prst="rect">
             <a:avLst/>
@@ -12534,13 +12780,13 @@
       </p:sp>
       <p:sp>
         <p:nvSpPr>
-          <p:cNvPr id="47" name="Rectangle 46"/>
+          <p:cNvPr id="43" name="Rectangle 42"/>
           <p:cNvSpPr/>
           <p:nvPr/>
         </p:nvSpPr>
         <p:spPr>
           <a:xfrm>
-            <a:off x="8961119" y="2304288"/>
+            <a:off x="8961119" y="2011680"/>
             <a:ext cx="2681935" cy="45720"/>
           </a:xfrm>
           <a:prstGeom prst="rect">
@@ -12563,13 +12809,13 @@
       </p:sp>
       <p:sp>
         <p:nvSpPr>
-          <p:cNvPr id="48" name="TextBox 47"/>
+          <p:cNvPr id="44" name="TextBox 43"/>
           <p:cNvSpPr txBox="1"/>
           <p:nvPr/>
         </p:nvSpPr>
         <p:spPr>
           <a:xfrm>
-            <a:off x="9162288" y="2432304"/>
+            <a:off x="9162288" y="2139696"/>
             <a:ext cx="2279599" cy="310896"/>
           </a:xfrm>
           <a:prstGeom prst="rect">
@@ -12621,13 +12867,13 @@
       </p:sp>
       <p:sp>
         <p:nvSpPr>
-          <p:cNvPr id="49" name="Oval 48"/>
+          <p:cNvPr id="45" name="Oval 44"/>
           <p:cNvSpPr/>
           <p:nvPr/>
         </p:nvSpPr>
         <p:spPr>
           <a:xfrm>
-            <a:off x="9162288" y="2999232"/>
+            <a:off x="9162288" y="2706624"/>
             <a:ext cx="91440" cy="91440"/>
           </a:xfrm>
           <a:prstGeom prst="ellipse">
@@ -12650,13 +12896,13 @@
       </p:sp>
       <p:sp>
         <p:nvSpPr>
-          <p:cNvPr id="50" name="TextBox 49"/>
+          <p:cNvPr id="46" name="TextBox 45"/>
           <p:cNvSpPr txBox="1"/>
           <p:nvPr/>
         </p:nvSpPr>
         <p:spPr>
           <a:xfrm>
-            <a:off x="9363456" y="2852928"/>
+            <a:off x="9363456" y="2560320"/>
             <a:ext cx="2078431" cy="420624"/>
           </a:xfrm>
           <a:prstGeom prst="rect">
@@ -12697,13 +12943,13 @@
       </p:sp>
       <p:sp>
         <p:nvSpPr>
-          <p:cNvPr id="51" name="Oval 50"/>
+          <p:cNvPr id="47" name="Oval 46"/>
           <p:cNvSpPr/>
           <p:nvPr/>
         </p:nvSpPr>
         <p:spPr>
           <a:xfrm>
-            <a:off x="9162288" y="3419856"/>
+            <a:off x="9162288" y="3127248"/>
             <a:ext cx="91440" cy="91440"/>
           </a:xfrm>
           <a:prstGeom prst="ellipse">
@@ -12726,13 +12972,13 @@
       </p:sp>
       <p:sp>
         <p:nvSpPr>
-          <p:cNvPr id="52" name="TextBox 51"/>
+          <p:cNvPr id="48" name="TextBox 47"/>
           <p:cNvSpPr txBox="1"/>
           <p:nvPr/>
         </p:nvSpPr>
         <p:spPr>
           <a:xfrm>
-            <a:off x="9363456" y="3273552"/>
+            <a:off x="9363456" y="2980944"/>
             <a:ext cx="2078431" cy="420624"/>
           </a:xfrm>
           <a:prstGeom prst="rect">
@@ -12773,13 +13019,13 @@
       </p:sp>
       <p:sp>
         <p:nvSpPr>
-          <p:cNvPr id="53" name="Oval 52"/>
+          <p:cNvPr id="49" name="Oval 48"/>
           <p:cNvSpPr/>
           <p:nvPr/>
         </p:nvSpPr>
         <p:spPr>
           <a:xfrm>
-            <a:off x="9162288" y="3840480"/>
+            <a:off x="9162288" y="3547872"/>
             <a:ext cx="91440" cy="91440"/>
           </a:xfrm>
           <a:prstGeom prst="ellipse">
@@ -12802,13 +13048,13 @@
       </p:sp>
       <p:sp>
         <p:nvSpPr>
-          <p:cNvPr id="54" name="TextBox 53"/>
+          <p:cNvPr id="50" name="TextBox 49"/>
           <p:cNvSpPr txBox="1"/>
           <p:nvPr/>
         </p:nvSpPr>
         <p:spPr>
           <a:xfrm>
-            <a:off x="9363456" y="3694176"/>
+            <a:off x="9363456" y="3401568"/>
             <a:ext cx="2078431" cy="420624"/>
           </a:xfrm>
           <a:prstGeom prst="rect">
@@ -12849,13 +13095,13 @@
       </p:sp>
       <p:sp>
         <p:nvSpPr>
-          <p:cNvPr id="55" name="Oval 54"/>
+          <p:cNvPr id="51" name="Oval 50"/>
           <p:cNvSpPr/>
           <p:nvPr/>
         </p:nvSpPr>
         <p:spPr>
           <a:xfrm>
-            <a:off x="9162288" y="4261104"/>
+            <a:off x="9162288" y="3968496"/>
             <a:ext cx="91440" cy="91440"/>
           </a:xfrm>
           <a:prstGeom prst="ellipse">
@@ -12878,13 +13124,13 @@
       </p:sp>
       <p:sp>
         <p:nvSpPr>
-          <p:cNvPr id="56" name="TextBox 55"/>
+          <p:cNvPr id="52" name="TextBox 51"/>
           <p:cNvSpPr txBox="1"/>
           <p:nvPr/>
         </p:nvSpPr>
         <p:spPr>
           <a:xfrm>
-            <a:off x="9363456" y="4114800"/>
+            <a:off x="9363456" y="3822192"/>
             <a:ext cx="2078431" cy="420624"/>
           </a:xfrm>
           <a:prstGeom prst="rect">
@@ -12925,13 +13171,13 @@
       </p:sp>
       <p:sp>
         <p:nvSpPr>
-          <p:cNvPr id="57" name="TextBox 56"/>
+          <p:cNvPr id="53" name="TextBox 52"/>
           <p:cNvSpPr txBox="1"/>
           <p:nvPr/>
         </p:nvSpPr>
         <p:spPr>
           <a:xfrm>
-            <a:off x="9162288" y="4754880"/>
+            <a:off x="9162288" y="4791456"/>
             <a:ext cx="2279599" cy="274320"/>
           </a:xfrm>
           <a:prstGeom prst="rect">
@@ -12972,13 +13218,13 @@
       </p:sp>
       <p:sp>
         <p:nvSpPr>
-          <p:cNvPr id="58" name="TextBox 57"/>
+          <p:cNvPr id="54" name="TextBox 53"/>
           <p:cNvSpPr txBox="1"/>
           <p:nvPr/>
         </p:nvSpPr>
         <p:spPr>
           <a:xfrm>
-            <a:off x="8961119" y="5010912"/>
+            <a:off x="8961119" y="5047488"/>
             <a:ext cx="2681935" cy="201168"/>
           </a:xfrm>
           <a:prstGeom prst="rect">
@@ -13019,13 +13265,13 @@
       </p:sp>
       <p:sp>
         <p:nvSpPr>
-          <p:cNvPr id="59" name="Freeform 58"/>
+          <p:cNvPr id="55" name="Freeform 54"/>
           <p:cNvSpPr/>
           <p:nvPr/>
         </p:nvSpPr>
         <p:spPr>
           <a:xfrm>
-            <a:off x="1691640" y="5230368"/>
+            <a:off x="1691640" y="5266944"/>
             <a:ext cx="8610447" cy="237744"/>
           </a:xfrm>
           <a:custGeom>
@@ -13069,13 +13315,13 @@
       </p:sp>
       <p:sp>
         <p:nvSpPr>
-          <p:cNvPr id="60" name="TextBox 59"/>
+          <p:cNvPr id="56" name="TextBox 55"/>
           <p:cNvSpPr txBox="1"/>
           <p:nvPr/>
         </p:nvSpPr>
         <p:spPr>
           <a:xfrm>
-            <a:off x="548640" y="5541264"/>
+            <a:off x="548640" y="5577840"/>
             <a:ext cx="11094415" cy="274320"/>
           </a:xfrm>
           <a:prstGeom prst="rect">
@@ -13116,7 +13362,7 @@
       </p:sp>
       <p:sp>
         <p:nvSpPr>
-          <p:cNvPr id="61" name="TextBox 60"/>
+          <p:cNvPr id="57" name="TextBox 56"/>
           <p:cNvSpPr txBox="1"/>
           <p:nvPr/>
         </p:nvSpPr>
@@ -13156,14 +13402,14 @@
                 <a:ea typeface="Microsoft YaHei"/>
                 <a:cs typeface="Microsoft YaHei"/>
               </a:rPr>
-              <a:t>三个阶段共用同一套契约与验收口径；架构接入验收通过后自动交接到优化</a:t>
-            </a:r>
-          </a:p>
-        </p:txBody>
-      </p:sp>
-      <p:sp>
-        <p:nvSpPr>
-          <p:cNvPr id="62" name="TextBox 61"/>
+              <a:t>已有流程可自动执行；新架构、未知缺陷与关键决策仍需要人工参与</a:t>
+            </a:r>
+          </a:p>
+        </p:txBody>
+      </p:sp>
+      <p:sp>
+        <p:nvSpPr>
+          <p:cNvPr id="58" name="TextBox 57"/>
           <p:cNvSpPr txBox="1"/>
           <p:nvPr/>
         </p:nvSpPr>
@@ -13203,7 +13449,7 @@
                 <a:ea typeface="Microsoft YaHei"/>
                 <a:cs typeface="Microsoft YaHei"/>
               </a:rPr>
-              <a:t>4 / 8</a:t>
+              <a:t>4 / 9</a:t>
             </a:r>
           </a:p>
         </p:txBody>
@@ -13268,7 +13514,7 @@
                 <a:ea typeface="Microsoft YaHei"/>
                 <a:cs typeface="Microsoft YaHei"/>
               </a:rPr>
-              <a:t>模型层 · 单个候选的验收</a:t>
+              <a:t>模型层 · 凭什么相信这些数字</a:t>
             </a:r>
           </a:p>
         </p:txBody>
@@ -13362,7 +13608,7 @@
                 <a:ea typeface="Microsoft YaHei"/>
                 <a:cs typeface="Microsoft YaHei"/>
               </a:rPr>
-              <a:t>三道条件由便宜到贵排列；判据为任务冻结时写定的阈值，不由模型解释</a:t>
+              <a:t>这一页回答一个问题：Agent 报出来的收益，凭什么可信</a:t>
             </a:r>
           </a:p>
         </p:txBody>
@@ -13375,8 +13621,8 @@
         </p:nvSpPr>
         <p:spPr>
           <a:xfrm>
-            <a:off x="548640" y="1737360"/>
-            <a:ext cx="6156655" cy="274320"/>
+            <a:off x="548640" y="1719072"/>
+            <a:ext cx="6156655" cy="256032"/>
           </a:xfrm>
           <a:prstGeom prst="rect">
             <a:avLst/>
@@ -13433,8 +13679,8 @@
         </p:nvSpPr>
         <p:spPr>
           <a:xfrm>
-            <a:off x="548640" y="2084831"/>
-            <a:ext cx="6156655" cy="402336"/>
+            <a:off x="548640" y="2029968"/>
+            <a:ext cx="6156655" cy="384048"/>
           </a:xfrm>
           <a:prstGeom prst="rect">
             <a:avLst/>
@@ -13462,8 +13708,8 @@
         </p:nvSpPr>
         <p:spPr>
           <a:xfrm>
-            <a:off x="768096" y="2084831"/>
-            <a:ext cx="5717743" cy="402336"/>
+            <a:off x="768096" y="2029968"/>
+            <a:ext cx="5717743" cy="384048"/>
           </a:xfrm>
           <a:prstGeom prst="rect">
             <a:avLst/>
@@ -13520,8 +13766,8 @@
         </p:nvSpPr>
         <p:spPr>
           <a:xfrm>
-            <a:off x="548640" y="2633472"/>
-            <a:ext cx="6156655" cy="493776"/>
+            <a:off x="548640" y="2523744"/>
+            <a:ext cx="6156655" cy="457200"/>
           </a:xfrm>
           <a:prstGeom prst="rect">
             <a:avLst/>
@@ -13551,8 +13797,8 @@
         </p:nvSpPr>
         <p:spPr>
           <a:xfrm>
-            <a:off x="713232" y="2633472"/>
-            <a:ext cx="329184" cy="493776"/>
+            <a:off x="713232" y="2523744"/>
+            <a:ext cx="329184" cy="457200"/>
           </a:xfrm>
           <a:prstGeom prst="rect">
             <a:avLst/>
@@ -13598,8 +13844,8 @@
         </p:nvSpPr>
         <p:spPr>
           <a:xfrm>
-            <a:off x="1078992" y="2633472"/>
-            <a:ext cx="914400" cy="493776"/>
+            <a:off x="1078992" y="2523744"/>
+            <a:ext cx="914400" cy="457200"/>
           </a:xfrm>
           <a:prstGeom prst="rect">
             <a:avLst/>
@@ -13645,8 +13891,8 @@
         </p:nvSpPr>
         <p:spPr>
           <a:xfrm>
-            <a:off x="2066543" y="2633472"/>
-            <a:ext cx="2011680" cy="493776"/>
+            <a:off x="2066543" y="2523744"/>
+            <a:ext cx="2011680" cy="457200"/>
           </a:xfrm>
           <a:prstGeom prst="rect">
             <a:avLst/>
@@ -13692,8 +13938,8 @@
         </p:nvSpPr>
         <p:spPr>
           <a:xfrm>
-            <a:off x="4151376" y="2633472"/>
-            <a:ext cx="2389327" cy="493776"/>
+            <a:off x="4151376" y="2523744"/>
+            <a:ext cx="2389327" cy="457200"/>
           </a:xfrm>
           <a:prstGeom prst="rect">
             <a:avLst/>
@@ -13739,8 +13985,8 @@
         </p:nvSpPr>
         <p:spPr>
           <a:xfrm>
-            <a:off x="548640" y="3200400"/>
-            <a:ext cx="6156655" cy="493776"/>
+            <a:off x="548640" y="3035808"/>
+            <a:ext cx="6156655" cy="457200"/>
           </a:xfrm>
           <a:prstGeom prst="rect">
             <a:avLst/>
@@ -13770,8 +14016,8 @@
         </p:nvSpPr>
         <p:spPr>
           <a:xfrm>
-            <a:off x="713232" y="3200400"/>
-            <a:ext cx="329184" cy="493776"/>
+            <a:off x="713232" y="3035808"/>
+            <a:ext cx="329184" cy="457200"/>
           </a:xfrm>
           <a:prstGeom prst="rect">
             <a:avLst/>
@@ -13817,8 +14063,8 @@
         </p:nvSpPr>
         <p:spPr>
           <a:xfrm>
-            <a:off x="1078992" y="3200400"/>
-            <a:ext cx="914400" cy="493776"/>
+            <a:off x="1078992" y="3035808"/>
+            <a:ext cx="914400" cy="457200"/>
           </a:xfrm>
           <a:prstGeom prst="rect">
             <a:avLst/>
@@ -13864,8 +14110,8 @@
         </p:nvSpPr>
         <p:spPr>
           <a:xfrm>
-            <a:off x="2066543" y="3200400"/>
-            <a:ext cx="2011680" cy="493776"/>
+            <a:off x="2066543" y="3035808"/>
+            <a:ext cx="2011680" cy="457200"/>
           </a:xfrm>
           <a:prstGeom prst="rect">
             <a:avLst/>
@@ -13911,8 +14157,8 @@
         </p:nvSpPr>
         <p:spPr>
           <a:xfrm>
-            <a:off x="4151376" y="3200400"/>
-            <a:ext cx="2389327" cy="493776"/>
+            <a:off x="4151376" y="3035808"/>
+            <a:ext cx="2389327" cy="457200"/>
           </a:xfrm>
           <a:prstGeom prst="rect">
             <a:avLst/>
@@ -13958,8 +14204,8 @@
         </p:nvSpPr>
         <p:spPr>
           <a:xfrm>
-            <a:off x="548640" y="3767328"/>
-            <a:ext cx="6156655" cy="493776"/>
+            <a:off x="548640" y="3547872"/>
+            <a:ext cx="6156655" cy="457200"/>
           </a:xfrm>
           <a:prstGeom prst="rect">
             <a:avLst/>
@@ -13989,8 +14235,8 @@
         </p:nvSpPr>
         <p:spPr>
           <a:xfrm>
-            <a:off x="713232" y="3767328"/>
-            <a:ext cx="329184" cy="493776"/>
+            <a:off x="713232" y="3547872"/>
+            <a:ext cx="329184" cy="457200"/>
           </a:xfrm>
           <a:prstGeom prst="rect">
             <a:avLst/>
@@ -14036,8 +14282,8 @@
         </p:nvSpPr>
         <p:spPr>
           <a:xfrm>
-            <a:off x="1078992" y="3767328"/>
-            <a:ext cx="914400" cy="493776"/>
+            <a:off x="1078992" y="3547872"/>
+            <a:ext cx="914400" cy="457200"/>
           </a:xfrm>
           <a:prstGeom prst="rect">
             <a:avLst/>
@@ -14083,8 +14329,8 @@
         </p:nvSpPr>
         <p:spPr>
           <a:xfrm>
-            <a:off x="2066543" y="3767328"/>
-            <a:ext cx="2011680" cy="493776"/>
+            <a:off x="2066543" y="3547872"/>
+            <a:ext cx="2011680" cy="457200"/>
           </a:xfrm>
           <a:prstGeom prst="rect">
             <a:avLst/>
@@ -14130,8 +14376,8 @@
         </p:nvSpPr>
         <p:spPr>
           <a:xfrm>
-            <a:off x="4151376" y="3767328"/>
-            <a:ext cx="2389327" cy="493776"/>
+            <a:off x="4151376" y="3547872"/>
+            <a:ext cx="2389327" cy="457200"/>
           </a:xfrm>
           <a:prstGeom prst="rect">
             <a:avLst/>
@@ -14177,8 +14423,8 @@
         </p:nvSpPr>
         <p:spPr>
           <a:xfrm>
-            <a:off x="548640" y="4425696"/>
-            <a:ext cx="6156655" cy="274320"/>
+            <a:off x="548640" y="4023360"/>
+            <a:ext cx="6156655" cy="201168"/>
           </a:xfrm>
           <a:prstGeom prst="rect">
             <a:avLst/>
@@ -14203,6 +14449,53 @@
               </a:spcAft>
             </a:pPr>
             <a:r>
+              <a:rPr sz="950" b="0">
+                <a:solidFill>
+                  <a:srgbClr val="66727F"/>
+                </a:solidFill>
+                <a:latin typeface="Microsoft YaHei"/>
+                <a:ea typeface="Microsoft YaHei"/>
+                <a:cs typeface="Microsoft YaHei"/>
+              </a:rPr>
+              <a:t>由便宜到贵排列，任一道不通过即停止后续测试</a:t>
+            </a:r>
+          </a:p>
+        </p:txBody>
+      </p:sp>
+      <p:sp>
+        <p:nvSpPr>
+          <p:cNvPr id="24" name="TextBox 23"/>
+          <p:cNvSpPr txBox="1"/>
+          <p:nvPr/>
+        </p:nvSpPr>
+        <p:spPr>
+          <a:xfrm>
+            <a:off x="548640" y="4389120"/>
+            <a:ext cx="6156655" cy="256032"/>
+          </a:xfrm>
+          <a:prstGeom prst="rect">
+            <a:avLst/>
+          </a:prstGeom>
+          <a:noFill/>
+        </p:spPr>
+        <p:txBody>
+          <a:bodyPr wrap="square" anchor="ctr" lIns="0" tIns="0" rIns="0" bIns="0">
+            <a:noAutofit/>
+          </a:bodyPr>
+          <a:lstStyle/>
+          <a:p>
+            <a:pPr algn="l" latinLnBrk="0">
+              <a:lnSpc>
+                <a:spcPct val="100000"/>
+              </a:lnSpc>
+              <a:spcBef>
+                <a:spcPts val="0"/>
+              </a:spcBef>
+              <a:spcAft>
+                <a:spcPts val="0"/>
+              </a:spcAft>
+            </a:pPr>
+            <a:r>
               <a:rPr sz="1200" b="1">
                 <a:solidFill>
                   <a:srgbClr val="16202A"/>
@@ -14211,7 +14504,7 @@
                 <a:ea typeface="Microsoft YaHei"/>
                 <a:cs typeface="Microsoft YaHei"/>
               </a:rPr>
-              <a:t>固定外部环境与输入</a:t>
+              <a:t>凭什么可信</a:t>
             </a:r>
             <a:r>
               <a:rPr sz="1050" b="0">
@@ -14222,20 +14515,20 @@
                 <a:ea typeface="Microsoft YaHei"/>
                 <a:cs typeface="Microsoft YaHei"/>
               </a:rPr>
-              <a:t>　保证候选之间可比</a:t>
-            </a:r>
-          </a:p>
-        </p:txBody>
-      </p:sp>
-      <p:sp>
-        <p:nvSpPr>
-          <p:cNvPr id="24" name="Oval 23"/>
+              <a:t>　三条防止自欺的约束</a:t>
+            </a:r>
+          </a:p>
+        </p:txBody>
+      </p:sp>
+      <p:sp>
+        <p:nvSpPr>
+          <p:cNvPr id="25" name="Oval 24"/>
           <p:cNvSpPr/>
           <p:nvPr/>
         </p:nvSpPr>
         <p:spPr>
           <a:xfrm>
-            <a:off x="548640" y="4837176"/>
+            <a:off x="548640" y="4745736"/>
             <a:ext cx="91440" cy="91440"/>
           </a:xfrm>
           <a:prstGeom prst="ellipse">
@@ -14258,14 +14551,14 @@
       </p:sp>
       <p:sp>
         <p:nvSpPr>
-          <p:cNvPr id="25" name="TextBox 24"/>
+          <p:cNvPr id="26" name="TextBox 25"/>
           <p:cNvSpPr txBox="1"/>
           <p:nvPr/>
         </p:nvSpPr>
         <p:spPr>
           <a:xfrm>
-            <a:off x="749808" y="4736592"/>
-            <a:ext cx="5955487" cy="329184"/>
+            <a:off x="749808" y="4663440"/>
+            <a:ext cx="5955487" cy="292608"/>
           </a:xfrm>
           <a:prstGeom prst="rect">
             <a:avLst/>
@@ -14298,20 +14591,20 @@
                 <a:ea typeface="Microsoft YaHei"/>
                 <a:cs typeface="Microsoft YaHei"/>
               </a:rPr>
-              <a:t>固定输入、精度、上下文与缓存条件；prompt token 数必须等于冻结值</a:t>
-            </a:r>
-          </a:p>
-        </p:txBody>
-      </p:sp>
-      <p:sp>
-        <p:nvSpPr>
-          <p:cNvPr id="26" name="Oval 25"/>
+              <a:t>口径先冻结：模型、负载、阈值与预算随任务写定，改了之后已有结果不再沿用</a:t>
+            </a:r>
+          </a:p>
+        </p:txBody>
+      </p:sp>
+      <p:sp>
+        <p:nvSpPr>
+          <p:cNvPr id="27" name="Oval 26"/>
           <p:cNvSpPr/>
           <p:nvPr/>
         </p:nvSpPr>
         <p:spPr>
           <a:xfrm>
-            <a:off x="548640" y="5166360"/>
+            <a:off x="548640" y="5038344"/>
             <a:ext cx="91440" cy="91440"/>
           </a:xfrm>
           <a:prstGeom prst="ellipse">
@@ -14334,14 +14627,14 @@
       </p:sp>
       <p:sp>
         <p:nvSpPr>
-          <p:cNvPr id="27" name="TextBox 26"/>
+          <p:cNvPr id="28" name="TextBox 27"/>
           <p:cNvSpPr txBox="1"/>
           <p:nvPr/>
         </p:nvSpPr>
         <p:spPr>
           <a:xfrm>
-            <a:off x="749808" y="5065776"/>
-            <a:ext cx="5955487" cy="329184"/>
+            <a:off x="749808" y="4956048"/>
+            <a:ext cx="5955487" cy="292608"/>
           </a:xfrm>
           <a:prstGeom prst="rect">
             <a:avLst/>
@@ -14374,21 +14667,97 @@
                 <a:ea typeface="Microsoft YaHei"/>
                 <a:cs typeface="Microsoft YaHei"/>
               </a:rPr>
-              <a:t>诊断与正式压测分开；收益由关闭 profiler 的独立复测确认</a:t>
-            </a:r>
-          </a:p>
-        </p:txBody>
-      </p:sp>
-      <p:sp>
-        <p:nvSpPr>
-          <p:cNvPr id="28" name="Rectangle 27"/>
+              <a:t>测的是同一个候选：隔离副本、记录产物身份，启动时核对端口与模型路径</a:t>
+            </a:r>
+          </a:p>
+        </p:txBody>
+      </p:sp>
+      <p:sp>
+        <p:nvSpPr>
+          <p:cNvPr id="29" name="Oval 28"/>
           <p:cNvSpPr/>
           <p:nvPr/>
         </p:nvSpPr>
         <p:spPr>
           <a:xfrm>
-            <a:off x="7071055" y="1737360"/>
-            <a:ext cx="4572000" cy="3602736"/>
+            <a:off x="548640" y="5330952"/>
+            <a:ext cx="91440" cy="91440"/>
+          </a:xfrm>
+          <a:prstGeom prst="ellipse">
+            <a:avLst/>
+          </a:prstGeom>
+          <a:solidFill>
+            <a:srgbClr val="C0612C"/>
+          </a:solidFill>
+          <a:ln>
+            <a:noFill/>
+          </a:ln>
+        </p:spPr>
+        <p:txBody>
+          <a:bodyPr rtlCol="0" anchor="ctr"/>
+          <a:lstStyle/>
+          <a:p>
+            <a:pPr algn="ctr"/>
+          </a:p>
+        </p:txBody>
+      </p:sp>
+      <p:sp>
+        <p:nvSpPr>
+          <p:cNvPr id="30" name="TextBox 29"/>
+          <p:cNvSpPr txBox="1"/>
+          <p:nvPr/>
+        </p:nvSpPr>
+        <p:spPr>
+          <a:xfrm>
+            <a:off x="749808" y="5248655"/>
+            <a:ext cx="5955487" cy="292608"/>
+          </a:xfrm>
+          <a:prstGeom prst="rect">
+            <a:avLst/>
+          </a:prstGeom>
+          <a:noFill/>
+        </p:spPr>
+        <p:txBody>
+          <a:bodyPr wrap="square" anchor="ctr" lIns="0" tIns="0" rIns="0" bIns="0">
+            <a:noAutofit/>
+          </a:bodyPr>
+          <a:lstStyle/>
+          <a:p>
+            <a:pPr algn="l" latinLnBrk="0">
+              <a:lnSpc>
+                <a:spcPct val="100000"/>
+              </a:lnSpc>
+              <a:spcBef>
+                <a:spcPts val="0"/>
+              </a:spcBef>
+              <a:spcAft>
+                <a:spcPts val="0"/>
+              </a:spcAft>
+            </a:pPr>
+            <a:r>
+              <a:rPr sz="1050" b="0">
+                <a:solidFill>
+                  <a:srgbClr val="35424F"/>
+                </a:solidFill>
+                <a:latin typeface="Microsoft YaHei"/>
+                <a:ea typeface="Microsoft YaHei"/>
+                <a:cs typeface="Microsoft YaHei"/>
+              </a:rPr>
+              <a:t>不能靠少干活变快：输入、精度、上下文与缓存全部冻结，诊断与正式压测分开</a:t>
+            </a:r>
+          </a:p>
+        </p:txBody>
+      </p:sp>
+      <p:sp>
+        <p:nvSpPr>
+          <p:cNvPr id="31" name="Rectangle 30"/>
+          <p:cNvSpPr/>
+          <p:nvPr/>
+        </p:nvSpPr>
+        <p:spPr>
+          <a:xfrm>
+            <a:off x="7071055" y="1719072"/>
+            <a:ext cx="4572000" cy="3822191"/>
           </a:xfrm>
           <a:prstGeom prst="rect">
             <a:avLst/>
@@ -14501,20 +14870,20 @@
                 <a:ea typeface="Microsoft YaHei"/>
                 <a:cs typeface="Microsoft YaHei"/>
               </a:rPr>
-              <a:t>5.0 × 3.94 in（约 4:3）</a:t>
-            </a:r>
-          </a:p>
-        </p:txBody>
-      </p:sp>
-      <p:sp>
-        <p:nvSpPr>
-          <p:cNvPr id="29" name="Rectangle 28"/>
+              <a:t>5.0 × 4.18 in</a:t>
+            </a:r>
+          </a:p>
+        </p:txBody>
+      </p:sp>
+      <p:sp>
+        <p:nvSpPr>
+          <p:cNvPr id="32" name="Rectangle 31"/>
           <p:cNvSpPr/>
           <p:nvPr/>
         </p:nvSpPr>
         <p:spPr>
           <a:xfrm>
-            <a:off x="548640" y="5486400"/>
+            <a:off x="548640" y="5632704"/>
             <a:ext cx="11094415" cy="475488"/>
           </a:xfrm>
           <a:prstGeom prst="rect">
@@ -14537,13 +14906,13 @@
       </p:sp>
       <p:sp>
         <p:nvSpPr>
-          <p:cNvPr id="30" name="Rectangle 29"/>
+          <p:cNvPr id="33" name="Rectangle 32"/>
           <p:cNvSpPr/>
           <p:nvPr/>
         </p:nvSpPr>
         <p:spPr>
           <a:xfrm>
-            <a:off x="548640" y="5486400"/>
+            <a:off x="548640" y="5632704"/>
             <a:ext cx="64008" cy="475488"/>
           </a:xfrm>
           <a:prstGeom prst="rect">
@@ -14566,13 +14935,13 @@
       </p:sp>
       <p:sp>
         <p:nvSpPr>
-          <p:cNvPr id="31" name="TextBox 30"/>
+          <p:cNvPr id="34" name="TextBox 33"/>
           <p:cNvSpPr txBox="1"/>
           <p:nvPr/>
         </p:nvSpPr>
         <p:spPr>
           <a:xfrm>
-            <a:off x="859536" y="5486400"/>
+            <a:off x="859536" y="5632704"/>
             <a:ext cx="10454335" cy="475488"/>
           </a:xfrm>
           <a:prstGeom prst="rect">
@@ -14624,7 +14993,7 @@
       </p:sp>
       <p:sp>
         <p:nvSpPr>
-          <p:cNvPr id="32" name="TextBox 31"/>
+          <p:cNvPr id="35" name="TextBox 34"/>
           <p:cNvSpPr txBox="1"/>
           <p:nvPr/>
         </p:nvSpPr>
@@ -14671,7 +15040,7 @@
       </p:sp>
       <p:sp>
         <p:nvSpPr>
-          <p:cNvPr id="33" name="TextBox 32"/>
+          <p:cNvPr id="36" name="TextBox 35"/>
           <p:cNvSpPr txBox="1"/>
           <p:nvPr/>
         </p:nvSpPr>
@@ -14711,7 +15080,7 @@
                 <a:ea typeface="Microsoft YaHei"/>
                 <a:cs typeface="Microsoft YaHei"/>
               </a:rPr>
-              <a:t>5 / 8</a:t>
+              <a:t>5 / 9</a:t>
             </a:r>
           </a:p>
         </p:txBody>
@@ -16467,7 +16836,7 @@
                 <a:ea typeface="Microsoft YaHei"/>
                 <a:cs typeface="Microsoft YaHei"/>
               </a:rPr>
-              <a:t>6 / 8</a:t>
+              <a:t>6 / 9</a:t>
             </a:r>
           </a:p>
         </p:txBody>
@@ -16532,7 +16901,7 @@
                 <a:ea typeface="Microsoft YaHei"/>
                 <a:cs typeface="Microsoft YaHei"/>
               </a:rPr>
-              <a:t>难点 · 局部加速与整体收益</a:t>
+              <a:t>难点 · 回到模型层看收益</a:t>
             </a:r>
           </a:p>
         </p:txBody>
@@ -16954,7 +17323,7 @@
               </a:spcAft>
             </a:pPr>
             <a:r>
-              <a:rPr sz="1000" b="0">
+              <a:rPr sz="950" b="0">
                 <a:solidFill>
                   <a:srgbClr val="66727F"/>
                 </a:solidFill>
@@ -16962,7 +17331,7 @@
                 <a:ea typeface="Microsoft YaHei"/>
                 <a:cs typeface="Microsoft YaHei"/>
               </a:rPr>
-              <a:t>偏 GEMM 的负载</a:t>
+              <a:t>短输入，GEMM 为主</a:t>
             </a:r>
           </a:p>
           <a:p>
@@ -17521,7 +17890,7 @@
               </a:spcAft>
             </a:pPr>
             <a:r>
-              <a:rPr sz="1000" b="0">
+              <a:rPr sz="950" b="0">
                 <a:solidFill>
                   <a:srgbClr val="66727F"/>
                 </a:solidFill>
@@ -17529,7 +17898,7 @@
                 <a:ea typeface="Microsoft YaHei"/>
                 <a:cs typeface="Microsoft YaHei"/>
               </a:rPr>
-              <a:t>Attention 占比增加</a:t>
+              <a:t>长上下文，Attention 变重</a:t>
             </a:r>
           </a:p>
           <a:p>
@@ -18383,7 +18752,7 @@
                 <a:ea typeface="Microsoft YaHei"/>
                 <a:cs typeface="Microsoft YaHei"/>
               </a:rPr>
-              <a:t>需要调度仿真与压测验证</a:t>
+              <a:t>下一页给出完整的换算办法</a:t>
             </a:r>
           </a:p>
         </p:txBody>
@@ -19375,7 +19744,7 @@
                 <a:ea typeface="Microsoft YaHei"/>
                 <a:cs typeface="Microsoft YaHei"/>
               </a:rPr>
-              <a:t>7 / 8</a:t>
+              <a:t>7 / 9</a:t>
             </a:r>
           </a:p>
         </p:txBody>
@@ -19440,7 +19809,7 @@
                 <a:ea typeface="Microsoft YaHei"/>
                 <a:cs typeface="Microsoft YaHei"/>
               </a:rPr>
-              <a:t>方法 · 从算子耗时到服务容量</a:t>
+              <a:t>方法 · 模型层如何给算子排优先级</a:t>
             </a:r>
           </a:p>
         </p:txBody>
@@ -21637,7 +22006,1859 @@
                 <a:ea typeface="Microsoft YaHei"/>
                 <a:cs typeface="Microsoft YaHei"/>
               </a:rPr>
-              <a:t>8 / 8</a:t>
+              <a:t>8 / 9</a:t>
+            </a:r>
+          </a:p>
+        </p:txBody>
+      </p:sp>
+    </p:spTree>
+  </p:cSld>
+  <p:clrMapOvr>
+    <a:masterClrMapping/>
+  </p:clrMapOvr>
+</p:sld>
+</file>
+
+<file path=ppt/slides/slide9.xml><?xml version="1.0" encoding="utf-8"?>
+<p:sld xmlns:a="http://schemas.openxmlformats.org/drawingml/2006/main" xmlns:p="http://schemas.openxmlformats.org/presentationml/2006/main" xmlns:r="http://schemas.openxmlformats.org/officeDocument/2006/relationships">
+  <p:cSld>
+    <p:spTree>
+      <p:nvGrpSpPr>
+        <p:cNvPr id="1" name=""/>
+        <p:cNvGrpSpPr/>
+        <p:nvPr/>
+      </p:nvGrpSpPr>
+      <p:grpSpPr/>
+      <p:sp>
+        <p:nvSpPr>
+          <p:cNvPr id="2" name="TextBox 1"/>
+          <p:cNvSpPr txBox="1"/>
+          <p:nvPr/>
+        </p:nvSpPr>
+        <p:spPr>
+          <a:xfrm>
+            <a:off x="548640" y="384048"/>
+            <a:ext cx="8229600" cy="292608"/>
+          </a:xfrm>
+          <a:prstGeom prst="rect">
+            <a:avLst/>
+          </a:prstGeom>
+          <a:noFill/>
+        </p:spPr>
+        <p:txBody>
+          <a:bodyPr wrap="square" anchor="ctr" lIns="0" tIns="0" rIns="0" bIns="0">
+            <a:noAutofit/>
+          </a:bodyPr>
+          <a:lstStyle/>
+          <a:p>
+            <a:pPr algn="l" latinLnBrk="0">
+              <a:lnSpc>
+                <a:spcPct val="100000"/>
+              </a:lnSpc>
+              <a:spcBef>
+                <a:spcPts val="0"/>
+              </a:spcBef>
+              <a:spcAft>
+                <a:spcPts val="0"/>
+              </a:spcAft>
+            </a:pPr>
+            <a:r>
+              <a:rPr sz="1100" b="1">
+                <a:solidFill>
+                  <a:srgbClr val="C0612C"/>
+                </a:solidFill>
+                <a:latin typeface="Consolas"/>
+                <a:ea typeface="Microsoft YaHei"/>
+                <a:cs typeface="Microsoft YaHei"/>
+              </a:rPr>
+              <a:t>收尾 · 现状与下一步</a:t>
+            </a:r>
+          </a:p>
+        </p:txBody>
+      </p:sp>
+      <p:sp>
+        <p:nvSpPr>
+          <p:cNvPr id="3" name="TextBox 2"/>
+          <p:cNvSpPr txBox="1"/>
+          <p:nvPr/>
+        </p:nvSpPr>
+        <p:spPr>
+          <a:xfrm>
+            <a:off x="548640" y="731520"/>
+            <a:ext cx="11094415" cy="530352"/>
+          </a:xfrm>
+          <a:prstGeom prst="rect">
+            <a:avLst/>
+          </a:prstGeom>
+          <a:noFill/>
+        </p:spPr>
+        <p:txBody>
+          <a:bodyPr wrap="square" anchor="ctr" lIns="0" tIns="0" rIns="0" bIns="0">
+            <a:noAutofit/>
+          </a:bodyPr>
+          <a:lstStyle/>
+          <a:p>
+            <a:pPr algn="l" latinLnBrk="0">
+              <a:lnSpc>
+                <a:spcPct val="100000"/>
+              </a:lnSpc>
+              <a:spcBef>
+                <a:spcPts val="0"/>
+              </a:spcBef>
+              <a:spcAft>
+                <a:spcPts val="0"/>
+              </a:spcAft>
+            </a:pPr>
+            <a:r>
+              <a:rPr sz="2500" b="1">
+                <a:solidFill>
+                  <a:srgbClr val="16202A"/>
+                </a:solidFill>
+                <a:latin typeface="Microsoft YaHei"/>
+                <a:ea typeface="Microsoft YaHei"/>
+                <a:cs typeface="Microsoft YaHei"/>
+              </a:rPr>
+              <a:t>回到第 1 页的命题：适配成本降下来了多少</a:t>
+            </a:r>
+          </a:p>
+        </p:txBody>
+      </p:sp>
+      <p:sp>
+        <p:nvSpPr>
+          <p:cNvPr id="4" name="TextBox 3"/>
+          <p:cNvSpPr txBox="1"/>
+          <p:nvPr/>
+        </p:nvSpPr>
+        <p:spPr>
+          <a:xfrm>
+            <a:off x="548640" y="1261872"/>
+            <a:ext cx="11094415" cy="329184"/>
+          </a:xfrm>
+          <a:prstGeom prst="rect">
+            <a:avLst/>
+          </a:prstGeom>
+          <a:noFill/>
+        </p:spPr>
+        <p:txBody>
+          <a:bodyPr wrap="square" anchor="ctr" lIns="0" tIns="0" rIns="0" bIns="0">
+            <a:noAutofit/>
+          </a:bodyPr>
+          <a:lstStyle/>
+          <a:p>
+            <a:pPr algn="l" latinLnBrk="0">
+              <a:lnSpc>
+                <a:spcPct val="100000"/>
+              </a:lnSpc>
+              <a:spcBef>
+                <a:spcPts val="0"/>
+              </a:spcBef>
+              <a:spcAft>
+                <a:spcPts val="0"/>
+              </a:spcAft>
+            </a:pPr>
+            <a:r>
+              <a:rPr sz="1300" b="0">
+                <a:solidFill>
+                  <a:srgbClr val="66727F"/>
+                </a:solidFill>
+                <a:latin typeface="Microsoft YaHei"/>
+                <a:ea typeface="Microsoft YaHei"/>
+                <a:cs typeface="Microsoft YaHei"/>
+              </a:rPr>
+              <a:t>如实对账——哪些已经自动跑，哪些仍然靠人，哪些还没做</a:t>
+            </a:r>
+          </a:p>
+        </p:txBody>
+      </p:sp>
+      <p:sp>
+        <p:nvSpPr>
+          <p:cNvPr id="5" name="Rectangle 4"/>
+          <p:cNvSpPr/>
+          <p:nvPr/>
+        </p:nvSpPr>
+        <p:spPr>
+          <a:xfrm>
+            <a:off x="548640" y="1828800"/>
+            <a:ext cx="3515258" cy="3200400"/>
+          </a:xfrm>
+          <a:prstGeom prst="rect">
+            <a:avLst/>
+          </a:prstGeom>
+          <a:solidFill>
+            <a:srgbClr val="F8EADF"/>
+          </a:solidFill>
+          <a:ln>
+            <a:noFill/>
+          </a:ln>
+        </p:spPr>
+        <p:txBody>
+          <a:bodyPr rtlCol="0" anchor="ctr"/>
+          <a:lstStyle/>
+          <a:p>
+            <a:pPr algn="ctr"/>
+          </a:p>
+        </p:txBody>
+      </p:sp>
+      <p:sp>
+        <p:nvSpPr>
+          <p:cNvPr id="6" name="Rectangle 5"/>
+          <p:cNvSpPr/>
+          <p:nvPr/>
+        </p:nvSpPr>
+        <p:spPr>
+          <a:xfrm>
+            <a:off x="548640" y="1828800"/>
+            <a:ext cx="3515258" cy="45720"/>
+          </a:xfrm>
+          <a:prstGeom prst="rect">
+            <a:avLst/>
+          </a:prstGeom>
+          <a:solidFill>
+            <a:srgbClr val="C0612C"/>
+          </a:solidFill>
+          <a:ln>
+            <a:noFill/>
+          </a:ln>
+        </p:spPr>
+        <p:txBody>
+          <a:bodyPr rtlCol="0" anchor="ctr"/>
+          <a:lstStyle/>
+          <a:p>
+            <a:pPr algn="ctr"/>
+          </a:p>
+        </p:txBody>
+      </p:sp>
+      <p:sp>
+        <p:nvSpPr>
+          <p:cNvPr id="7" name="TextBox 6"/>
+          <p:cNvSpPr txBox="1"/>
+          <p:nvPr/>
+        </p:nvSpPr>
+        <p:spPr>
+          <a:xfrm>
+            <a:off x="768096" y="2011680"/>
+            <a:ext cx="3076346" cy="329184"/>
+          </a:xfrm>
+          <a:prstGeom prst="rect">
+            <a:avLst/>
+          </a:prstGeom>
+          <a:noFill/>
+        </p:spPr>
+        <p:txBody>
+          <a:bodyPr wrap="square" anchor="ctr" lIns="0" tIns="0" rIns="0" bIns="0">
+            <a:noAutofit/>
+          </a:bodyPr>
+          <a:lstStyle/>
+          <a:p>
+            <a:pPr algn="l" latinLnBrk="0">
+              <a:lnSpc>
+                <a:spcPct val="100000"/>
+              </a:lnSpc>
+              <a:spcBef>
+                <a:spcPts val="0"/>
+              </a:spcBef>
+              <a:spcAft>
+                <a:spcPts val="0"/>
+              </a:spcAft>
+            </a:pPr>
+            <a:r>
+              <a:rPr sz="1500" b="1">
+                <a:solidFill>
+                  <a:srgbClr val="16202A"/>
+                </a:solidFill>
+                <a:latin typeface="Microsoft YaHei"/>
+                <a:ea typeface="Microsoft YaHei"/>
+                <a:cs typeface="Microsoft YaHei"/>
+              </a:rPr>
+              <a:t>已经自动跑</a:t>
+            </a:r>
+          </a:p>
+        </p:txBody>
+      </p:sp>
+      <p:sp>
+        <p:nvSpPr>
+          <p:cNvPr id="8" name="TextBox 7"/>
+          <p:cNvSpPr txBox="1"/>
+          <p:nvPr/>
+        </p:nvSpPr>
+        <p:spPr>
+          <a:xfrm>
+            <a:off x="768096" y="2359152"/>
+            <a:ext cx="3076346" cy="237744"/>
+          </a:xfrm>
+          <a:prstGeom prst="rect">
+            <a:avLst/>
+          </a:prstGeom>
+          <a:noFill/>
+        </p:spPr>
+        <p:txBody>
+          <a:bodyPr wrap="square" anchor="ctr" lIns="0" tIns="0" rIns="0" bIns="0">
+            <a:noAutofit/>
+          </a:bodyPr>
+          <a:lstStyle/>
+          <a:p>
+            <a:pPr algn="l" latinLnBrk="0">
+              <a:lnSpc>
+                <a:spcPct val="100000"/>
+              </a:lnSpc>
+              <a:spcBef>
+                <a:spcPts val="0"/>
+              </a:spcBef>
+              <a:spcAft>
+                <a:spcPts val="0"/>
+              </a:spcAft>
+            </a:pPr>
+            <a:r>
+              <a:rPr sz="950" b="0">
+                <a:solidFill>
+                  <a:srgbClr val="C0612C"/>
+                </a:solidFill>
+                <a:latin typeface="Consolas"/>
+                <a:ea typeface="Microsoft YaHei"/>
+                <a:cs typeface="Microsoft YaHei"/>
+              </a:rPr>
+              <a:t>第 4 - 6 页</a:t>
+            </a:r>
+          </a:p>
+        </p:txBody>
+      </p:sp>
+      <p:sp>
+        <p:nvSpPr>
+          <p:cNvPr id="9" name="Oval 8"/>
+          <p:cNvSpPr/>
+          <p:nvPr/>
+        </p:nvSpPr>
+        <p:spPr>
+          <a:xfrm>
+            <a:off x="768096" y="2889504"/>
+            <a:ext cx="91440" cy="91440"/>
+          </a:xfrm>
+          <a:prstGeom prst="ellipse">
+            <a:avLst/>
+          </a:prstGeom>
+          <a:solidFill>
+            <a:srgbClr val="C0612C"/>
+          </a:solidFill>
+          <a:ln>
+            <a:noFill/>
+          </a:ln>
+        </p:spPr>
+        <p:txBody>
+          <a:bodyPr rtlCol="0" anchor="ctr"/>
+          <a:lstStyle/>
+          <a:p>
+            <a:pPr algn="ctr"/>
+          </a:p>
+        </p:txBody>
+      </p:sp>
+      <p:sp>
+        <p:nvSpPr>
+          <p:cNvPr id="10" name="TextBox 9"/>
+          <p:cNvSpPr txBox="1"/>
+          <p:nvPr/>
+        </p:nvSpPr>
+        <p:spPr>
+          <a:xfrm>
+            <a:off x="969264" y="2724912"/>
+            <a:ext cx="2875178" cy="457200"/>
+          </a:xfrm>
+          <a:prstGeom prst="rect">
+            <a:avLst/>
+          </a:prstGeom>
+          <a:noFill/>
+        </p:spPr>
+        <p:txBody>
+          <a:bodyPr wrap="square" anchor="ctr" lIns="0" tIns="0" rIns="0" bIns="0">
+            <a:noAutofit/>
+          </a:bodyPr>
+          <a:lstStyle/>
+          <a:p>
+            <a:pPr algn="l" latinLnBrk="0">
+              <a:lnSpc>
+                <a:spcPct val="100000"/>
+              </a:lnSpc>
+              <a:spcBef>
+                <a:spcPts val="0"/>
+              </a:spcBef>
+              <a:spcAft>
+                <a:spcPts val="0"/>
+              </a:spcAft>
+            </a:pPr>
+            <a:r>
+              <a:rPr sz="1100" b="0">
+                <a:solidFill>
+                  <a:srgbClr val="16202A"/>
+                </a:solidFill>
+                <a:latin typeface="Microsoft YaHei"/>
+                <a:ea typeface="Microsoft YaHei"/>
+                <a:cs typeface="Microsoft YaHei"/>
+              </a:rPr>
+              <a:t>基线建立与全量评测</a:t>
+            </a:r>
+          </a:p>
+        </p:txBody>
+      </p:sp>
+      <p:sp>
+        <p:nvSpPr>
+          <p:cNvPr id="11" name="Oval 10"/>
+          <p:cNvSpPr/>
+          <p:nvPr/>
+        </p:nvSpPr>
+        <p:spPr>
+          <a:xfrm>
+            <a:off x="768096" y="3346704"/>
+            <a:ext cx="91440" cy="91440"/>
+          </a:xfrm>
+          <a:prstGeom prst="ellipse">
+            <a:avLst/>
+          </a:prstGeom>
+          <a:solidFill>
+            <a:srgbClr val="C0612C"/>
+          </a:solidFill>
+          <a:ln>
+            <a:noFill/>
+          </a:ln>
+        </p:spPr>
+        <p:txBody>
+          <a:bodyPr rtlCol="0" anchor="ctr"/>
+          <a:lstStyle/>
+          <a:p>
+            <a:pPr algn="ctr"/>
+          </a:p>
+        </p:txBody>
+      </p:sp>
+      <p:sp>
+        <p:nvSpPr>
+          <p:cNvPr id="12" name="TextBox 11"/>
+          <p:cNvSpPr txBox="1"/>
+          <p:nvPr/>
+        </p:nvSpPr>
+        <p:spPr>
+          <a:xfrm>
+            <a:off x="969264" y="3182112"/>
+            <a:ext cx="2875178" cy="457200"/>
+          </a:xfrm>
+          <a:prstGeom prst="rect">
+            <a:avLst/>
+          </a:prstGeom>
+          <a:noFill/>
+        </p:spPr>
+        <p:txBody>
+          <a:bodyPr wrap="square" anchor="ctr" lIns="0" tIns="0" rIns="0" bIns="0">
+            <a:noAutofit/>
+          </a:bodyPr>
+          <a:lstStyle/>
+          <a:p>
+            <a:pPr algn="l" latinLnBrk="0">
+              <a:lnSpc>
+                <a:spcPct val="100000"/>
+              </a:lnSpc>
+              <a:spcBef>
+                <a:spcPts val="0"/>
+              </a:spcBef>
+              <a:spcAft>
+                <a:spcPts val="0"/>
+              </a:spcAft>
+            </a:pPr>
+            <a:r>
+              <a:rPr sz="1100" b="0">
+                <a:solidFill>
+                  <a:srgbClr val="16202A"/>
+                </a:solidFill>
+                <a:latin typeface="Microsoft YaHei"/>
+                <a:ea typeface="Microsoft YaHei"/>
+                <a:cs typeface="Microsoft YaHei"/>
+              </a:rPr>
+              <a:t>候选迭代与三道条件验收</a:t>
+            </a:r>
+          </a:p>
+        </p:txBody>
+      </p:sp>
+      <p:sp>
+        <p:nvSpPr>
+          <p:cNvPr id="13" name="Oval 12"/>
+          <p:cNvSpPr/>
+          <p:nvPr/>
+        </p:nvSpPr>
+        <p:spPr>
+          <a:xfrm>
+            <a:off x="768096" y="3803904"/>
+            <a:ext cx="91440" cy="91440"/>
+          </a:xfrm>
+          <a:prstGeom prst="ellipse">
+            <a:avLst/>
+          </a:prstGeom>
+          <a:solidFill>
+            <a:srgbClr val="C0612C"/>
+          </a:solidFill>
+          <a:ln>
+            <a:noFill/>
+          </a:ln>
+        </p:spPr>
+        <p:txBody>
+          <a:bodyPr rtlCol="0" anchor="ctr"/>
+          <a:lstStyle/>
+          <a:p>
+            <a:pPr algn="ctr"/>
+          </a:p>
+        </p:txBody>
+      </p:sp>
+      <p:sp>
+        <p:nvSpPr>
+          <p:cNvPr id="14" name="TextBox 13"/>
+          <p:cNvSpPr txBox="1"/>
+          <p:nvPr/>
+        </p:nvSpPr>
+        <p:spPr>
+          <a:xfrm>
+            <a:off x="969264" y="3639312"/>
+            <a:ext cx="2875178" cy="457200"/>
+          </a:xfrm>
+          <a:prstGeom prst="rect">
+            <a:avLst/>
+          </a:prstGeom>
+          <a:noFill/>
+        </p:spPr>
+        <p:txBody>
+          <a:bodyPr wrap="square" anchor="ctr" lIns="0" tIns="0" rIns="0" bIns="0">
+            <a:noAutofit/>
+          </a:bodyPr>
+          <a:lstStyle/>
+          <a:p>
+            <a:pPr algn="l" latinLnBrk="0">
+              <a:lnSpc>
+                <a:spcPct val="100000"/>
+              </a:lnSpc>
+              <a:spcBef>
+                <a:spcPts val="0"/>
+              </a:spcBef>
+              <a:spcAft>
+                <a:spcPts val="0"/>
+              </a:spcAft>
+            </a:pPr>
+            <a:r>
+              <a:rPr sz="1100" b="0">
+                <a:solidFill>
+                  <a:srgbClr val="16202A"/>
+                </a:solidFill>
+                <a:latin typeface="Microsoft YaHei"/>
+                <a:ea typeface="Microsoft YaHei"/>
+                <a:cs typeface="Microsoft YaHei"/>
+              </a:rPr>
+              <a:t>Trace 采集与热点定位</a:t>
+            </a:r>
+          </a:p>
+        </p:txBody>
+      </p:sp>
+      <p:sp>
+        <p:nvSpPr>
+          <p:cNvPr id="15" name="Oval 14"/>
+          <p:cNvSpPr/>
+          <p:nvPr/>
+        </p:nvSpPr>
+        <p:spPr>
+          <a:xfrm>
+            <a:off x="768096" y="4261104"/>
+            <a:ext cx="91440" cy="91440"/>
+          </a:xfrm>
+          <a:prstGeom prst="ellipse">
+            <a:avLst/>
+          </a:prstGeom>
+          <a:solidFill>
+            <a:srgbClr val="C0612C"/>
+          </a:solidFill>
+          <a:ln>
+            <a:noFill/>
+          </a:ln>
+        </p:spPr>
+        <p:txBody>
+          <a:bodyPr rtlCol="0" anchor="ctr"/>
+          <a:lstStyle/>
+          <a:p>
+            <a:pPr algn="ctr"/>
+          </a:p>
+        </p:txBody>
+      </p:sp>
+      <p:sp>
+        <p:nvSpPr>
+          <p:cNvPr id="16" name="TextBox 15"/>
+          <p:cNvSpPr txBox="1"/>
+          <p:nvPr/>
+        </p:nvSpPr>
+        <p:spPr>
+          <a:xfrm>
+            <a:off x="969264" y="4096512"/>
+            <a:ext cx="2875178" cy="457200"/>
+          </a:xfrm>
+          <a:prstGeom prst="rect">
+            <a:avLst/>
+          </a:prstGeom>
+          <a:noFill/>
+        </p:spPr>
+        <p:txBody>
+          <a:bodyPr wrap="square" anchor="ctr" lIns="0" tIns="0" rIns="0" bIns="0">
+            <a:noAutofit/>
+          </a:bodyPr>
+          <a:lstStyle/>
+          <a:p>
+            <a:pPr algn="l" latinLnBrk="0">
+              <a:lnSpc>
+                <a:spcPct val="100000"/>
+              </a:lnSpc>
+              <a:spcBef>
+                <a:spcPts val="0"/>
+              </a:spcBef>
+              <a:spcAft>
+                <a:spcPts val="0"/>
+              </a:spcAft>
+            </a:pPr>
+            <a:r>
+              <a:rPr sz="1100" b="0">
+                <a:solidFill>
+                  <a:srgbClr val="16202A"/>
+                </a:solidFill>
+                <a:latin typeface="Microsoft YaHei"/>
+                <a:ea typeface="Microsoft YaHei"/>
+                <a:cs typeface="Microsoft YaHei"/>
+              </a:rPr>
+              <a:t>失败证据与逐轮回放</a:t>
+            </a:r>
+          </a:p>
+        </p:txBody>
+      </p:sp>
+      <p:sp>
+        <p:nvSpPr>
+          <p:cNvPr id="17" name="TextBox 16"/>
+          <p:cNvSpPr txBox="1"/>
+          <p:nvPr/>
+        </p:nvSpPr>
+        <p:spPr>
+          <a:xfrm>
+            <a:off x="768096" y="4572000"/>
+            <a:ext cx="3076346" cy="310896"/>
+          </a:xfrm>
+          <a:prstGeom prst="rect">
+            <a:avLst/>
+          </a:prstGeom>
+          <a:noFill/>
+        </p:spPr>
+        <p:txBody>
+          <a:bodyPr wrap="square" anchor="ctr" lIns="0" tIns="0" rIns="0" bIns="0">
+            <a:noAutofit/>
+          </a:bodyPr>
+          <a:lstStyle/>
+          <a:p>
+            <a:pPr algn="l" latinLnBrk="0">
+              <a:lnSpc>
+                <a:spcPct val="100000"/>
+              </a:lnSpc>
+              <a:spcBef>
+                <a:spcPts val="0"/>
+              </a:spcBef>
+              <a:spcAft>
+                <a:spcPts val="0"/>
+              </a:spcAft>
+            </a:pPr>
+            <a:r>
+              <a:rPr sz="1000" b="0">
+                <a:solidFill>
+                  <a:srgbClr val="66727F"/>
+                </a:solidFill>
+                <a:latin typeface="Microsoft YaHei"/>
+                <a:ea typeface="Microsoft YaHei"/>
+                <a:cs typeface="Microsoft YaHei"/>
+              </a:rPr>
+              <a:t>人不在回路里，跑完才看结果</a:t>
+            </a:r>
+          </a:p>
+        </p:txBody>
+      </p:sp>
+      <p:sp>
+        <p:nvSpPr>
+          <p:cNvPr id="18" name="Rectangle 17"/>
+          <p:cNvSpPr/>
+          <p:nvPr/>
+        </p:nvSpPr>
+        <p:spPr>
+          <a:xfrm>
+            <a:off x="4338218" y="1828800"/>
+            <a:ext cx="3515258" cy="3200400"/>
+          </a:xfrm>
+          <a:prstGeom prst="rect">
+            <a:avLst/>
+          </a:prstGeom>
+          <a:solidFill>
+            <a:srgbClr val="F6F7F9"/>
+          </a:solidFill>
+          <a:ln>
+            <a:noFill/>
+          </a:ln>
+        </p:spPr>
+        <p:txBody>
+          <a:bodyPr rtlCol="0" anchor="ctr"/>
+          <a:lstStyle/>
+          <a:p>
+            <a:pPr algn="ctr"/>
+          </a:p>
+        </p:txBody>
+      </p:sp>
+      <p:sp>
+        <p:nvSpPr>
+          <p:cNvPr id="19" name="Rectangle 18"/>
+          <p:cNvSpPr/>
+          <p:nvPr/>
+        </p:nvSpPr>
+        <p:spPr>
+          <a:xfrm>
+            <a:off x="4338218" y="1828800"/>
+            <a:ext cx="3515258" cy="45720"/>
+          </a:xfrm>
+          <a:prstGeom prst="rect">
+            <a:avLst/>
+          </a:prstGeom>
+          <a:solidFill>
+            <a:srgbClr val="8C96A1"/>
+          </a:solidFill>
+          <a:ln>
+            <a:noFill/>
+          </a:ln>
+        </p:spPr>
+        <p:txBody>
+          <a:bodyPr rtlCol="0" anchor="ctr"/>
+          <a:lstStyle/>
+          <a:p>
+            <a:pPr algn="ctr"/>
+          </a:p>
+        </p:txBody>
+      </p:sp>
+      <p:sp>
+        <p:nvSpPr>
+          <p:cNvPr id="20" name="TextBox 19"/>
+          <p:cNvSpPr txBox="1"/>
+          <p:nvPr/>
+        </p:nvSpPr>
+        <p:spPr>
+          <a:xfrm>
+            <a:off x="4557674" y="2011680"/>
+            <a:ext cx="3076346" cy="329184"/>
+          </a:xfrm>
+          <a:prstGeom prst="rect">
+            <a:avLst/>
+          </a:prstGeom>
+          <a:noFill/>
+        </p:spPr>
+        <p:txBody>
+          <a:bodyPr wrap="square" anchor="ctr" lIns="0" tIns="0" rIns="0" bIns="0">
+            <a:noAutofit/>
+          </a:bodyPr>
+          <a:lstStyle/>
+          <a:p>
+            <a:pPr algn="l" latinLnBrk="0">
+              <a:lnSpc>
+                <a:spcPct val="100000"/>
+              </a:lnSpc>
+              <a:spcBef>
+                <a:spcPts val="0"/>
+              </a:spcBef>
+              <a:spcAft>
+                <a:spcPts val="0"/>
+              </a:spcAft>
+            </a:pPr>
+            <a:r>
+              <a:rPr sz="1500" b="1">
+                <a:solidFill>
+                  <a:srgbClr val="16202A"/>
+                </a:solidFill>
+                <a:latin typeface="Microsoft YaHei"/>
+                <a:ea typeface="Microsoft YaHei"/>
+                <a:cs typeface="Microsoft YaHei"/>
+              </a:rPr>
+              <a:t>仍然靠人</a:t>
+            </a:r>
+          </a:p>
+        </p:txBody>
+      </p:sp>
+      <p:sp>
+        <p:nvSpPr>
+          <p:cNvPr id="21" name="TextBox 20"/>
+          <p:cNvSpPr txBox="1"/>
+          <p:nvPr/>
+        </p:nvSpPr>
+        <p:spPr>
+          <a:xfrm>
+            <a:off x="4557674" y="2359152"/>
+            <a:ext cx="3076346" cy="237744"/>
+          </a:xfrm>
+          <a:prstGeom prst="rect">
+            <a:avLst/>
+          </a:prstGeom>
+          <a:noFill/>
+        </p:spPr>
+        <p:txBody>
+          <a:bodyPr wrap="square" anchor="ctr" lIns="0" tIns="0" rIns="0" bIns="0">
+            <a:noAutofit/>
+          </a:bodyPr>
+          <a:lstStyle/>
+          <a:p>
+            <a:pPr algn="l" latinLnBrk="0">
+              <a:lnSpc>
+                <a:spcPct val="100000"/>
+              </a:lnSpc>
+              <a:spcBef>
+                <a:spcPts val="0"/>
+              </a:spcBef>
+              <a:spcAft>
+                <a:spcPts val="0"/>
+              </a:spcAft>
+            </a:pPr>
+            <a:r>
+              <a:rPr sz="950" b="0">
+                <a:solidFill>
+                  <a:srgbClr val="66727F"/>
+                </a:solidFill>
+                <a:latin typeface="Consolas"/>
+                <a:ea typeface="Microsoft YaHei"/>
+                <a:cs typeface="Microsoft YaHei"/>
+              </a:rPr>
+              <a:t>第 4 页两端</a:t>
+            </a:r>
+          </a:p>
+        </p:txBody>
+      </p:sp>
+      <p:sp>
+        <p:nvSpPr>
+          <p:cNvPr id="22" name="Oval 21"/>
+          <p:cNvSpPr/>
+          <p:nvPr/>
+        </p:nvSpPr>
+        <p:spPr>
+          <a:xfrm>
+            <a:off x="4557674" y="2889504"/>
+            <a:ext cx="91440" cy="91440"/>
+          </a:xfrm>
+          <a:prstGeom prst="ellipse">
+            <a:avLst/>
+          </a:prstGeom>
+          <a:solidFill>
+            <a:srgbClr val="C0612C"/>
+          </a:solidFill>
+          <a:ln>
+            <a:noFill/>
+          </a:ln>
+        </p:spPr>
+        <p:txBody>
+          <a:bodyPr rtlCol="0" anchor="ctr"/>
+          <a:lstStyle/>
+          <a:p>
+            <a:pPr algn="ctr"/>
+          </a:p>
+        </p:txBody>
+      </p:sp>
+      <p:sp>
+        <p:nvSpPr>
+          <p:cNvPr id="23" name="TextBox 22"/>
+          <p:cNvSpPr txBox="1"/>
+          <p:nvPr/>
+        </p:nvSpPr>
+        <p:spPr>
+          <a:xfrm>
+            <a:off x="4758842" y="2724912"/>
+            <a:ext cx="2875178" cy="457200"/>
+          </a:xfrm>
+          <a:prstGeom prst="rect">
+            <a:avLst/>
+          </a:prstGeom>
+          <a:noFill/>
+        </p:spPr>
+        <p:txBody>
+          <a:bodyPr wrap="square" anchor="ctr" lIns="0" tIns="0" rIns="0" bIns="0">
+            <a:noAutofit/>
+          </a:bodyPr>
+          <a:lstStyle/>
+          <a:p>
+            <a:pPr algn="l" latinLnBrk="0">
+              <a:lnSpc>
+                <a:spcPct val="100000"/>
+              </a:lnSpc>
+              <a:spcBef>
+                <a:spcPts val="0"/>
+              </a:spcBef>
+              <a:spcAft>
+                <a:spcPts val="0"/>
+              </a:spcAft>
+            </a:pPr>
+            <a:r>
+              <a:rPr sz="1100" b="0">
+                <a:solidFill>
+                  <a:srgbClr val="35424F"/>
+                </a:solidFill>
+                <a:latin typeface="Microsoft YaHei"/>
+                <a:ea typeface="Microsoft YaHei"/>
+                <a:cs typeface="Microsoft YaHei"/>
+              </a:rPr>
+              <a:t>定目标、冻结验收口径</a:t>
+            </a:r>
+          </a:p>
+        </p:txBody>
+      </p:sp>
+      <p:sp>
+        <p:nvSpPr>
+          <p:cNvPr id="24" name="Oval 23"/>
+          <p:cNvSpPr/>
+          <p:nvPr/>
+        </p:nvSpPr>
+        <p:spPr>
+          <a:xfrm>
+            <a:off x="4557674" y="3346704"/>
+            <a:ext cx="91440" cy="91440"/>
+          </a:xfrm>
+          <a:prstGeom prst="ellipse">
+            <a:avLst/>
+          </a:prstGeom>
+          <a:solidFill>
+            <a:srgbClr val="C0612C"/>
+          </a:solidFill>
+          <a:ln>
+            <a:noFill/>
+          </a:ln>
+        </p:spPr>
+        <p:txBody>
+          <a:bodyPr rtlCol="0" anchor="ctr"/>
+          <a:lstStyle/>
+          <a:p>
+            <a:pPr algn="ctr"/>
+          </a:p>
+        </p:txBody>
+      </p:sp>
+      <p:sp>
+        <p:nvSpPr>
+          <p:cNvPr id="25" name="TextBox 24"/>
+          <p:cNvSpPr txBox="1"/>
+          <p:nvPr/>
+        </p:nvSpPr>
+        <p:spPr>
+          <a:xfrm>
+            <a:off x="4758842" y="3182112"/>
+            <a:ext cx="2875178" cy="457200"/>
+          </a:xfrm>
+          <a:prstGeom prst="rect">
+            <a:avLst/>
+          </a:prstGeom>
+          <a:noFill/>
+        </p:spPr>
+        <p:txBody>
+          <a:bodyPr wrap="square" anchor="ctr" lIns="0" tIns="0" rIns="0" bIns="0">
+            <a:noAutofit/>
+          </a:bodyPr>
+          <a:lstStyle/>
+          <a:p>
+            <a:pPr algn="l" latinLnBrk="0">
+              <a:lnSpc>
+                <a:spcPct val="100000"/>
+              </a:lnSpc>
+              <a:spcBef>
+                <a:spcPts val="0"/>
+              </a:spcBef>
+              <a:spcAft>
+                <a:spcPts val="0"/>
+              </a:spcAft>
+            </a:pPr>
+            <a:r>
+              <a:rPr sz="1100" b="0">
+                <a:solidFill>
+                  <a:srgbClr val="35424F"/>
+                </a:solidFill>
+                <a:latin typeface="Microsoft YaHei"/>
+                <a:ea typeface="Microsoft YaHei"/>
+                <a:cs typeface="Microsoft YaHei"/>
+              </a:rPr>
+              <a:t>新架构的接入判断</a:t>
+            </a:r>
+          </a:p>
+        </p:txBody>
+      </p:sp>
+      <p:sp>
+        <p:nvSpPr>
+          <p:cNvPr id="26" name="Oval 25"/>
+          <p:cNvSpPr/>
+          <p:nvPr/>
+        </p:nvSpPr>
+        <p:spPr>
+          <a:xfrm>
+            <a:off x="4557674" y="3803904"/>
+            <a:ext cx="91440" cy="91440"/>
+          </a:xfrm>
+          <a:prstGeom prst="ellipse">
+            <a:avLst/>
+          </a:prstGeom>
+          <a:solidFill>
+            <a:srgbClr val="C0612C"/>
+          </a:solidFill>
+          <a:ln>
+            <a:noFill/>
+          </a:ln>
+        </p:spPr>
+        <p:txBody>
+          <a:bodyPr rtlCol="0" anchor="ctr"/>
+          <a:lstStyle/>
+          <a:p>
+            <a:pPr algn="ctr"/>
+          </a:p>
+        </p:txBody>
+      </p:sp>
+      <p:sp>
+        <p:nvSpPr>
+          <p:cNvPr id="27" name="TextBox 26"/>
+          <p:cNvSpPr txBox="1"/>
+          <p:nvPr/>
+        </p:nvSpPr>
+        <p:spPr>
+          <a:xfrm>
+            <a:off x="4758842" y="3639312"/>
+            <a:ext cx="2875178" cy="457200"/>
+          </a:xfrm>
+          <a:prstGeom prst="rect">
+            <a:avLst/>
+          </a:prstGeom>
+          <a:noFill/>
+        </p:spPr>
+        <p:txBody>
+          <a:bodyPr wrap="square" anchor="ctr" lIns="0" tIns="0" rIns="0" bIns="0">
+            <a:noAutofit/>
+          </a:bodyPr>
+          <a:lstStyle/>
+          <a:p>
+            <a:pPr algn="l" latinLnBrk="0">
+              <a:lnSpc>
+                <a:spcPct val="100000"/>
+              </a:lnSpc>
+              <a:spcBef>
+                <a:spcPts val="0"/>
+              </a:spcBef>
+              <a:spcAft>
+                <a:spcPts val="0"/>
+              </a:spcAft>
+            </a:pPr>
+            <a:r>
+              <a:rPr sz="1100" b="0">
+                <a:solidFill>
+                  <a:srgbClr val="35424F"/>
+                </a:solidFill>
+                <a:latin typeface="Microsoft YaHei"/>
+                <a:ea typeface="Microsoft YaHei"/>
+                <a:cs typeface="Microsoft YaHei"/>
+              </a:rPr>
+              <a:t>未知缺陷的根因定位</a:t>
+            </a:r>
+          </a:p>
+        </p:txBody>
+      </p:sp>
+      <p:sp>
+        <p:nvSpPr>
+          <p:cNvPr id="28" name="Oval 27"/>
+          <p:cNvSpPr/>
+          <p:nvPr/>
+        </p:nvSpPr>
+        <p:spPr>
+          <a:xfrm>
+            <a:off x="4557674" y="4261104"/>
+            <a:ext cx="91440" cy="91440"/>
+          </a:xfrm>
+          <a:prstGeom prst="ellipse">
+            <a:avLst/>
+          </a:prstGeom>
+          <a:solidFill>
+            <a:srgbClr val="C0612C"/>
+          </a:solidFill>
+          <a:ln>
+            <a:noFill/>
+          </a:ln>
+        </p:spPr>
+        <p:txBody>
+          <a:bodyPr rtlCol="0" anchor="ctr"/>
+          <a:lstStyle/>
+          <a:p>
+            <a:pPr algn="ctr"/>
+          </a:p>
+        </p:txBody>
+      </p:sp>
+      <p:sp>
+        <p:nvSpPr>
+          <p:cNvPr id="29" name="TextBox 28"/>
+          <p:cNvSpPr txBox="1"/>
+          <p:nvPr/>
+        </p:nvSpPr>
+        <p:spPr>
+          <a:xfrm>
+            <a:off x="4758842" y="4096512"/>
+            <a:ext cx="2875178" cy="457200"/>
+          </a:xfrm>
+          <a:prstGeom prst="rect">
+            <a:avLst/>
+          </a:prstGeom>
+          <a:noFill/>
+        </p:spPr>
+        <p:txBody>
+          <a:bodyPr wrap="square" anchor="ctr" lIns="0" tIns="0" rIns="0" bIns="0">
+            <a:noAutofit/>
+          </a:bodyPr>
+          <a:lstStyle/>
+          <a:p>
+            <a:pPr algn="l" latinLnBrk="0">
+              <a:lnSpc>
+                <a:spcPct val="100000"/>
+              </a:lnSpc>
+              <a:spcBef>
+                <a:spcPts val="0"/>
+              </a:spcBef>
+              <a:spcAft>
+                <a:spcPts val="0"/>
+              </a:spcAft>
+            </a:pPr>
+            <a:r>
+              <a:rPr sz="1100" b="0">
+                <a:solidFill>
+                  <a:srgbClr val="35424F"/>
+                </a:solidFill>
+                <a:latin typeface="Microsoft YaHei"/>
+                <a:ea typeface="Microsoft YaHei"/>
+                <a:cs typeface="Microsoft YaHei"/>
+              </a:rPr>
+              <a:t>交付与否的最终决定</a:t>
+            </a:r>
+          </a:p>
+        </p:txBody>
+      </p:sp>
+      <p:sp>
+        <p:nvSpPr>
+          <p:cNvPr id="30" name="TextBox 29"/>
+          <p:cNvSpPr txBox="1"/>
+          <p:nvPr/>
+        </p:nvSpPr>
+        <p:spPr>
+          <a:xfrm>
+            <a:off x="4557674" y="4572000"/>
+            <a:ext cx="3076346" cy="310896"/>
+          </a:xfrm>
+          <a:prstGeom prst="rect">
+            <a:avLst/>
+          </a:prstGeom>
+          <a:noFill/>
+        </p:spPr>
+        <p:txBody>
+          <a:bodyPr wrap="square" anchor="ctr" lIns="0" tIns="0" rIns="0" bIns="0">
+            <a:noAutofit/>
+          </a:bodyPr>
+          <a:lstStyle/>
+          <a:p>
+            <a:pPr algn="l" latinLnBrk="0">
+              <a:lnSpc>
+                <a:spcPct val="100000"/>
+              </a:lnSpc>
+              <a:spcBef>
+                <a:spcPts val="0"/>
+              </a:spcBef>
+              <a:spcAft>
+                <a:spcPts val="0"/>
+              </a:spcAft>
+            </a:pPr>
+            <a:r>
+              <a:rPr sz="1000" b="0">
+                <a:solidFill>
+                  <a:srgbClr val="66727F"/>
+                </a:solidFill>
+                <a:latin typeface="Microsoft YaHei"/>
+                <a:ea typeface="Microsoft YaHei"/>
+                <a:cs typeface="Microsoft YaHei"/>
+              </a:rPr>
+              <a:t>这几项短期内不打算交出去</a:t>
+            </a:r>
+          </a:p>
+        </p:txBody>
+      </p:sp>
+      <p:sp>
+        <p:nvSpPr>
+          <p:cNvPr id="31" name="Rectangle 30"/>
+          <p:cNvSpPr/>
+          <p:nvPr/>
+        </p:nvSpPr>
+        <p:spPr>
+          <a:xfrm>
+            <a:off x="8127796" y="1828800"/>
+            <a:ext cx="3515258" cy="3200400"/>
+          </a:xfrm>
+          <a:prstGeom prst="rect">
+            <a:avLst/>
+          </a:prstGeom>
+          <a:solidFill>
+            <a:srgbClr val="FFFFFF"/>
+          </a:solidFill>
+          <a:ln w="9525">
+            <a:solidFill>
+              <a:srgbClr val="C5CCD4"/>
+            </a:solidFill>
+            <a:prstDash val="dash"/>
+          </a:ln>
+        </p:spPr>
+        <p:txBody>
+          <a:bodyPr rtlCol="0" anchor="ctr"/>
+          <a:lstStyle/>
+          <a:p>
+            <a:pPr algn="ctr"/>
+          </a:p>
+        </p:txBody>
+      </p:sp>
+      <p:sp>
+        <p:nvSpPr>
+          <p:cNvPr id="32" name="TextBox 31"/>
+          <p:cNvSpPr txBox="1"/>
+          <p:nvPr/>
+        </p:nvSpPr>
+        <p:spPr>
+          <a:xfrm>
+            <a:off x="8347252" y="2011680"/>
+            <a:ext cx="3076346" cy="329184"/>
+          </a:xfrm>
+          <a:prstGeom prst="rect">
+            <a:avLst/>
+          </a:prstGeom>
+          <a:noFill/>
+        </p:spPr>
+        <p:txBody>
+          <a:bodyPr wrap="square" anchor="ctr" lIns="0" tIns="0" rIns="0" bIns="0">
+            <a:noAutofit/>
+          </a:bodyPr>
+          <a:lstStyle/>
+          <a:p>
+            <a:pPr algn="l" latinLnBrk="0">
+              <a:lnSpc>
+                <a:spcPct val="100000"/>
+              </a:lnSpc>
+              <a:spcBef>
+                <a:spcPts val="0"/>
+              </a:spcBef>
+              <a:spcAft>
+                <a:spcPts val="0"/>
+              </a:spcAft>
+            </a:pPr>
+            <a:r>
+              <a:rPr sz="1500" b="1">
+                <a:solidFill>
+                  <a:srgbClr val="16202A"/>
+                </a:solidFill>
+                <a:latin typeface="Microsoft YaHei"/>
+                <a:ea typeface="Microsoft YaHei"/>
+                <a:cs typeface="Microsoft YaHei"/>
+              </a:rPr>
+              <a:t>下一步补齐</a:t>
+            </a:r>
+          </a:p>
+        </p:txBody>
+      </p:sp>
+      <p:sp>
+        <p:nvSpPr>
+          <p:cNvPr id="33" name="TextBox 32"/>
+          <p:cNvSpPr txBox="1"/>
+          <p:nvPr/>
+        </p:nvSpPr>
+        <p:spPr>
+          <a:xfrm>
+            <a:off x="8347252" y="2359152"/>
+            <a:ext cx="3076346" cy="237744"/>
+          </a:xfrm>
+          <a:prstGeom prst="rect">
+            <a:avLst/>
+          </a:prstGeom>
+          <a:noFill/>
+        </p:spPr>
+        <p:txBody>
+          <a:bodyPr wrap="square" anchor="ctr" lIns="0" tIns="0" rIns="0" bIns="0">
+            <a:noAutofit/>
+          </a:bodyPr>
+          <a:lstStyle/>
+          <a:p>
+            <a:pPr algn="l" latinLnBrk="0">
+              <a:lnSpc>
+                <a:spcPct val="100000"/>
+              </a:lnSpc>
+              <a:spcBef>
+                <a:spcPts val="0"/>
+              </a:spcBef>
+              <a:spcAft>
+                <a:spcPts val="0"/>
+              </a:spcAft>
+            </a:pPr>
+            <a:r>
+              <a:rPr sz="950" b="0">
+                <a:solidFill>
+                  <a:srgbClr val="66727F"/>
+                </a:solidFill>
+                <a:latin typeface="Consolas"/>
+                <a:ea typeface="Microsoft YaHei"/>
+                <a:cs typeface="Microsoft YaHei"/>
+              </a:rPr>
+              <a:t>第 7 - 8 页</a:t>
+            </a:r>
+          </a:p>
+        </p:txBody>
+      </p:sp>
+      <p:sp>
+        <p:nvSpPr>
+          <p:cNvPr id="34" name="Oval 33"/>
+          <p:cNvSpPr/>
+          <p:nvPr/>
+        </p:nvSpPr>
+        <p:spPr>
+          <a:xfrm>
+            <a:off x="8347252" y="2889504"/>
+            <a:ext cx="91440" cy="91440"/>
+          </a:xfrm>
+          <a:prstGeom prst="ellipse">
+            <a:avLst/>
+          </a:prstGeom>
+          <a:solidFill>
+            <a:srgbClr val="C0612C"/>
+          </a:solidFill>
+          <a:ln>
+            <a:noFill/>
+          </a:ln>
+        </p:spPr>
+        <p:txBody>
+          <a:bodyPr rtlCol="0" anchor="ctr"/>
+          <a:lstStyle/>
+          <a:p>
+            <a:pPr algn="ctr"/>
+          </a:p>
+        </p:txBody>
+      </p:sp>
+      <p:sp>
+        <p:nvSpPr>
+          <p:cNvPr id="35" name="TextBox 34"/>
+          <p:cNvSpPr txBox="1"/>
+          <p:nvPr/>
+        </p:nvSpPr>
+        <p:spPr>
+          <a:xfrm>
+            <a:off x="8548420" y="2724912"/>
+            <a:ext cx="2875178" cy="457200"/>
+          </a:xfrm>
+          <a:prstGeom prst="rect">
+            <a:avLst/>
+          </a:prstGeom>
+          <a:noFill/>
+        </p:spPr>
+        <p:txBody>
+          <a:bodyPr wrap="square" anchor="ctr" lIns="0" tIns="0" rIns="0" bIns="0">
+            <a:noAutofit/>
+          </a:bodyPr>
+          <a:lstStyle/>
+          <a:p>
+            <a:pPr algn="l" latinLnBrk="0">
+              <a:lnSpc>
+                <a:spcPct val="100000"/>
+              </a:lnSpc>
+              <a:spcBef>
+                <a:spcPts val="0"/>
+              </a:spcBef>
+              <a:spcAft>
+                <a:spcPts val="0"/>
+              </a:spcAft>
+            </a:pPr>
+            <a:r>
+              <a:rPr sz="1100" b="0">
+                <a:solidFill>
+                  <a:srgbClr val="35424F"/>
+                </a:solidFill>
+                <a:latin typeface="Microsoft YaHei"/>
+                <a:ea typeface="Microsoft YaHei"/>
+                <a:cs typeface="Microsoft YaHei"/>
+              </a:rPr>
+              <a:t>换算链在 M100 上校准</a:t>
+            </a:r>
+          </a:p>
+        </p:txBody>
+      </p:sp>
+      <p:sp>
+        <p:nvSpPr>
+          <p:cNvPr id="36" name="Oval 35"/>
+          <p:cNvSpPr/>
+          <p:nvPr/>
+        </p:nvSpPr>
+        <p:spPr>
+          <a:xfrm>
+            <a:off x="8347252" y="3346704"/>
+            <a:ext cx="91440" cy="91440"/>
+          </a:xfrm>
+          <a:prstGeom prst="ellipse">
+            <a:avLst/>
+          </a:prstGeom>
+          <a:solidFill>
+            <a:srgbClr val="C0612C"/>
+          </a:solidFill>
+          <a:ln>
+            <a:noFill/>
+          </a:ln>
+        </p:spPr>
+        <p:txBody>
+          <a:bodyPr rtlCol="0" anchor="ctr"/>
+          <a:lstStyle/>
+          <a:p>
+            <a:pPr algn="ctr"/>
+          </a:p>
+        </p:txBody>
+      </p:sp>
+      <p:sp>
+        <p:nvSpPr>
+          <p:cNvPr id="37" name="TextBox 36"/>
+          <p:cNvSpPr txBox="1"/>
+          <p:nvPr/>
+        </p:nvSpPr>
+        <p:spPr>
+          <a:xfrm>
+            <a:off x="8548420" y="3182112"/>
+            <a:ext cx="2875178" cy="457200"/>
+          </a:xfrm>
+          <a:prstGeom prst="rect">
+            <a:avLst/>
+          </a:prstGeom>
+          <a:noFill/>
+        </p:spPr>
+        <p:txBody>
+          <a:bodyPr wrap="square" anchor="ctr" lIns="0" tIns="0" rIns="0" bIns="0">
+            <a:noAutofit/>
+          </a:bodyPr>
+          <a:lstStyle/>
+          <a:p>
+            <a:pPr algn="l" latinLnBrk="0">
+              <a:lnSpc>
+                <a:spcPct val="100000"/>
+              </a:lnSpc>
+              <a:spcBef>
+                <a:spcPts val="0"/>
+              </a:spcBef>
+              <a:spcAft>
+                <a:spcPts val="0"/>
+              </a:spcAft>
+            </a:pPr>
+            <a:r>
+              <a:rPr sz="1100" b="0">
+                <a:solidFill>
+                  <a:srgbClr val="35424F"/>
+                </a:solidFill>
+                <a:latin typeface="Microsoft YaHei"/>
+                <a:ea typeface="Microsoft YaHei"/>
+                <a:cs typeface="Microsoft YaHei"/>
+              </a:rPr>
+              <a:t>模型层与算子层自动交接</a:t>
+            </a:r>
+          </a:p>
+        </p:txBody>
+      </p:sp>
+      <p:sp>
+        <p:nvSpPr>
+          <p:cNvPr id="38" name="Oval 37"/>
+          <p:cNvSpPr/>
+          <p:nvPr/>
+        </p:nvSpPr>
+        <p:spPr>
+          <a:xfrm>
+            <a:off x="8347252" y="3803904"/>
+            <a:ext cx="91440" cy="91440"/>
+          </a:xfrm>
+          <a:prstGeom prst="ellipse">
+            <a:avLst/>
+          </a:prstGeom>
+          <a:solidFill>
+            <a:srgbClr val="C0612C"/>
+          </a:solidFill>
+          <a:ln>
+            <a:noFill/>
+          </a:ln>
+        </p:spPr>
+        <p:txBody>
+          <a:bodyPr rtlCol="0" anchor="ctr"/>
+          <a:lstStyle/>
+          <a:p>
+            <a:pPr algn="ctr"/>
+          </a:p>
+        </p:txBody>
+      </p:sp>
+      <p:sp>
+        <p:nvSpPr>
+          <p:cNvPr id="39" name="TextBox 38"/>
+          <p:cNvSpPr txBox="1"/>
+          <p:nvPr/>
+        </p:nvSpPr>
+        <p:spPr>
+          <a:xfrm>
+            <a:off x="8548420" y="3639312"/>
+            <a:ext cx="2875178" cy="457200"/>
+          </a:xfrm>
+          <a:prstGeom prst="rect">
+            <a:avLst/>
+          </a:prstGeom>
+          <a:noFill/>
+        </p:spPr>
+        <p:txBody>
+          <a:bodyPr wrap="square" anchor="ctr" lIns="0" tIns="0" rIns="0" bIns="0">
+            <a:noAutofit/>
+          </a:bodyPr>
+          <a:lstStyle/>
+          <a:p>
+            <a:pPr algn="l" latinLnBrk="0">
+              <a:lnSpc>
+                <a:spcPct val="100000"/>
+              </a:lnSpc>
+              <a:spcBef>
+                <a:spcPts val="0"/>
+              </a:spcBef>
+              <a:spcAft>
+                <a:spcPts val="0"/>
+              </a:spcAft>
+            </a:pPr>
+            <a:r>
+              <a:rPr sz="1100" b="0">
+                <a:solidFill>
+                  <a:srgbClr val="35424F"/>
+                </a:solidFill>
+                <a:latin typeface="Microsoft YaHei"/>
+                <a:ea typeface="Microsoft YaHei"/>
+                <a:cs typeface="Microsoft YaHei"/>
+              </a:rPr>
+              <a:t>规则与补丁沉淀为可复用知识</a:t>
+            </a:r>
+          </a:p>
+        </p:txBody>
+      </p:sp>
+      <p:sp>
+        <p:nvSpPr>
+          <p:cNvPr id="40" name="Oval 39"/>
+          <p:cNvSpPr/>
+          <p:nvPr/>
+        </p:nvSpPr>
+        <p:spPr>
+          <a:xfrm>
+            <a:off x="8347252" y="4261104"/>
+            <a:ext cx="91440" cy="91440"/>
+          </a:xfrm>
+          <a:prstGeom prst="ellipse">
+            <a:avLst/>
+          </a:prstGeom>
+          <a:solidFill>
+            <a:srgbClr val="C0612C"/>
+          </a:solidFill>
+          <a:ln>
+            <a:noFill/>
+          </a:ln>
+        </p:spPr>
+        <p:txBody>
+          <a:bodyPr rtlCol="0" anchor="ctr"/>
+          <a:lstStyle/>
+          <a:p>
+            <a:pPr algn="ctr"/>
+          </a:p>
+        </p:txBody>
+      </p:sp>
+      <p:sp>
+        <p:nvSpPr>
+          <p:cNvPr id="41" name="TextBox 40"/>
+          <p:cNvSpPr txBox="1"/>
+          <p:nvPr/>
+        </p:nvSpPr>
+        <p:spPr>
+          <a:xfrm>
+            <a:off x="8548420" y="4096512"/>
+            <a:ext cx="2875178" cy="457200"/>
+          </a:xfrm>
+          <a:prstGeom prst="rect">
+            <a:avLst/>
+          </a:prstGeom>
+          <a:noFill/>
+        </p:spPr>
+        <p:txBody>
+          <a:bodyPr wrap="square" anchor="ctr" lIns="0" tIns="0" rIns="0" bIns="0">
+            <a:noAutofit/>
+          </a:bodyPr>
+          <a:lstStyle/>
+          <a:p>
+            <a:pPr algn="l" latinLnBrk="0">
+              <a:lnSpc>
+                <a:spcPct val="100000"/>
+              </a:lnSpc>
+              <a:spcBef>
+                <a:spcPts val="0"/>
+              </a:spcBef>
+              <a:spcAft>
+                <a:spcPts val="0"/>
+              </a:spcAft>
+            </a:pPr>
+            <a:r>
+              <a:rPr sz="1100" b="0">
+                <a:solidFill>
+                  <a:srgbClr val="35424F"/>
+                </a:solidFill>
+                <a:latin typeface="Microsoft YaHei"/>
+                <a:ea typeface="Microsoft YaHei"/>
+                <a:cs typeface="Microsoft YaHei"/>
+              </a:rPr>
+              <a:t>适配成本的量化对账</a:t>
+            </a:r>
+          </a:p>
+        </p:txBody>
+      </p:sp>
+      <p:sp>
+        <p:nvSpPr>
+          <p:cNvPr id="42" name="TextBox 41"/>
+          <p:cNvSpPr txBox="1"/>
+          <p:nvPr/>
+        </p:nvSpPr>
+        <p:spPr>
+          <a:xfrm>
+            <a:off x="8347252" y="4572000"/>
+            <a:ext cx="3076346" cy="310896"/>
+          </a:xfrm>
+          <a:prstGeom prst="rect">
+            <a:avLst/>
+          </a:prstGeom>
+          <a:noFill/>
+        </p:spPr>
+        <p:txBody>
+          <a:bodyPr wrap="square" anchor="ctr" lIns="0" tIns="0" rIns="0" bIns="0">
+            <a:noAutofit/>
+          </a:bodyPr>
+          <a:lstStyle/>
+          <a:p>
+            <a:pPr algn="l" latinLnBrk="0">
+              <a:lnSpc>
+                <a:spcPct val="100000"/>
+              </a:lnSpc>
+              <a:spcBef>
+                <a:spcPts val="0"/>
+              </a:spcBef>
+              <a:spcAft>
+                <a:spcPts val="0"/>
+              </a:spcAft>
+            </a:pPr>
+            <a:r>
+              <a:rPr sz="1000" b="0">
+                <a:solidFill>
+                  <a:srgbClr val="66727F"/>
+                </a:solidFill>
+                <a:latin typeface="Microsoft YaHei"/>
+                <a:ea typeface="Microsoft YaHei"/>
+                <a:cs typeface="Microsoft YaHei"/>
+              </a:rPr>
+              <a:t>按这个顺序做，先校准再谈预测</a:t>
+            </a:r>
+          </a:p>
+        </p:txBody>
+      </p:sp>
+      <p:sp>
+        <p:nvSpPr>
+          <p:cNvPr id="43" name="Rectangle 42"/>
+          <p:cNvSpPr/>
+          <p:nvPr/>
+        </p:nvSpPr>
+        <p:spPr>
+          <a:xfrm>
+            <a:off x="548640" y="5230368"/>
+            <a:ext cx="11094415" cy="566928"/>
+          </a:xfrm>
+          <a:prstGeom prst="rect">
+            <a:avLst/>
+          </a:prstGeom>
+          <a:solidFill>
+            <a:srgbClr val="F8EADF"/>
+          </a:solidFill>
+          <a:ln>
+            <a:noFill/>
+          </a:ln>
+        </p:spPr>
+        <p:txBody>
+          <a:bodyPr rtlCol="0" anchor="ctr"/>
+          <a:lstStyle/>
+          <a:p>
+            <a:pPr algn="ctr"/>
+          </a:p>
+        </p:txBody>
+      </p:sp>
+      <p:sp>
+        <p:nvSpPr>
+          <p:cNvPr id="44" name="Rectangle 43"/>
+          <p:cNvSpPr/>
+          <p:nvPr/>
+        </p:nvSpPr>
+        <p:spPr>
+          <a:xfrm>
+            <a:off x="548640" y="5230368"/>
+            <a:ext cx="64008" cy="566928"/>
+          </a:xfrm>
+          <a:prstGeom prst="rect">
+            <a:avLst/>
+          </a:prstGeom>
+          <a:solidFill>
+            <a:srgbClr val="C0612C"/>
+          </a:solidFill>
+          <a:ln>
+            <a:noFill/>
+          </a:ln>
+        </p:spPr>
+        <p:txBody>
+          <a:bodyPr rtlCol="0" anchor="ctr"/>
+          <a:lstStyle/>
+          <a:p>
+            <a:pPr algn="ctr"/>
+          </a:p>
+        </p:txBody>
+      </p:sp>
+      <p:sp>
+        <p:nvSpPr>
+          <p:cNvPr id="45" name="TextBox 44"/>
+          <p:cNvSpPr txBox="1"/>
+          <p:nvPr/>
+        </p:nvSpPr>
+        <p:spPr>
+          <a:xfrm>
+            <a:off x="859536" y="5230368"/>
+            <a:ext cx="10454335" cy="566928"/>
+          </a:xfrm>
+          <a:prstGeom prst="rect">
+            <a:avLst/>
+          </a:prstGeom>
+          <a:noFill/>
+        </p:spPr>
+        <p:txBody>
+          <a:bodyPr wrap="square" anchor="ctr" lIns="0" tIns="0" rIns="0" bIns="0">
+            <a:noAutofit/>
+          </a:bodyPr>
+          <a:lstStyle/>
+          <a:p>
+            <a:pPr algn="l" latinLnBrk="0">
+              <a:lnSpc>
+                <a:spcPct val="100000"/>
+              </a:lnSpc>
+              <a:spcBef>
+                <a:spcPts val="0"/>
+              </a:spcBef>
+              <a:spcAft>
+                <a:spcPts val="0"/>
+              </a:spcAft>
+            </a:pPr>
+            <a:r>
+              <a:rPr sz="1200" b="1">
+                <a:solidFill>
+                  <a:srgbClr val="C0612C"/>
+                </a:solidFill>
+                <a:latin typeface="Consolas"/>
+                <a:ea typeface="Microsoft YaHei"/>
+                <a:cs typeface="Microsoft YaHei"/>
+              </a:rPr>
+              <a:t>命题　</a:t>
+            </a:r>
+            <a:r>
+              <a:rPr sz="1600" b="1">
+                <a:solidFill>
+                  <a:srgbClr val="16202A"/>
+                </a:solidFill>
+                <a:latin typeface="Microsoft YaHei"/>
+                <a:ea typeface="Microsoft YaHei"/>
+                <a:cs typeface="Microsoft YaHei"/>
+              </a:rPr>
+              <a:t>把重复判断交给 Agent，一个模型一个模型往下压</a:t>
+            </a:r>
+          </a:p>
+        </p:txBody>
+      </p:sp>
+      <p:sp>
+        <p:nvSpPr>
+          <p:cNvPr id="46" name="TextBox 45"/>
+          <p:cNvSpPr txBox="1"/>
+          <p:nvPr/>
+        </p:nvSpPr>
+        <p:spPr>
+          <a:xfrm>
+            <a:off x="548640" y="6382512"/>
+            <a:ext cx="9722815" cy="256032"/>
+          </a:xfrm>
+          <a:prstGeom prst="rect">
+            <a:avLst/>
+          </a:prstGeom>
+          <a:noFill/>
+        </p:spPr>
+        <p:txBody>
+          <a:bodyPr wrap="square" anchor="ctr" lIns="0" tIns="0" rIns="0" bIns="0">
+            <a:noAutofit/>
+          </a:bodyPr>
+          <a:lstStyle/>
+          <a:p>
+            <a:pPr algn="l" latinLnBrk="0">
+              <a:lnSpc>
+                <a:spcPct val="100000"/>
+              </a:lnSpc>
+              <a:spcBef>
+                <a:spcPts val="0"/>
+              </a:spcBef>
+              <a:spcAft>
+                <a:spcPts val="0"/>
+              </a:spcAft>
+            </a:pPr>
+            <a:r>
+              <a:rPr sz="1000" b="0">
+                <a:solidFill>
+                  <a:srgbClr val="66727F"/>
+                </a:solidFill>
+                <a:latin typeface="Microsoft YaHei"/>
+                <a:ea typeface="Microsoft YaHei"/>
+                <a:cs typeface="Microsoft YaHei"/>
+              </a:rPr>
+              <a:t>三列按当前进度如实分栏；左列已在 M100 上跑通，右列尚未开始</a:t>
+            </a:r>
+          </a:p>
+        </p:txBody>
+      </p:sp>
+      <p:sp>
+        <p:nvSpPr>
+          <p:cNvPr id="47" name="TextBox 46"/>
+          <p:cNvSpPr txBox="1"/>
+          <p:nvPr/>
+        </p:nvSpPr>
+        <p:spPr>
+          <a:xfrm>
+            <a:off x="10362895" y="6382512"/>
+            <a:ext cx="1280160" cy="256032"/>
+          </a:xfrm>
+          <a:prstGeom prst="rect">
+            <a:avLst/>
+          </a:prstGeom>
+          <a:noFill/>
+        </p:spPr>
+        <p:txBody>
+          <a:bodyPr wrap="square" anchor="ctr" lIns="0" tIns="0" rIns="0" bIns="0">
+            <a:noAutofit/>
+          </a:bodyPr>
+          <a:lstStyle/>
+          <a:p>
+            <a:pPr algn="r" latinLnBrk="0">
+              <a:lnSpc>
+                <a:spcPct val="100000"/>
+              </a:lnSpc>
+              <a:spcBef>
+                <a:spcPts val="0"/>
+              </a:spcBef>
+              <a:spcAft>
+                <a:spcPts val="0"/>
+              </a:spcAft>
+            </a:pPr>
+            <a:r>
+              <a:rPr sz="1000" b="0">
+                <a:solidFill>
+                  <a:srgbClr val="66727F"/>
+                </a:solidFill>
+                <a:latin typeface="Consolas"/>
+                <a:ea typeface="Microsoft YaHei"/>
+                <a:cs typeface="Microsoft YaHei"/>
+              </a:rPr>
+              <a:t>9 / 9</a:t>
             </a:r>
           </a:p>
         </p:txBody>

--- a/slides/m100_agent_deck.pptx
+++ b/slides/m100_agent_deck.pptx
@@ -2239,7 +2239,7 @@
                 <a:ea typeface="Microsoft YaHei"/>
                 <a:cs typeface="Microsoft YaHei"/>
               </a:rPr>
-              <a:t>【7 / 10 · 算子层 · batch_norm 迭代记录 · 约 200 秒（3:20）】</a:t>
+              <a:t>【7 / 10 · 算子层 · batch_norm 迭代记录 · 约 195 秒（3:15）】</a:t>
             </a:r>
           </a:p>
           <a:p>
@@ -2311,7 +2311,7 @@
                 <a:ea typeface="Microsoft YaHei"/>
                 <a:cs typeface="Microsoft YaHei"/>
               </a:rPr>
-              <a:t>然后是五轮改动。第 2 轮换成原生 rsqrt 指令，13.24 降到 11.72，0.532 升到 0.601，保留。第 3 轮想用 shared 广播系数，加了同步，结果更慢，15.06 微秒，当场丢弃。第 4 轮想把系数挪到 host 侧折好，但每次要 H2D 上传 2KB，光传输就 17.6 微秒，比 kernel 还贵，也丢弃。第 5 轮修了 copy 路径上的寄存器 spill，9.81 微秒，achieved 0.719——已经贴到地板上了。第 6 轮把折叠做成 scale 乘 x 加 shift，9.82，持平，作为交付默认。</a:t>
+              <a:t>右边是五轮改动，表上都有，我只点两处。第 3 轮想用 shared 广播系数，加了同步之后反而更慢，15.06 微秒，当场丢弃；第 4 轮想把系数挪到 host 侧折好，但每次要 H2D 上传 2KB，光传输就 17.6 微秒，比 kernel 本身还贵，也丢弃——注意这一轮丢的理由是整体变慢，不是 kernel 变慢。</a:t>
             </a:r>
           </a:p>
           <a:p>
@@ -2329,7 +2329,7 @@
                 <a:ea typeface="Microsoft YaHei"/>
                 <a:cs typeface="Microsoft YaHei"/>
               </a:rPr>
-              <a:t>第 7、8 轮没有性能变化，是补模拟器消融脚手架和修 ABI，属于基础设施。交付前在空闲卡上复测两百次，9.66 微秒，achieved 0.730。</a:t>
+              <a:t>真正有效的是第 2、5、6 轮：换原生 rsqrt 指令到 0.601，修 copy 路径的寄存器 spill 到 0.719，再把折叠做成 scale 乘 x 加 shift 持平交付。第 7、8 轮是补脚手架和修 ABI，没有性能变化。交付前在空闲卡上复测两百次，9.66 微秒，achieved 0.730。</a:t>
             </a:r>
           </a:p>
           <a:p>
@@ -2347,7 +2347,7 @@
                 <a:ea typeface="Microsoft YaHei"/>
                 <a:cs typeface="Microsoft YaHei"/>
               </a:rPr>
-              <a:t>两件事值得强调。第一，八轮里只有三轮带来收益，两轮被真机测量当场否掉——这和第 5 页模型层的做法是同一套：判定不听模型解释，只看测量。第二，现在已经打在拷贝地板上，再怎么优化计算都不会有收益，要再快只能换访存方式。</a:t>
+              <a:t>两件事值得强调。第一，八轮里只有三轮带来收益，两轮被真机测量当场否掉——这和第 5 页模型层是同一套做法：判定不听模型解释，只看测量。第二，现在已经打在拷贝地板上，再怎么优化计算都不会有收益，要再快只能换访存方式。</a:t>
             </a:r>
           </a:p>
           <a:p>

--- a/slides/m100_agent_deck.pptx
+++ b/slides/m100_agent_deck.pptx
@@ -1050,7 +1050,7 @@
                 <a:ea typeface="Microsoft YaHei"/>
                 <a:cs typeface="Microsoft YaHei"/>
               </a:rPr>
-              <a:t>下面一框是算子层：XCN_ATEN_OPS。这一层补齐算子缺口、生成与调优实现、再用真机验证收益，第 6 页展开。</a:t>
+              <a:t>下面一框是算子层：XCN_ATEN_OPS。这一层补齐算子缺口、生成与调优实现、再用真机验证收益，第 6、7 页展开。</a:t>
             </a:r>
           </a:p>
           <a:p>
@@ -10373,7 +10373,7 @@
                 <a:ea typeface="Microsoft YaHei"/>
                 <a:cs typeface="Microsoft YaHei"/>
               </a:rPr>
-              <a:t>　→　第 6 页展开</a:t>
+              <a:t>　→　第 6、7 页展开</a:t>
             </a:r>
           </a:p>
         </p:txBody>

--- a/slides/m100_agent_deck.pptx
+++ b/slides/m100_agent_deck.pptx
@@ -2311,7 +2311,7 @@
                 <a:ea typeface="Microsoft YaHei"/>
                 <a:cs typeface="Microsoft YaHei"/>
               </a:rPr>
-              <a:t>右边是五轮改动，表上都有，我只点两处。第 3 轮想用 shared 广播系数，加了同步之后反而更慢，15.06 微秒，当场丢弃；第 4 轮想把系数挪到 host 侧折好，但每次要 H2D 上传 2KB，光传输就 17.6 微秒，比 kernel 本身还贵，也丢弃——注意这一轮丢的理由是整体变慢，不是 kernel 变慢。</a:t>
+              <a:t>右边是五轮改动，表上都有，我只点两处。第 3 轮想用 shared 广播系数，加了同步之后反而更慢，15.06 微秒、0.468，当场丢弃；第 4 轮想把系数挪到 host 侧折好，但每次调用都要把系数 H2D 上传一遍，连上传一起算 17.60 微秒、0.401，是八轮里最差的一个，也丢弃。</a:t>
             </a:r>
           </a:p>
           <a:p>
@@ -2437,7 +2437,7 @@
                 <a:ea typeface="Microsoft YaHei"/>
                 <a:cs typeface="Microsoft YaHei"/>
               </a:rPr>
-              <a:t>第 4 轮的 17.60 微秒是 H2D 传输本身，不是 kernel 耗时，所以那一行没有 achieved；它被丢弃的理由是整体变慢，而不是 kernel 变慢。</a:t>
+              <a:t>第 4 轮的 0.401 是按 17.60 微秒的整体耗时算的，里面含每次调用的 H2D 上传。kernel 本身没有变慢，是这次上传把整体拖垮了，所以丢弃的理由是整体变慢。</a:t>
             </a:r>
           </a:p>
           <a:p>
@@ -19523,7 +19523,7 @@
         </p:nvCxnSpPr>
         <p:spPr>
           <a:xfrm>
-            <a:off x="1188720" y="4243324"/>
+            <a:off x="1188720" y="4204498"/>
             <a:ext cx="5349240" cy="0"/>
           </a:xfrm>
           <a:prstGeom prst="line">
@@ -19544,7 +19544,7 @@
         </p:nvSpPr>
         <p:spPr>
           <a:xfrm>
-            <a:off x="621792" y="4142739"/>
+            <a:off x="621792" y="4103914"/>
             <a:ext cx="457200" cy="201168"/>
           </a:xfrm>
           <a:prstGeom prst="rect">
@@ -19578,7 +19578,7 @@
                 <a:ea typeface="Microsoft YaHei"/>
                 <a:cs typeface="Microsoft YaHei"/>
               </a:rPr>
-              <a:t>0.45</a:t>
+              <a:t>0.40</a:t>
             </a:r>
           </a:p>
         </p:txBody>
@@ -19646,7 +19646,7 @@
                 <a:ea typeface="Microsoft YaHei"/>
                 <a:cs typeface="Microsoft YaHei"/>
               </a:rPr>
-              <a:t>0.50</a:t>
+              <a:t>0.45</a:t>
             </a:r>
           </a:p>
         </p:txBody>
@@ -19659,7 +19659,7 @@
         </p:nvCxnSpPr>
         <p:spPr>
           <a:xfrm>
-            <a:off x="1188720" y="3699764"/>
+            <a:off x="1188720" y="3738589"/>
             <a:ext cx="5349240" cy="0"/>
           </a:xfrm>
           <a:prstGeom prst="line">
@@ -19680,7 +19680,7 @@
         </p:nvSpPr>
         <p:spPr>
           <a:xfrm>
-            <a:off x="621792" y="3599180"/>
+            <a:off x="621792" y="3638005"/>
             <a:ext cx="457200" cy="201168"/>
           </a:xfrm>
           <a:prstGeom prst="rect">
@@ -19714,7 +19714,7 @@
                 <a:ea typeface="Microsoft YaHei"/>
                 <a:cs typeface="Microsoft YaHei"/>
               </a:rPr>
-              <a:t>0.55</a:t>
+              <a:t>0.50</a:t>
             </a:r>
           </a:p>
         </p:txBody>
@@ -19727,7 +19727,7 @@
         </p:nvCxnSpPr>
         <p:spPr>
           <a:xfrm>
-            <a:off x="1188720" y="3427984"/>
+            <a:off x="1188720" y="3505635"/>
             <a:ext cx="5349240" cy="0"/>
           </a:xfrm>
           <a:prstGeom prst="line">
@@ -19748,7 +19748,7 @@
         </p:nvSpPr>
         <p:spPr>
           <a:xfrm>
-            <a:off x="621792" y="3327400"/>
+            <a:off x="621792" y="3405051"/>
             <a:ext cx="457200" cy="201168"/>
           </a:xfrm>
           <a:prstGeom prst="rect">
@@ -19782,7 +19782,7 @@
                 <a:ea typeface="Microsoft YaHei"/>
                 <a:cs typeface="Microsoft YaHei"/>
               </a:rPr>
-              <a:t>0.60</a:t>
+              <a:t>0.55</a:t>
             </a:r>
           </a:p>
         </p:txBody>
@@ -19795,7 +19795,7 @@
         </p:nvCxnSpPr>
         <p:spPr>
           <a:xfrm>
-            <a:off x="1188720" y="3156204"/>
+            <a:off x="1188720" y="3272681"/>
             <a:ext cx="5349240" cy="0"/>
           </a:xfrm>
           <a:prstGeom prst="line">
@@ -19816,7 +19816,7 @@
         </p:nvSpPr>
         <p:spPr>
           <a:xfrm>
-            <a:off x="621792" y="3055620"/>
+            <a:off x="621792" y="3172097"/>
             <a:ext cx="457200" cy="201168"/>
           </a:xfrm>
           <a:prstGeom prst="rect">
@@ -19850,67 +19850,20 @@
                 <a:ea typeface="Microsoft YaHei"/>
                 <a:cs typeface="Microsoft YaHei"/>
               </a:rPr>
-              <a:t>0.65</a:t>
-            </a:r>
-          </a:p>
-        </p:txBody>
-      </p:sp>
-      <p:sp>
-        <p:nvSpPr>
-          <p:cNvPr id="23" name="TextBox 22"/>
-          <p:cNvSpPr txBox="1"/>
-          <p:nvPr/>
-        </p:nvSpPr>
-        <p:spPr>
-          <a:xfrm>
-            <a:off x="621792" y="2783840"/>
-            <a:ext cx="457200" cy="201168"/>
-          </a:xfrm>
-          <a:prstGeom prst="rect">
-            <a:avLst/>
-          </a:prstGeom>
-          <a:noFill/>
-        </p:spPr>
-        <p:txBody>
-          <a:bodyPr wrap="square" anchor="ctr" lIns="0" tIns="0" rIns="0" bIns="0">
-            <a:noAutofit/>
-          </a:bodyPr>
-          <a:lstStyle/>
-          <a:p>
-            <a:pPr algn="r" latinLnBrk="0">
-              <a:lnSpc>
-                <a:spcPct val="100000"/>
-              </a:lnSpc>
-              <a:spcBef>
-                <a:spcPts val="0"/>
-              </a:spcBef>
-              <a:spcAft>
-                <a:spcPts val="0"/>
-              </a:spcAft>
-            </a:pPr>
-            <a:r>
-              <a:rPr sz="900" b="0">
-                <a:solidFill>
-                  <a:srgbClr val="8C96A1"/>
-                </a:solidFill>
-                <a:latin typeface="Microsoft YaHei"/>
-                <a:ea typeface="Microsoft YaHei"/>
-                <a:cs typeface="Microsoft YaHei"/>
-              </a:rPr>
-              <a:t>0.70</a:t>
+              <a:t>0.60</a:t>
             </a:r>
           </a:p>
         </p:txBody>
       </p:sp>
       <p:cxnSp>
         <p:nvCxnSpPr>
-          <p:cNvPr id="24" name="Connector 23"/>
+          <p:cNvPr id="23" name="Connector 22"/>
           <p:cNvCxnSpPr/>
           <p:nvPr/>
         </p:nvCxnSpPr>
         <p:spPr>
           <a:xfrm>
-            <a:off x="1188720" y="2612644"/>
+            <a:off x="1188720" y="3039726"/>
             <a:ext cx="5349240" cy="0"/>
           </a:xfrm>
           <a:prstGeom prst="line">
@@ -19925,13 +19878,60 @@
       </p:cxnSp>
       <p:sp>
         <p:nvSpPr>
+          <p:cNvPr id="24" name="TextBox 23"/>
+          <p:cNvSpPr txBox="1"/>
+          <p:nvPr/>
+        </p:nvSpPr>
+        <p:spPr>
+          <a:xfrm>
+            <a:off x="621792" y="2939142"/>
+            <a:ext cx="457200" cy="201168"/>
+          </a:xfrm>
+          <a:prstGeom prst="rect">
+            <a:avLst/>
+          </a:prstGeom>
+          <a:noFill/>
+        </p:spPr>
+        <p:txBody>
+          <a:bodyPr wrap="square" anchor="ctr" lIns="0" tIns="0" rIns="0" bIns="0">
+            <a:noAutofit/>
+          </a:bodyPr>
+          <a:lstStyle/>
+          <a:p>
+            <a:pPr algn="r" latinLnBrk="0">
+              <a:lnSpc>
+                <a:spcPct val="100000"/>
+              </a:lnSpc>
+              <a:spcBef>
+                <a:spcPts val="0"/>
+              </a:spcBef>
+              <a:spcAft>
+                <a:spcPts val="0"/>
+              </a:spcAft>
+            </a:pPr>
+            <a:r>
+              <a:rPr sz="900" b="0">
+                <a:solidFill>
+                  <a:srgbClr val="8C96A1"/>
+                </a:solidFill>
+                <a:latin typeface="Microsoft YaHei"/>
+                <a:ea typeface="Microsoft YaHei"/>
+                <a:cs typeface="Microsoft YaHei"/>
+              </a:rPr>
+              <a:t>0.65</a:t>
+            </a:r>
+          </a:p>
+        </p:txBody>
+      </p:sp>
+      <p:sp>
+        <p:nvSpPr>
           <p:cNvPr id="25" name="TextBox 24"/>
           <p:cNvSpPr txBox="1"/>
           <p:nvPr/>
         </p:nvSpPr>
         <p:spPr>
           <a:xfrm>
-            <a:off x="621792" y="2512060"/>
+            <a:off x="621792" y="2706188"/>
             <a:ext cx="457200" cy="201168"/>
           </a:xfrm>
           <a:prstGeom prst="rect">
@@ -19965,7 +19965,7 @@
                 <a:ea typeface="Microsoft YaHei"/>
                 <a:cs typeface="Microsoft YaHei"/>
               </a:rPr>
-              <a:t>0.75</a:t>
+              <a:t>0.70</a:t>
             </a:r>
           </a:p>
         </p:txBody>
@@ -19978,7 +19978,75 @@
         </p:nvCxnSpPr>
         <p:spPr>
           <a:xfrm>
-            <a:off x="1188720" y="2884424"/>
+            <a:off x="1188720" y="2573818"/>
+            <a:ext cx="5349240" cy="0"/>
+          </a:xfrm>
+          <a:prstGeom prst="line">
+            <a:avLst/>
+          </a:prstGeom>
+          <a:ln w="9525">
+            <a:solidFill>
+              <a:srgbClr val="DDE2E7"/>
+            </a:solidFill>
+          </a:ln>
+        </p:spPr>
+      </p:cxnSp>
+      <p:sp>
+        <p:nvSpPr>
+          <p:cNvPr id="27" name="TextBox 26"/>
+          <p:cNvSpPr txBox="1"/>
+          <p:nvPr/>
+        </p:nvSpPr>
+        <p:spPr>
+          <a:xfrm>
+            <a:off x="621792" y="2473234"/>
+            <a:ext cx="457200" cy="201168"/>
+          </a:xfrm>
+          <a:prstGeom prst="rect">
+            <a:avLst/>
+          </a:prstGeom>
+          <a:noFill/>
+        </p:spPr>
+        <p:txBody>
+          <a:bodyPr wrap="square" anchor="ctr" lIns="0" tIns="0" rIns="0" bIns="0">
+            <a:noAutofit/>
+          </a:bodyPr>
+          <a:lstStyle/>
+          <a:p>
+            <a:pPr algn="r" latinLnBrk="0">
+              <a:lnSpc>
+                <a:spcPct val="100000"/>
+              </a:lnSpc>
+              <a:spcBef>
+                <a:spcPts val="0"/>
+              </a:spcBef>
+              <a:spcAft>
+                <a:spcPts val="0"/>
+              </a:spcAft>
+            </a:pPr>
+            <a:r>
+              <a:rPr sz="900" b="0">
+                <a:solidFill>
+                  <a:srgbClr val="8C96A1"/>
+                </a:solidFill>
+                <a:latin typeface="Microsoft YaHei"/>
+                <a:ea typeface="Microsoft YaHei"/>
+                <a:cs typeface="Microsoft YaHei"/>
+              </a:rPr>
+              <a:t>0.75</a:t>
+            </a:r>
+          </a:p>
+        </p:txBody>
+      </p:sp>
+      <p:cxnSp>
+        <p:nvCxnSpPr>
+          <p:cNvPr id="28" name="Connector 27"/>
+          <p:cNvCxnSpPr/>
+          <p:nvPr/>
+        </p:nvCxnSpPr>
+        <p:spPr>
+          <a:xfrm>
+            <a:off x="1188720" y="2806772"/>
             <a:ext cx="5349240" cy="0"/>
           </a:xfrm>
           <a:prstGeom prst="line">
@@ -19994,13 +20062,13 @@
       </p:cxnSp>
       <p:cxnSp>
         <p:nvCxnSpPr>
-          <p:cNvPr id="27" name="Connector 26"/>
+          <p:cNvPr id="29" name="Connector 28"/>
           <p:cNvCxnSpPr/>
           <p:nvPr/>
         </p:nvCxnSpPr>
         <p:spPr>
           <a:xfrm>
-            <a:off x="1188720" y="2792018"/>
+            <a:off x="1188720" y="2727568"/>
             <a:ext cx="5349240" cy="0"/>
           </a:xfrm>
           <a:prstGeom prst="line">
@@ -20016,7 +20084,7 @@
       </p:cxnSp>
       <p:cxnSp>
         <p:nvCxnSpPr>
-          <p:cNvPr id="28" name="Connector 27"/>
+          <p:cNvPr id="30" name="Connector 29"/>
           <p:cNvCxnSpPr/>
           <p:nvPr/>
         </p:nvCxnSpPr>
@@ -20037,13 +20105,13 @@
       </p:cxnSp>
       <p:cxnSp>
         <p:nvCxnSpPr>
-          <p:cNvPr id="29" name="Connector 28"/>
+          <p:cNvPr id="31" name="Connector 30"/>
           <p:cNvCxnSpPr/>
           <p:nvPr/>
         </p:nvCxnSpPr>
         <p:spPr>
           <a:xfrm>
-            <a:off x="1691640" y="3797604"/>
+            <a:off x="1691640" y="3589498"/>
             <a:ext cx="508000" cy="0"/>
           </a:xfrm>
           <a:prstGeom prst="line">
@@ -20058,14 +20126,14 @@
       </p:cxnSp>
       <p:cxnSp>
         <p:nvCxnSpPr>
-          <p:cNvPr id="30" name="Connector 29"/>
+          <p:cNvPr id="32" name="Connector 31"/>
           <p:cNvCxnSpPr/>
           <p:nvPr/>
         </p:nvCxnSpPr>
         <p:spPr>
           <a:xfrm flipV="1">
-            <a:off x="2199640" y="3422548"/>
-            <a:ext cx="508000" cy="375056"/>
+            <a:off x="2199640" y="3268022"/>
+            <a:ext cx="508000" cy="321476"/>
           </a:xfrm>
           <a:prstGeom prst="line">
             <a:avLst/>
@@ -20079,13 +20147,13 @@
       </p:cxnSp>
       <p:cxnSp>
         <p:nvCxnSpPr>
-          <p:cNvPr id="31" name="Connector 30"/>
+          <p:cNvPr id="33" name="Connector 32"/>
           <p:cNvCxnSpPr/>
           <p:nvPr/>
         </p:nvCxnSpPr>
         <p:spPr>
           <a:xfrm>
-            <a:off x="2707640" y="3422548"/>
+            <a:off x="2707640" y="3268022"/>
             <a:ext cx="508000" cy="0"/>
           </a:xfrm>
           <a:prstGeom prst="line">
@@ -20100,13 +20168,13 @@
       </p:cxnSp>
       <p:cxnSp>
         <p:nvCxnSpPr>
-          <p:cNvPr id="32" name="Connector 31"/>
+          <p:cNvPr id="34" name="Connector 33"/>
           <p:cNvCxnSpPr/>
           <p:nvPr/>
         </p:nvCxnSpPr>
         <p:spPr>
           <a:xfrm>
-            <a:off x="3215640" y="3422548"/>
+            <a:off x="3215640" y="3268022"/>
             <a:ext cx="508000" cy="0"/>
           </a:xfrm>
           <a:prstGeom prst="line">
@@ -20121,14 +20189,14 @@
       </p:cxnSp>
       <p:cxnSp>
         <p:nvCxnSpPr>
-          <p:cNvPr id="33" name="Connector 32"/>
+          <p:cNvPr id="35" name="Connector 34"/>
           <p:cNvCxnSpPr/>
           <p:nvPr/>
         </p:nvCxnSpPr>
         <p:spPr>
           <a:xfrm flipV="1">
-            <a:off x="3723640" y="2781147"/>
-            <a:ext cx="508000" cy="641401"/>
+            <a:off x="3723640" y="2718249"/>
+            <a:ext cx="508000" cy="549773"/>
           </a:xfrm>
           <a:prstGeom prst="line">
             <a:avLst/>
@@ -20142,13 +20210,13 @@
       </p:cxnSp>
       <p:cxnSp>
         <p:nvCxnSpPr>
-          <p:cNvPr id="34" name="Connector 33"/>
+          <p:cNvPr id="36" name="Connector 35"/>
           <p:cNvCxnSpPr/>
           <p:nvPr/>
         </p:nvCxnSpPr>
         <p:spPr>
           <a:xfrm>
-            <a:off x="4231640" y="2781147"/>
+            <a:off x="4231640" y="2718249"/>
             <a:ext cx="508000" cy="0"/>
           </a:xfrm>
           <a:prstGeom prst="line">
@@ -20163,13 +20231,13 @@
       </p:cxnSp>
       <p:cxnSp>
         <p:nvCxnSpPr>
-          <p:cNvPr id="35" name="Connector 34"/>
+          <p:cNvPr id="37" name="Connector 36"/>
           <p:cNvCxnSpPr/>
           <p:nvPr/>
         </p:nvCxnSpPr>
         <p:spPr>
           <a:xfrm>
-            <a:off x="4739640" y="2781147"/>
+            <a:off x="4739640" y="2718249"/>
             <a:ext cx="508000" cy="0"/>
           </a:xfrm>
           <a:prstGeom prst="line">
@@ -20184,13 +20252,13 @@
       </p:cxnSp>
       <p:cxnSp>
         <p:nvCxnSpPr>
-          <p:cNvPr id="36" name="Connector 35"/>
+          <p:cNvPr id="38" name="Connector 37"/>
           <p:cNvCxnSpPr/>
           <p:nvPr/>
         </p:nvCxnSpPr>
         <p:spPr>
           <a:xfrm>
-            <a:off x="5247640" y="2781147"/>
+            <a:off x="5247640" y="2718249"/>
             <a:ext cx="508000" cy="0"/>
           </a:xfrm>
           <a:prstGeom prst="line">
@@ -20205,14 +20273,14 @@
       </p:cxnSp>
       <p:cxnSp>
         <p:nvCxnSpPr>
-          <p:cNvPr id="37" name="Connector 36"/>
+          <p:cNvPr id="39" name="Connector 38"/>
           <p:cNvCxnSpPr/>
           <p:nvPr/>
         </p:nvCxnSpPr>
         <p:spPr>
           <a:xfrm flipV="1">
-            <a:off x="5755640" y="2721356"/>
-            <a:ext cx="508000" cy="59791"/>
+            <a:off x="5755640" y="2667000"/>
+            <a:ext cx="508000" cy="51249"/>
           </a:xfrm>
           <a:prstGeom prst="line">
             <a:avLst/>
@@ -20226,7 +20294,7 @@
       </p:cxnSp>
       <p:sp>
         <p:nvSpPr>
-          <p:cNvPr id="38" name="TextBox 37"/>
+          <p:cNvPr id="40" name="TextBox 39"/>
           <p:cNvSpPr txBox="1"/>
           <p:nvPr/>
         </p:nvSpPr>
@@ -20273,7 +20341,7 @@
       </p:sp>
       <p:sp>
         <p:nvSpPr>
-          <p:cNvPr id="39" name="TextBox 38"/>
+          <p:cNvPr id="41" name="TextBox 40"/>
           <p:cNvSpPr txBox="1"/>
           <p:nvPr/>
         </p:nvSpPr>
@@ -20320,7 +20388,7 @@
       </p:sp>
       <p:sp>
         <p:nvSpPr>
-          <p:cNvPr id="40" name="TextBox 39"/>
+          <p:cNvPr id="42" name="TextBox 41"/>
           <p:cNvSpPr txBox="1"/>
           <p:nvPr/>
         </p:nvSpPr>
@@ -20367,7 +20435,7 @@
       </p:sp>
       <p:sp>
         <p:nvSpPr>
-          <p:cNvPr id="41" name="TextBox 40"/>
+          <p:cNvPr id="43" name="TextBox 42"/>
           <p:cNvSpPr txBox="1"/>
           <p:nvPr/>
         </p:nvSpPr>
@@ -20414,7 +20482,7 @@
       </p:sp>
       <p:sp>
         <p:nvSpPr>
-          <p:cNvPr id="42" name="TextBox 41"/>
+          <p:cNvPr id="44" name="TextBox 43"/>
           <p:cNvSpPr txBox="1"/>
           <p:nvPr/>
         </p:nvSpPr>
@@ -20461,7 +20529,7 @@
       </p:sp>
       <p:sp>
         <p:nvSpPr>
-          <p:cNvPr id="43" name="TextBox 42"/>
+          <p:cNvPr id="45" name="TextBox 44"/>
           <p:cNvSpPr txBox="1"/>
           <p:nvPr/>
         </p:nvSpPr>
@@ -20508,7 +20576,7 @@
       </p:sp>
       <p:sp>
         <p:nvSpPr>
-          <p:cNvPr id="44" name="TextBox 43"/>
+          <p:cNvPr id="46" name="TextBox 45"/>
           <p:cNvSpPr txBox="1"/>
           <p:nvPr/>
         </p:nvSpPr>
@@ -20555,7 +20623,7 @@
       </p:sp>
       <p:sp>
         <p:nvSpPr>
-          <p:cNvPr id="45" name="TextBox 44"/>
+          <p:cNvPr id="47" name="TextBox 46"/>
           <p:cNvSpPr txBox="1"/>
           <p:nvPr/>
         </p:nvSpPr>
@@ -20602,7 +20670,7 @@
       </p:sp>
       <p:sp>
         <p:nvSpPr>
-          <p:cNvPr id="46" name="TextBox 45"/>
+          <p:cNvPr id="48" name="TextBox 47"/>
           <p:cNvSpPr txBox="1"/>
           <p:nvPr/>
         </p:nvSpPr>
@@ -20649,7 +20717,7 @@
       </p:sp>
       <p:sp>
         <p:nvSpPr>
-          <p:cNvPr id="47" name="TextBox 46"/>
+          <p:cNvPr id="49" name="TextBox 48"/>
           <p:cNvSpPr txBox="1"/>
           <p:nvPr/>
         </p:nvSpPr>
@@ -20696,13 +20764,13 @@
       </p:sp>
       <p:sp>
         <p:nvSpPr>
-          <p:cNvPr id="48" name="Oval 47"/>
+          <p:cNvPr id="50" name="Oval 49"/>
           <p:cNvSpPr/>
           <p:nvPr/>
         </p:nvSpPr>
         <p:spPr>
           <a:xfrm>
-            <a:off x="1627632" y="3733596"/>
+            <a:off x="1627632" y="3525490"/>
             <a:ext cx="128016" cy="128016"/>
           </a:xfrm>
           <a:prstGeom prst="ellipse">
@@ -20727,13 +20795,13 @@
       </p:sp>
       <p:sp>
         <p:nvSpPr>
-          <p:cNvPr id="49" name="TextBox 48"/>
-          <p:cNvSpPr txBox="1"/>
-          <p:nvPr/>
-        </p:nvSpPr>
-        <p:spPr>
-          <a:xfrm>
-            <a:off x="1325880" y="3889044"/>
+          <p:cNvPr id="51" name="TextBox 50"/>
+          <p:cNvSpPr txBox="1"/>
+          <p:nvPr/>
+        </p:nvSpPr>
+        <p:spPr>
+          <a:xfrm>
+            <a:off x="1325880" y="3680938"/>
             <a:ext cx="731520" cy="201168"/>
           </a:xfrm>
           <a:prstGeom prst="rect">
@@ -20774,13 +20842,13 @@
       </p:sp>
       <p:sp>
         <p:nvSpPr>
-          <p:cNvPr id="50" name="Oval 49"/>
+          <p:cNvPr id="52" name="Oval 51"/>
           <p:cNvSpPr/>
           <p:nvPr/>
         </p:nvSpPr>
         <p:spPr>
           <a:xfrm>
-            <a:off x="2643632" y="3358540"/>
+            <a:off x="2643632" y="3204014"/>
             <a:ext cx="128016" cy="128016"/>
           </a:xfrm>
           <a:prstGeom prst="ellipse">
@@ -20805,13 +20873,13 @@
       </p:sp>
       <p:sp>
         <p:nvSpPr>
-          <p:cNvPr id="51" name="TextBox 50"/>
-          <p:cNvSpPr txBox="1"/>
-          <p:nvPr/>
-        </p:nvSpPr>
-        <p:spPr>
-          <a:xfrm>
-            <a:off x="2341880" y="3148228"/>
+          <p:cNvPr id="53" name="TextBox 52"/>
+          <p:cNvSpPr txBox="1"/>
+          <p:nvPr/>
+        </p:nvSpPr>
+        <p:spPr>
+          <a:xfrm>
+            <a:off x="2341880" y="2993702"/>
             <a:ext cx="731520" cy="201168"/>
           </a:xfrm>
           <a:prstGeom prst="rect">
@@ -20852,13 +20920,13 @@
       </p:sp>
       <p:sp>
         <p:nvSpPr>
-          <p:cNvPr id="52" name="Oval 51"/>
+          <p:cNvPr id="54" name="Oval 53"/>
           <p:cNvSpPr/>
           <p:nvPr/>
         </p:nvSpPr>
         <p:spPr>
           <a:xfrm>
-            <a:off x="3151632" y="4081475"/>
+            <a:off x="3151632" y="3823672"/>
             <a:ext cx="128016" cy="128016"/>
           </a:xfrm>
           <a:prstGeom prst="ellipse">
@@ -20883,13 +20951,13 @@
       </p:sp>
       <p:sp>
         <p:nvSpPr>
-          <p:cNvPr id="53" name="TextBox 52"/>
-          <p:cNvSpPr txBox="1"/>
-          <p:nvPr/>
-        </p:nvSpPr>
-        <p:spPr>
-          <a:xfrm>
-            <a:off x="2849880" y="3871163"/>
+          <p:cNvPr id="55" name="TextBox 54"/>
+          <p:cNvSpPr txBox="1"/>
+          <p:nvPr/>
+        </p:nvSpPr>
+        <p:spPr>
+          <a:xfrm>
+            <a:off x="2849880" y="3613360"/>
             <a:ext cx="731520" cy="201168"/>
           </a:xfrm>
           <a:prstGeom prst="rect">
@@ -20930,13 +20998,91 @@
       </p:sp>
       <p:sp>
         <p:nvSpPr>
-          <p:cNvPr id="54" name="Oval 53"/>
+          <p:cNvPr id="56" name="Oval 55"/>
           <p:cNvSpPr/>
           <p:nvPr/>
         </p:nvSpPr>
         <p:spPr>
           <a:xfrm>
-            <a:off x="4167632" y="2717139"/>
+            <a:off x="3659632" y="4135831"/>
+            <a:ext cx="128016" cy="128016"/>
+          </a:xfrm>
+          <a:prstGeom prst="ellipse">
+            <a:avLst/>
+          </a:prstGeom>
+          <a:solidFill>
+            <a:srgbClr val="B4382F"/>
+          </a:solidFill>
+          <a:ln w="15875">
+            <a:solidFill>
+              <a:srgbClr val="FFFFFF"/>
+            </a:solidFill>
+          </a:ln>
+        </p:spPr>
+        <p:txBody>
+          <a:bodyPr rtlCol="0" anchor="ctr"/>
+          <a:lstStyle/>
+          <a:p>
+            <a:pPr algn="ctr"/>
+          </a:p>
+        </p:txBody>
+      </p:sp>
+      <p:sp>
+        <p:nvSpPr>
+          <p:cNvPr id="57" name="TextBox 56"/>
+          <p:cNvSpPr txBox="1"/>
+          <p:nvPr/>
+        </p:nvSpPr>
+        <p:spPr>
+          <a:xfrm>
+            <a:off x="3357880" y="3925519"/>
+            <a:ext cx="731520" cy="201168"/>
+          </a:xfrm>
+          <a:prstGeom prst="rect">
+            <a:avLst/>
+          </a:prstGeom>
+          <a:noFill/>
+        </p:spPr>
+        <p:txBody>
+          <a:bodyPr wrap="square" anchor="ctr" lIns="0" tIns="0" rIns="0" bIns="0">
+            <a:noAutofit/>
+          </a:bodyPr>
+          <a:lstStyle/>
+          <a:p>
+            <a:pPr algn="ctr" latinLnBrk="0">
+              <a:lnSpc>
+                <a:spcPct val="100000"/>
+              </a:lnSpc>
+              <a:spcBef>
+                <a:spcPts val="0"/>
+              </a:spcBef>
+              <a:spcAft>
+                <a:spcPts val="0"/>
+              </a:spcAft>
+            </a:pPr>
+            <a:r>
+              <a:rPr sz="950" b="1">
+                <a:solidFill>
+                  <a:srgbClr val="B4382F"/>
+                </a:solidFill>
+                <a:latin typeface="Arial"/>
+                <a:ea typeface="Microsoft YaHei"/>
+                <a:cs typeface="Microsoft YaHei"/>
+              </a:rPr>
+              <a:t>0.401</a:t>
+            </a:r>
+          </a:p>
+        </p:txBody>
+      </p:sp>
+      <p:sp>
+        <p:nvSpPr>
+          <p:cNvPr id="58" name="Oval 57"/>
+          <p:cNvSpPr/>
+          <p:nvPr/>
+        </p:nvSpPr>
+        <p:spPr>
+          <a:xfrm>
+            <a:off x="4167632" y="2654241"/>
             <a:ext cx="128016" cy="128016"/>
           </a:xfrm>
           <a:prstGeom prst="ellipse">
@@ -20961,13 +21107,13 @@
       </p:sp>
       <p:sp>
         <p:nvSpPr>
-          <p:cNvPr id="55" name="TextBox 54"/>
-          <p:cNvSpPr txBox="1"/>
-          <p:nvPr/>
-        </p:nvSpPr>
-        <p:spPr>
-          <a:xfrm>
-            <a:off x="3865880" y="2506827"/>
+          <p:cNvPr id="59" name="TextBox 58"/>
+          <p:cNvSpPr txBox="1"/>
+          <p:nvPr/>
+        </p:nvSpPr>
+        <p:spPr>
+          <a:xfrm>
+            <a:off x="3865880" y="2443929"/>
             <a:ext cx="731520" cy="201168"/>
           </a:xfrm>
           <a:prstGeom prst="rect">
@@ -21008,13 +21154,13 @@
       </p:sp>
       <p:sp>
         <p:nvSpPr>
-          <p:cNvPr id="56" name="Oval 55"/>
+          <p:cNvPr id="60" name="Oval 59"/>
           <p:cNvSpPr/>
           <p:nvPr/>
         </p:nvSpPr>
         <p:spPr>
           <a:xfrm>
-            <a:off x="4675632" y="2722575"/>
+            <a:off x="4675632" y="2658901"/>
             <a:ext cx="128016" cy="128016"/>
           </a:xfrm>
           <a:prstGeom prst="ellipse">
@@ -21039,13 +21185,13 @@
       </p:sp>
       <p:sp>
         <p:nvSpPr>
-          <p:cNvPr id="57" name="Oval 56"/>
+          <p:cNvPr id="61" name="Oval 60"/>
           <p:cNvSpPr/>
           <p:nvPr/>
         </p:nvSpPr>
         <p:spPr>
           <a:xfrm>
-            <a:off x="6176772" y="2634488"/>
+            <a:off x="6176772" y="2580132"/>
             <a:ext cx="173736" cy="173736"/>
           </a:xfrm>
           <a:prstGeom prst="ellipse">
@@ -21070,13 +21216,13 @@
       </p:sp>
       <p:sp>
         <p:nvSpPr>
-          <p:cNvPr id="58" name="TextBox 57"/>
-          <p:cNvSpPr txBox="1"/>
-          <p:nvPr/>
-        </p:nvSpPr>
-        <p:spPr>
-          <a:xfrm>
-            <a:off x="5897879" y="2447036"/>
+          <p:cNvPr id="62" name="TextBox 61"/>
+          <p:cNvSpPr txBox="1"/>
+          <p:nvPr/>
+        </p:nvSpPr>
+        <p:spPr>
+          <a:xfrm>
+            <a:off x="5897879" y="2392680"/>
             <a:ext cx="731520" cy="201168"/>
           </a:xfrm>
           <a:prstGeom prst="rect">
@@ -21117,7 +21263,7 @@
       </p:sp>
       <p:sp>
         <p:nvSpPr>
-          <p:cNvPr id="59" name="TextBox 58"/>
+          <p:cNvPr id="63" name="TextBox 62"/>
           <p:cNvSpPr txBox="1"/>
           <p:nvPr/>
         </p:nvSpPr>
@@ -21219,7 +21365,7 @@
       </p:sp>
       <p:sp>
         <p:nvSpPr>
-          <p:cNvPr id="60" name="Rectangle 59"/>
+          <p:cNvPr id="64" name="Rectangle 63"/>
           <p:cNvSpPr/>
           <p:nvPr/>
         </p:nvSpPr>
@@ -21248,7 +21394,7 @@
       </p:sp>
       <p:sp>
         <p:nvSpPr>
-          <p:cNvPr id="61" name="TextBox 60"/>
+          <p:cNvPr id="65" name="TextBox 64"/>
           <p:cNvSpPr txBox="1"/>
           <p:nvPr/>
         </p:nvSpPr>
@@ -21306,7 +21452,7 @@
       </p:sp>
       <p:sp>
         <p:nvSpPr>
-          <p:cNvPr id="62" name="TextBox 61"/>
+          <p:cNvPr id="66" name="TextBox 65"/>
           <p:cNvSpPr txBox="1"/>
           <p:nvPr/>
         </p:nvSpPr>
@@ -21353,7 +21499,7 @@
       </p:sp>
       <p:sp>
         <p:nvSpPr>
-          <p:cNvPr id="63" name="TextBox 62"/>
+          <p:cNvPr id="67" name="TextBox 66"/>
           <p:cNvSpPr txBox="1"/>
           <p:nvPr/>
         </p:nvSpPr>
@@ -21400,7 +21546,7 @@
       </p:sp>
       <p:sp>
         <p:nvSpPr>
-          <p:cNvPr id="64" name="TextBox 63"/>
+          <p:cNvPr id="68" name="TextBox 67"/>
           <p:cNvSpPr txBox="1"/>
           <p:nvPr/>
         </p:nvSpPr>
@@ -21447,7 +21593,7 @@
       </p:sp>
       <p:sp>
         <p:nvSpPr>
-          <p:cNvPr id="65" name="TextBox 64"/>
+          <p:cNvPr id="69" name="TextBox 68"/>
           <p:cNvSpPr txBox="1"/>
           <p:nvPr/>
         </p:nvSpPr>
@@ -21494,7 +21640,7 @@
       </p:sp>
       <p:sp>
         <p:nvSpPr>
-          <p:cNvPr id="66" name="TextBox 65"/>
+          <p:cNvPr id="70" name="TextBox 69"/>
           <p:cNvSpPr txBox="1"/>
           <p:nvPr/>
         </p:nvSpPr>
@@ -21541,7 +21687,7 @@
       </p:sp>
       <p:sp>
         <p:nvSpPr>
-          <p:cNvPr id="67" name="TextBox 66"/>
+          <p:cNvPr id="71" name="TextBox 70"/>
           <p:cNvSpPr txBox="1"/>
           <p:nvPr/>
         </p:nvSpPr>
@@ -21588,7 +21734,7 @@
       </p:sp>
       <p:sp>
         <p:nvSpPr>
-          <p:cNvPr id="68" name="TextBox 67"/>
+          <p:cNvPr id="72" name="TextBox 71"/>
           <p:cNvSpPr txBox="1"/>
           <p:nvPr/>
         </p:nvSpPr>
@@ -21635,7 +21781,7 @@
       </p:sp>
       <p:sp>
         <p:nvSpPr>
-          <p:cNvPr id="69" name="TextBox 68"/>
+          <p:cNvPr id="73" name="TextBox 72"/>
           <p:cNvSpPr txBox="1"/>
           <p:nvPr/>
         </p:nvSpPr>
@@ -21682,7 +21828,7 @@
       </p:sp>
       <p:sp>
         <p:nvSpPr>
-          <p:cNvPr id="70" name="TextBox 69"/>
+          <p:cNvPr id="74" name="TextBox 73"/>
           <p:cNvSpPr txBox="1"/>
           <p:nvPr/>
         </p:nvSpPr>
@@ -21729,7 +21875,7 @@
       </p:sp>
       <p:sp>
         <p:nvSpPr>
-          <p:cNvPr id="71" name="TextBox 70"/>
+          <p:cNvPr id="75" name="TextBox 74"/>
           <p:cNvSpPr txBox="1"/>
           <p:nvPr/>
         </p:nvSpPr>
@@ -21776,7 +21922,7 @@
       </p:sp>
       <p:sp>
         <p:nvSpPr>
-          <p:cNvPr id="72" name="TextBox 71"/>
+          <p:cNvPr id="76" name="TextBox 75"/>
           <p:cNvSpPr txBox="1"/>
           <p:nvPr/>
         </p:nvSpPr>
@@ -21823,7 +21969,7 @@
       </p:sp>
       <p:sp>
         <p:nvSpPr>
-          <p:cNvPr id="73" name="TextBox 72"/>
+          <p:cNvPr id="77" name="TextBox 76"/>
           <p:cNvSpPr txBox="1"/>
           <p:nvPr/>
         </p:nvSpPr>
@@ -21870,7 +22016,7 @@
       </p:sp>
       <p:sp>
         <p:nvSpPr>
-          <p:cNvPr id="74" name="Rectangle 73"/>
+          <p:cNvPr id="78" name="Rectangle 77"/>
           <p:cNvSpPr/>
           <p:nvPr/>
         </p:nvSpPr>
@@ -21899,7 +22045,7 @@
       </p:sp>
       <p:sp>
         <p:nvSpPr>
-          <p:cNvPr id="75" name="TextBox 74"/>
+          <p:cNvPr id="79" name="TextBox 78"/>
           <p:cNvSpPr txBox="1"/>
           <p:nvPr/>
         </p:nvSpPr>
@@ -21946,7 +22092,7 @@
       </p:sp>
       <p:sp>
         <p:nvSpPr>
-          <p:cNvPr id="76" name="TextBox 75"/>
+          <p:cNvPr id="80" name="TextBox 79"/>
           <p:cNvSpPr txBox="1"/>
           <p:nvPr/>
         </p:nvSpPr>
@@ -21993,7 +22139,7 @@
       </p:sp>
       <p:sp>
         <p:nvSpPr>
-          <p:cNvPr id="77" name="TextBox 76"/>
+          <p:cNvPr id="81" name="TextBox 80"/>
           <p:cNvSpPr txBox="1"/>
           <p:nvPr/>
         </p:nvSpPr>
@@ -22040,7 +22186,7 @@
       </p:sp>
       <p:sp>
         <p:nvSpPr>
-          <p:cNvPr id="78" name="TextBox 77"/>
+          <p:cNvPr id="82" name="TextBox 81"/>
           <p:cNvSpPr txBox="1"/>
           <p:nvPr/>
         </p:nvSpPr>
@@ -22087,7 +22233,7 @@
       </p:sp>
       <p:sp>
         <p:nvSpPr>
-          <p:cNvPr id="79" name="Rectangle 78"/>
+          <p:cNvPr id="83" name="Rectangle 82"/>
           <p:cNvSpPr/>
           <p:nvPr/>
         </p:nvSpPr>
@@ -22116,7 +22262,7 @@
       </p:sp>
       <p:sp>
         <p:nvSpPr>
-          <p:cNvPr id="80" name="TextBox 79"/>
+          <p:cNvPr id="84" name="TextBox 83"/>
           <p:cNvSpPr txBox="1"/>
           <p:nvPr/>
         </p:nvSpPr>
@@ -22163,7 +22309,7 @@
       </p:sp>
       <p:sp>
         <p:nvSpPr>
-          <p:cNvPr id="81" name="TextBox 80"/>
+          <p:cNvPr id="85" name="TextBox 84"/>
           <p:cNvSpPr txBox="1"/>
           <p:nvPr/>
         </p:nvSpPr>
@@ -22210,7 +22356,7 @@
       </p:sp>
       <p:sp>
         <p:nvSpPr>
-          <p:cNvPr id="82" name="TextBox 81"/>
+          <p:cNvPr id="86" name="TextBox 85"/>
           <p:cNvSpPr txBox="1"/>
           <p:nvPr/>
         </p:nvSpPr>
@@ -22257,7 +22403,7 @@
       </p:sp>
       <p:sp>
         <p:nvSpPr>
-          <p:cNvPr id="83" name="TextBox 82"/>
+          <p:cNvPr id="87" name="TextBox 86"/>
           <p:cNvSpPr txBox="1"/>
           <p:nvPr/>
         </p:nvSpPr>
@@ -22304,7 +22450,7 @@
       </p:sp>
       <p:sp>
         <p:nvSpPr>
-          <p:cNvPr id="84" name="TextBox 83"/>
+          <p:cNvPr id="88" name="TextBox 87"/>
           <p:cNvSpPr txBox="1"/>
           <p:nvPr/>
         </p:nvSpPr>
@@ -22351,7 +22497,7 @@
       </p:sp>
       <p:sp>
         <p:nvSpPr>
-          <p:cNvPr id="85" name="TextBox 84"/>
+          <p:cNvPr id="89" name="TextBox 88"/>
           <p:cNvSpPr txBox="1"/>
           <p:nvPr/>
         </p:nvSpPr>
@@ -22398,7 +22544,7 @@
       </p:sp>
       <p:sp>
         <p:nvSpPr>
-          <p:cNvPr id="86" name="TextBox 85"/>
+          <p:cNvPr id="90" name="TextBox 89"/>
           <p:cNvSpPr txBox="1"/>
           <p:nvPr/>
         </p:nvSpPr>
@@ -22445,7 +22591,7 @@
       </p:sp>
       <p:sp>
         <p:nvSpPr>
-          <p:cNvPr id="87" name="TextBox 86"/>
+          <p:cNvPr id="91" name="TextBox 90"/>
           <p:cNvSpPr txBox="1"/>
           <p:nvPr/>
         </p:nvSpPr>
@@ -22492,7 +22638,7 @@
       </p:sp>
       <p:sp>
         <p:nvSpPr>
-          <p:cNvPr id="88" name="TextBox 87"/>
+          <p:cNvPr id="92" name="TextBox 91"/>
           <p:cNvSpPr txBox="1"/>
           <p:nvPr/>
         </p:nvSpPr>
@@ -22539,7 +22685,7 @@
       </p:sp>
       <p:sp>
         <p:nvSpPr>
-          <p:cNvPr id="89" name="TextBox 88"/>
+          <p:cNvPr id="93" name="TextBox 92"/>
           <p:cNvSpPr txBox="1"/>
           <p:nvPr/>
         </p:nvSpPr>
@@ -22586,7 +22732,7 @@
       </p:sp>
       <p:sp>
         <p:nvSpPr>
-          <p:cNvPr id="90" name="TextBox 89"/>
+          <p:cNvPr id="94" name="TextBox 93"/>
           <p:cNvSpPr txBox="1"/>
           <p:nvPr/>
         </p:nvSpPr>
@@ -22633,7 +22779,7 @@
       </p:sp>
       <p:sp>
         <p:nvSpPr>
-          <p:cNvPr id="91" name="TextBox 90"/>
+          <p:cNvPr id="95" name="TextBox 94"/>
           <p:cNvSpPr txBox="1"/>
           <p:nvPr/>
         </p:nvSpPr>
@@ -22680,7 +22826,7 @@
       </p:sp>
       <p:sp>
         <p:nvSpPr>
-          <p:cNvPr id="92" name="TextBox 91"/>
+          <p:cNvPr id="96" name="TextBox 95"/>
           <p:cNvSpPr txBox="1"/>
           <p:nvPr/>
         </p:nvSpPr>
@@ -22727,7 +22873,7 @@
       </p:sp>
       <p:sp>
         <p:nvSpPr>
-          <p:cNvPr id="93" name="TextBox 92"/>
+          <p:cNvPr id="97" name="TextBox 96"/>
           <p:cNvSpPr txBox="1"/>
           <p:nvPr/>
         </p:nvSpPr>
@@ -22774,7 +22920,7 @@
       </p:sp>
       <p:sp>
         <p:nvSpPr>
-          <p:cNvPr id="94" name="TextBox 93"/>
+          <p:cNvPr id="98" name="TextBox 97"/>
           <p:cNvSpPr txBox="1"/>
           <p:nvPr/>
         </p:nvSpPr>
@@ -22821,7 +22967,7 @@
       </p:sp>
       <p:sp>
         <p:nvSpPr>
-          <p:cNvPr id="95" name="TextBox 94"/>
+          <p:cNvPr id="99" name="TextBox 98"/>
           <p:cNvSpPr txBox="1"/>
           <p:nvPr/>
         </p:nvSpPr>
@@ -22868,7 +23014,7 @@
       </p:sp>
       <p:sp>
         <p:nvSpPr>
-          <p:cNvPr id="96" name="Rectangle 95"/>
+          <p:cNvPr id="100" name="Rectangle 99"/>
           <p:cNvSpPr/>
           <p:nvPr/>
         </p:nvSpPr>
@@ -22897,7 +23043,7 @@
       </p:sp>
       <p:sp>
         <p:nvSpPr>
-          <p:cNvPr id="97" name="TextBox 96"/>
+          <p:cNvPr id="101" name="TextBox 100"/>
           <p:cNvSpPr txBox="1"/>
           <p:nvPr/>
         </p:nvSpPr>
@@ -22944,7 +23090,7 @@
       </p:sp>
       <p:sp>
         <p:nvSpPr>
-          <p:cNvPr id="98" name="TextBox 97"/>
+          <p:cNvPr id="102" name="TextBox 101"/>
           <p:cNvSpPr txBox="1"/>
           <p:nvPr/>
         </p:nvSpPr>
@@ -22991,7 +23137,7 @@
       </p:sp>
       <p:sp>
         <p:nvSpPr>
-          <p:cNvPr id="99" name="TextBox 98"/>
+          <p:cNvPr id="103" name="TextBox 102"/>
           <p:cNvSpPr txBox="1"/>
           <p:nvPr/>
         </p:nvSpPr>
@@ -23038,7 +23184,7 @@
       </p:sp>
       <p:sp>
         <p:nvSpPr>
-          <p:cNvPr id="100" name="TextBox 99"/>
+          <p:cNvPr id="104" name="TextBox 103"/>
           <p:cNvSpPr txBox="1"/>
           <p:nvPr/>
         </p:nvSpPr>
@@ -23085,7 +23231,7 @@
       </p:sp>
       <p:sp>
         <p:nvSpPr>
-          <p:cNvPr id="101" name="TextBox 100"/>
+          <p:cNvPr id="105" name="TextBox 104"/>
           <p:cNvSpPr txBox="1"/>
           <p:nvPr/>
         </p:nvSpPr>
@@ -23180,7 +23326,7 @@
       </p:sp>
       <p:sp>
         <p:nvSpPr>
-          <p:cNvPr id="102" name="Rectangle 101"/>
+          <p:cNvPr id="106" name="Rectangle 105"/>
           <p:cNvSpPr/>
           <p:nvPr/>
         </p:nvSpPr>
@@ -23211,7 +23357,7 @@
       </p:sp>
       <p:sp>
         <p:nvSpPr>
-          <p:cNvPr id="103" name="TextBox 102"/>
+          <p:cNvPr id="107" name="TextBox 106"/>
           <p:cNvSpPr txBox="1"/>
           <p:nvPr/>
         </p:nvSpPr>
@@ -23258,7 +23404,7 @@
       </p:sp>
       <p:sp>
         <p:nvSpPr>
-          <p:cNvPr id="104" name="TextBox 103"/>
+          <p:cNvPr id="108" name="TextBox 107"/>
           <p:cNvSpPr txBox="1"/>
           <p:nvPr/>
         </p:nvSpPr>
@@ -23305,7 +23451,7 @@
       </p:sp>
       <p:sp>
         <p:nvSpPr>
-          <p:cNvPr id="105" name="TextBox 104"/>
+          <p:cNvPr id="109" name="TextBox 108"/>
           <p:cNvSpPr txBox="1"/>
           <p:nvPr/>
         </p:nvSpPr>
@@ -23352,7 +23498,7 @@
       </p:sp>
       <p:sp>
         <p:nvSpPr>
-          <p:cNvPr id="106" name="Rectangle 105"/>
+          <p:cNvPr id="110" name="Rectangle 109"/>
           <p:cNvSpPr/>
           <p:nvPr/>
         </p:nvSpPr>
@@ -23383,7 +23529,7 @@
       </p:sp>
       <p:sp>
         <p:nvSpPr>
-          <p:cNvPr id="107" name="TextBox 106"/>
+          <p:cNvPr id="111" name="TextBox 110"/>
           <p:cNvSpPr txBox="1"/>
           <p:nvPr/>
         </p:nvSpPr>
@@ -23430,7 +23576,7 @@
       </p:sp>
       <p:sp>
         <p:nvSpPr>
-          <p:cNvPr id="108" name="TextBox 107"/>
+          <p:cNvPr id="112" name="TextBox 111"/>
           <p:cNvSpPr txBox="1"/>
           <p:nvPr/>
         </p:nvSpPr>
@@ -23477,7 +23623,7 @@
       </p:sp>
       <p:sp>
         <p:nvSpPr>
-          <p:cNvPr id="109" name="TextBox 108"/>
+          <p:cNvPr id="113" name="TextBox 112"/>
           <p:cNvSpPr txBox="1"/>
           <p:nvPr/>
         </p:nvSpPr>
@@ -23524,7 +23670,7 @@
       </p:sp>
       <p:sp>
         <p:nvSpPr>
-          <p:cNvPr id="110" name="Rectangle 109"/>
+          <p:cNvPr id="114" name="Rectangle 113"/>
           <p:cNvSpPr/>
           <p:nvPr/>
         </p:nvSpPr>
@@ -23555,7 +23701,7 @@
       </p:sp>
       <p:sp>
         <p:nvSpPr>
-          <p:cNvPr id="111" name="TextBox 110"/>
+          <p:cNvPr id="115" name="TextBox 114"/>
           <p:cNvSpPr txBox="1"/>
           <p:nvPr/>
         </p:nvSpPr>
@@ -23602,7 +23748,7 @@
       </p:sp>
       <p:sp>
         <p:nvSpPr>
-          <p:cNvPr id="112" name="TextBox 111"/>
+          <p:cNvPr id="116" name="TextBox 115"/>
           <p:cNvSpPr txBox="1"/>
           <p:nvPr/>
         </p:nvSpPr>
@@ -23649,7 +23795,7 @@
       </p:sp>
       <p:sp>
         <p:nvSpPr>
-          <p:cNvPr id="113" name="TextBox 112"/>
+          <p:cNvPr id="117" name="TextBox 116"/>
           <p:cNvSpPr txBox="1"/>
           <p:nvPr/>
         </p:nvSpPr>
@@ -23696,7 +23842,7 @@
       </p:sp>
       <p:sp>
         <p:nvSpPr>
-          <p:cNvPr id="114" name="Rectangle 113"/>
+          <p:cNvPr id="118" name="Rectangle 117"/>
           <p:cNvSpPr/>
           <p:nvPr/>
         </p:nvSpPr>
@@ -23725,7 +23871,7 @@
       </p:sp>
       <p:sp>
         <p:nvSpPr>
-          <p:cNvPr id="115" name="TextBox 114"/>
+          <p:cNvPr id="119" name="TextBox 118"/>
           <p:cNvSpPr txBox="1"/>
           <p:nvPr/>
         </p:nvSpPr>
@@ -23772,7 +23918,7 @@
       </p:sp>
       <p:sp>
         <p:nvSpPr>
-          <p:cNvPr id="116" name="TextBox 115"/>
+          <p:cNvPr id="120" name="TextBox 119"/>
           <p:cNvSpPr txBox="1"/>
           <p:nvPr/>
         </p:nvSpPr>
@@ -23819,7 +23965,7 @@
       </p:sp>
       <p:sp>
         <p:nvSpPr>
-          <p:cNvPr id="117" name="TextBox 116"/>
+          <p:cNvPr id="121" name="TextBox 120"/>
           <p:cNvSpPr txBox="1"/>
           <p:nvPr/>
         </p:nvSpPr>
@@ -23866,7 +24012,7 @@
       </p:sp>
       <p:sp>
         <p:nvSpPr>
-          <p:cNvPr id="118" name="Rectangle 117"/>
+          <p:cNvPr id="122" name="Rectangle 121"/>
           <p:cNvSpPr/>
           <p:nvPr/>
         </p:nvSpPr>
@@ -23895,7 +24041,7 @@
       </p:sp>
       <p:sp>
         <p:nvSpPr>
-          <p:cNvPr id="119" name="Rectangle 118"/>
+          <p:cNvPr id="123" name="Rectangle 122"/>
           <p:cNvSpPr/>
           <p:nvPr/>
         </p:nvSpPr>
@@ -23924,7 +24070,7 @@
       </p:sp>
       <p:sp>
         <p:nvSpPr>
-          <p:cNvPr id="120" name="TextBox 119"/>
+          <p:cNvPr id="124" name="TextBox 123"/>
           <p:cNvSpPr txBox="1"/>
           <p:nvPr/>
         </p:nvSpPr>
@@ -23982,7 +24128,7 @@
       </p:sp>
       <p:sp>
         <p:nvSpPr>
-          <p:cNvPr id="121" name="TextBox 120"/>
+          <p:cNvPr id="125" name="TextBox 124"/>
           <p:cNvSpPr txBox="1"/>
           <p:nvPr/>
         </p:nvSpPr>
@@ -24022,14 +24168,14 @@
                 <a:ea typeface="Microsoft YaHei"/>
                 <a:cs typeface="Microsoft YaHei"/>
               </a:rPr>
-              <a:t>第 4 轮的 17.60 µs 是 H2D 传输本身，不是 kernel 耗时；交付复测、地板探针、下排 shape 表各为独立批次，0.730 与 0.724 不应互相换算</a:t>
-            </a:r>
-          </a:p>
-        </p:txBody>
-      </p:sp>
-      <p:sp>
-        <p:nvSpPr>
-          <p:cNvPr id="122" name="TextBox 121"/>
+              <a:t>第 4 轮的 17.60 µs 含每次调用的 H2D 上传，不只是 kernel 本身；交付复测、地板探针、下排 shape 表各为独立批次，0.730 与 0.724 不应互相换算</a:t>
+            </a:r>
+          </a:p>
+        </p:txBody>
+      </p:sp>
+      <p:sp>
+        <p:nvSpPr>
+          <p:cNvPr id="126" name="TextBox 125"/>
           <p:cNvSpPr txBox="1"/>
           <p:nvPr/>
         </p:nvSpPr>

--- a/slides/m100_agent_deck.pptx
+++ b/slides/m100_agent_deck.pptx
@@ -1976,7 +1976,7 @@
                 <a:ea typeface="Microsoft YaHei"/>
                 <a:cs typeface="Microsoft YaHei"/>
               </a:rPr>
-              <a:t>【6 / 10 · 算子层 · 生成与迭代 · 约 105 秒（1:45）】</a:t>
+              <a:t>【6 / 10 · 算子层 · 生成与迭代 · 约 100 秒（1:40）】</a:t>
             </a:r>
           </a:p>
           <a:p>
@@ -2066,7 +2066,7 @@
                 <a:ea typeface="Microsoft YaHei"/>
                 <a:cs typeface="Microsoft YaHei"/>
               </a:rPr>
-              <a:t>右边是目前的实测样例，RMSNorm：固定 4096 乘 4096 的负载，相对基线加速 1.24 倍，741.2 微秒降到 595.6。最优版本重复测了两次，595.64 和 595.63，结果接近。这是单算子样例，还没有规模化统计，所以这里不报聚合指标。</a:t>
+              <a:t>右边是目前的实测样例，batch_norm：固定 256 乘 4096 的负载，fp32，相对 batch_norm_v4 基线加速 1.37 倍，13.24 微秒降到 9.66。这是单算子样例，还没有规模化统计，所以这里不报聚合指标。</a:t>
             </a:r>
           </a:p>
           <a:p>
@@ -2120,7 +2120,7 @@
                 <a:ea typeface="Microsoft YaHei"/>
                 <a:cs typeface="Microsoft YaHei"/>
               </a:rPr>
-              <a:t>1.24 倍的基线是哪一个实现，需要讲清楚：相对未调优实现、相对现有库实现、还是相对第 0 轮反推出来的规格，结论的分量完全不同。</a:t>
+              <a:t>1.37 倍的基线是 batch_norm_v4 的 13.24 微秒，不是现有库实现，也不是未调优的草稿，被问到时按这个口径回答。</a:t>
             </a:r>
           </a:p>
           <a:p>
@@ -2138,7 +2138,7 @@
                 <a:ea typeface="Microsoft YaHei"/>
                 <a:cs typeface="Microsoft YaHei"/>
               </a:rPr>
-              <a:t>最优版本只重复测了两次。两次接近说明没有明显抖动，但不足以支撑噪声水平的结论，被追问时按实际重复次数回答，不要说成已验证稳定。</a:t>
+              <a:t>9.66 微秒是在空闲卡上复测 200 次的结果。这能说明没有明显抖动，但不同卡况之间仍有差异，被追问时按实际测量条件回答，不要说成已验证稳定。</a:t>
             </a:r>
           </a:p>
           <a:p>
@@ -18452,7 +18452,7 @@
                 <a:ea typeface="Microsoft YaHei"/>
                 <a:cs typeface="Microsoft YaHei"/>
               </a:rPr>
-              <a:t>RMSNorm 实测样例</a:t>
+              <a:t>batch_norm 实测样例</a:t>
             </a:r>
             <a:r>
               <a:rPr sz="1050" b="0">
@@ -18565,7 +18565,7 @@
                 <a:ea typeface="Microsoft YaHei"/>
                 <a:cs typeface="Microsoft YaHei"/>
               </a:rPr>
-              <a:t>4096 × 4096</a:t>
+              <a:t>256 × 4096</a:t>
             </a:r>
           </a:p>
           <a:p>
@@ -18589,7 +18589,7 @@
                 <a:ea typeface="Microsoft YaHei"/>
                 <a:cs typeface="Microsoft YaHei"/>
               </a:rPr>
-              <a:t>BF16 + gamma · 6 SDNN</a:t>
+              <a:t>fp32 · 总流量 8.39 MB</a:t>
             </a:r>
           </a:p>
         </p:txBody>
@@ -18691,7 +18691,7 @@
                 <a:ea typeface="Microsoft YaHei"/>
                 <a:cs typeface="Microsoft YaHei"/>
               </a:rPr>
-              <a:t>1.24×</a:t>
+              <a:t>1.37×</a:t>
             </a:r>
           </a:p>
           <a:p>
@@ -18715,7 +18715,7 @@
                 <a:ea typeface="Microsoft YaHei"/>
                 <a:cs typeface="Microsoft YaHei"/>
               </a:rPr>
-              <a:t>741.2 → 595.6 µs</a:t>
+              <a:t>13.24 → 9.66 µs</a:t>
             </a:r>
           </a:p>
         </p:txBody>
@@ -18817,7 +18817,7 @@
                 <a:ea typeface="Microsoft YaHei"/>
                 <a:cs typeface="Microsoft YaHei"/>
               </a:rPr>
-              <a:t>595.64 / 595.63 µs</a:t>
+              <a:t>9.66 µs · iters=200</a:t>
             </a:r>
           </a:p>
           <a:p>
@@ -18841,7 +18841,7 @@
                 <a:ea typeface="Microsoft YaHei"/>
                 <a:cs typeface="Microsoft YaHei"/>
               </a:rPr>
-              <a:t>两次复测结果接近</a:t>
+              <a:t>空闲卡上复测</a:t>
             </a:r>
           </a:p>
         </p:txBody>
@@ -18912,7 +18912,7 @@
                 <a:ea typeface="Microsoft YaHei"/>
                 <a:cs typeface="Microsoft YaHei"/>
               </a:rPr>
-              <a:t>基线实现的口径需在讲述时说明</a:t>
+              <a:t>基线 batch_norm_v4，详见下一页</a:t>
             </a:r>
           </a:p>
         </p:txBody>

--- a/slides/m100_agent_deck.pptx
+++ b/slides/m100_agent_deck.pptx
@@ -1731,7 +1731,7 @@
                 <a:ea typeface="Microsoft YaHei"/>
                 <a:cs typeface="Microsoft YaHei"/>
               </a:rPr>
-              <a:t>【5 / 10 · 模型层 · 候选验收与可信度 · 约 135 秒（2:15）】</a:t>
+              <a:t>【5 / 10 · 模型层 · 候选验收与可信度 · 约 185 秒（3:05）】</a:t>
             </a:r>
           </a:p>
           <a:p>
@@ -1821,7 +1821,7 @@
                 <a:ea typeface="Microsoft YaHei"/>
                 <a:cs typeface="Microsoft YaHei"/>
               </a:rPr>
-              <a:t>右边放这条流水线判出来的实际结果。最后一条口径：只有独立复验通过的收益才进入最终交付，筛选阶段看起来有收益、复验没过的，一个都不算。</a:t>
+              <a:t>右边是这条流水线在 30B-A3B 上判出来的实际结果。五组候选送进去：第一道挡掉一个模式——分组关掉之后 cos 直接是 0，算出来就是错的；第二道这一轮没拦下任何一个，因为过了第一道的候选输出逐位一致，不必再看质量；第三道挡掉三组——强制不分组慢 20%，换现成核只有 0.61 倍更慢，路由融合算到头也只值 0.9%，够不着 3% 的门槛。三道全过的两组交付，峰值吞吐从 1370 涨到 1883。最后一条口径：只有独立复验通过的收益才进入最终交付，筛选阶段看起来有收益、复验没过的，一个都不算。</a:t>
             </a:r>
           </a:p>
           <a:p>
@@ -16935,15 +16935,188 @@
           <a:solidFill>
             <a:srgbClr val="F6F7F9"/>
           </a:solidFill>
+          <a:ln>
+            <a:noFill/>
+          </a:ln>
+        </p:spPr>
+        <p:txBody>
+          <a:bodyPr rtlCol="0" anchor="ctr"/>
+          <a:lstStyle/>
+          <a:p>
+            <a:pPr algn="ctr"/>
+          </a:p>
+        </p:txBody>
+      </p:sp>
+      <p:sp>
+        <p:nvSpPr>
+          <p:cNvPr id="32" name="TextBox 31"/>
+          <p:cNvSpPr txBox="1"/>
+          <p:nvPr/>
+        </p:nvSpPr>
+        <p:spPr>
+          <a:xfrm>
+            <a:off x="7272223" y="1773936"/>
+            <a:ext cx="4169663" cy="256032"/>
+          </a:xfrm>
+          <a:prstGeom prst="rect">
+            <a:avLst/>
+          </a:prstGeom>
+          <a:noFill/>
+        </p:spPr>
+        <p:txBody>
+          <a:bodyPr wrap="square" anchor="ctr" lIns="0" tIns="0" rIns="0" bIns="0">
+            <a:noAutofit/>
+          </a:bodyPr>
+          <a:lstStyle/>
+          <a:p>
+            <a:pPr algn="l" latinLnBrk="0">
+              <a:lnSpc>
+                <a:spcPct val="100000"/>
+              </a:lnSpc>
+              <a:spcBef>
+                <a:spcPts val="0"/>
+              </a:spcBef>
+              <a:spcAft>
+                <a:spcPts val="0"/>
+              </a:spcAft>
+            </a:pPr>
+            <a:r>
+              <a:rPr sz="1250" b="1">
+                <a:solidFill>
+                  <a:srgbClr val="16202A"/>
+                </a:solidFill>
+                <a:latin typeface="Microsoft YaHei"/>
+                <a:ea typeface="Microsoft YaHei"/>
+                <a:cs typeface="Microsoft YaHei"/>
+              </a:rPr>
+              <a:t>本轮实际判定</a:t>
+            </a:r>
+            <a:r>
+              <a:rPr sz="1000" b="0">
+                <a:solidFill>
+                  <a:srgbClr val="66727F"/>
+                </a:solidFill>
+                <a:latin typeface="Microsoft YaHei"/>
+                <a:ea typeface="Microsoft YaHei"/>
+                <a:cs typeface="Microsoft YaHei"/>
+              </a:rPr>
+              <a:t>　30B-A3B 单卡</a:t>
+            </a:r>
+          </a:p>
+        </p:txBody>
+      </p:sp>
+      <p:sp>
+        <p:nvSpPr>
+          <p:cNvPr id="33" name="Rectangle 32"/>
+          <p:cNvSpPr/>
+          <p:nvPr/>
+        </p:nvSpPr>
+        <p:spPr>
+          <a:xfrm>
+            <a:off x="7272223" y="2066543"/>
+            <a:ext cx="4169663" cy="292608"/>
+          </a:xfrm>
+          <a:prstGeom prst="rect">
+            <a:avLst/>
+          </a:prstGeom>
+          <a:solidFill>
+            <a:srgbClr val="FFFFFF"/>
+          </a:solidFill>
           <a:ln w="9525">
             <a:solidFill>
-              <a:srgbClr val="C5CCD4"/>
+              <a:srgbClr val="DDE2E7"/>
             </a:solidFill>
-            <a:prstDash val="dash"/>
           </a:ln>
         </p:spPr>
         <p:txBody>
-          <a:bodyPr rtlCol="0" anchor="ctr" wrap="square" tIns="36576" bIns="36576">
+          <a:bodyPr rtlCol="0" anchor="ctr"/>
+          <a:lstStyle/>
+          <a:p>
+            <a:pPr algn="ctr"/>
+          </a:p>
+        </p:txBody>
+      </p:sp>
+      <p:sp>
+        <p:nvSpPr>
+          <p:cNvPr id="34" name="TextBox 33"/>
+          <p:cNvSpPr txBox="1"/>
+          <p:nvPr/>
+        </p:nvSpPr>
+        <p:spPr>
+          <a:xfrm>
+            <a:off x="7436815" y="2066543"/>
+            <a:ext cx="3840480" cy="292608"/>
+          </a:xfrm>
+          <a:prstGeom prst="rect">
+            <a:avLst/>
+          </a:prstGeom>
+          <a:noFill/>
+        </p:spPr>
+        <p:txBody>
+          <a:bodyPr wrap="square" anchor="ctr" lIns="0" tIns="0" rIns="0" bIns="0">
+            <a:noAutofit/>
+          </a:bodyPr>
+          <a:lstStyle/>
+          <a:p>
+            <a:pPr algn="l" latinLnBrk="0">
+              <a:lnSpc>
+                <a:spcPct val="100000"/>
+              </a:lnSpc>
+              <a:spcBef>
+                <a:spcPts val="0"/>
+              </a:spcBef>
+              <a:spcAft>
+                <a:spcPts val="0"/>
+              </a:spcAft>
+            </a:pPr>
+            <a:r>
+              <a:rPr sz="1100" b="1">
+                <a:solidFill>
+                  <a:srgbClr val="16202A"/>
+                </a:solidFill>
+                <a:latin typeface="Microsoft YaHei"/>
+                <a:ea typeface="Microsoft YaHei"/>
+                <a:cs typeface="Microsoft YaHei"/>
+              </a:rPr>
+              <a:t>送进验收</a:t>
+            </a:r>
+            <a:r>
+              <a:rPr sz="1000" b="0">
+                <a:solidFill>
+                  <a:srgbClr val="66727F"/>
+                </a:solidFill>
+                <a:latin typeface="Microsoft YaHei"/>
+                <a:ea typeface="Microsoft YaHei"/>
+                <a:cs typeface="Microsoft YaHei"/>
+              </a:rPr>
+              <a:t>　五组候选，由便宜到贵逐道验</a:t>
+            </a:r>
+          </a:p>
+        </p:txBody>
+      </p:sp>
+      <p:sp>
+        <p:nvSpPr>
+          <p:cNvPr id="35" name="Oval 34"/>
+          <p:cNvSpPr/>
+          <p:nvPr/>
+        </p:nvSpPr>
+        <p:spPr>
+          <a:xfrm>
+            <a:off x="7308799" y="2459736"/>
+            <a:ext cx="274320" cy="274320"/>
+          </a:xfrm>
+          <a:prstGeom prst="ellipse">
+            <a:avLst/>
+          </a:prstGeom>
+          <a:solidFill>
+            <a:srgbClr val="C0612C"/>
+          </a:solidFill>
+          <a:ln>
+            <a:noFill/>
+          </a:ln>
+        </p:spPr>
+        <p:txBody>
+          <a:bodyPr rtlCol="0" anchor="ctr" wrap="square" lIns="0" tIns="0" rIns="0" bIns="0">
             <a:noAutofit/>
           </a:bodyPr>
           <a:lstStyle/>
@@ -16960,7 +17133,294 @@
               </a:spcAft>
             </a:pPr>
             <a:r>
-              <a:rPr sz="1300" b="1">
+              <a:rPr sz="1100" b="1">
+                <a:solidFill>
+                  <a:srgbClr val="FFFFFF"/>
+                </a:solidFill>
+                <a:latin typeface="Arial"/>
+                <a:ea typeface="Microsoft YaHei"/>
+                <a:cs typeface="Microsoft YaHei"/>
+              </a:rPr>
+              <a:t>①</a:t>
+            </a:r>
+          </a:p>
+        </p:txBody>
+      </p:sp>
+      <p:sp>
+        <p:nvSpPr>
+          <p:cNvPr id="36" name="TextBox 35"/>
+          <p:cNvSpPr txBox="1"/>
+          <p:nvPr/>
+        </p:nvSpPr>
+        <p:spPr>
+          <a:xfrm>
+            <a:off x="7674559" y="2432304"/>
+            <a:ext cx="1188720" cy="256032"/>
+          </a:xfrm>
+          <a:prstGeom prst="rect">
+            <a:avLst/>
+          </a:prstGeom>
+          <a:noFill/>
+        </p:spPr>
+        <p:txBody>
+          <a:bodyPr wrap="square" anchor="ctr" lIns="0" tIns="0" rIns="0" bIns="0">
+            <a:noAutofit/>
+          </a:bodyPr>
+          <a:lstStyle/>
+          <a:p>
+            <a:pPr algn="l" latinLnBrk="0">
+              <a:lnSpc>
+                <a:spcPct val="100000"/>
+              </a:lnSpc>
+              <a:spcBef>
+                <a:spcPts val="0"/>
+              </a:spcBef>
+              <a:spcAft>
+                <a:spcPts val="0"/>
+              </a:spcAft>
+            </a:pPr>
+            <a:r>
+              <a:rPr sz="1150" b="1">
+                <a:solidFill>
+                  <a:srgbClr val="16202A"/>
+                </a:solidFill>
+                <a:latin typeface="Microsoft YaHei"/>
+                <a:ea typeface="Microsoft YaHei"/>
+                <a:cs typeface="Microsoft YaHei"/>
+              </a:rPr>
+              <a:t>输出未变</a:t>
+            </a:r>
+          </a:p>
+        </p:txBody>
+      </p:sp>
+      <p:sp>
+        <p:nvSpPr>
+          <p:cNvPr id="37" name="TextBox 36"/>
+          <p:cNvSpPr txBox="1"/>
+          <p:nvPr/>
+        </p:nvSpPr>
+        <p:spPr>
+          <a:xfrm>
+            <a:off x="10070287" y="2432304"/>
+            <a:ext cx="1371600" cy="256032"/>
+          </a:xfrm>
+          <a:prstGeom prst="rect">
+            <a:avLst/>
+          </a:prstGeom>
+          <a:noFill/>
+        </p:spPr>
+        <p:txBody>
+          <a:bodyPr wrap="square" anchor="ctr" lIns="0" tIns="0" rIns="0" bIns="0">
+            <a:noAutofit/>
+          </a:bodyPr>
+          <a:lstStyle/>
+          <a:p>
+            <a:pPr algn="r" latinLnBrk="0">
+              <a:lnSpc>
+                <a:spcPct val="100000"/>
+              </a:lnSpc>
+              <a:spcBef>
+                <a:spcPts val="0"/>
+              </a:spcBef>
+              <a:spcAft>
+                <a:spcPts val="0"/>
+              </a:spcAft>
+            </a:pPr>
+            <a:r>
+              <a:rPr sz="1100" b="1">
+                <a:solidFill>
+                  <a:srgbClr val="B4382F"/>
+                </a:solidFill>
+                <a:latin typeface="Microsoft YaHei"/>
+                <a:ea typeface="Microsoft YaHei"/>
+                <a:cs typeface="Microsoft YaHei"/>
+              </a:rPr>
+              <a:t>挡掉 1 个模式</a:t>
+            </a:r>
+          </a:p>
+        </p:txBody>
+      </p:sp>
+      <p:sp>
+        <p:nvSpPr>
+          <p:cNvPr id="38" name="TextBox 37"/>
+          <p:cNvSpPr txBox="1"/>
+          <p:nvPr/>
+        </p:nvSpPr>
+        <p:spPr>
+          <a:xfrm>
+            <a:off x="7674559" y="2688336"/>
+            <a:ext cx="3767328" cy="365760"/>
+          </a:xfrm>
+          <a:prstGeom prst="rect">
+            <a:avLst/>
+          </a:prstGeom>
+          <a:noFill/>
+        </p:spPr>
+        <p:txBody>
+          <a:bodyPr wrap="square" anchor="ctr" lIns="0" tIns="0" rIns="0" bIns="0">
+            <a:noAutofit/>
+          </a:bodyPr>
+          <a:lstStyle/>
+          <a:p>
+            <a:pPr algn="l" latinLnBrk="0">
+              <a:lnSpc>
+                <a:spcPct val="100000"/>
+              </a:lnSpc>
+              <a:spcBef>
+                <a:spcPts val="0"/>
+              </a:spcBef>
+              <a:spcAft>
+                <a:spcPts val="0"/>
+              </a:spcAft>
+            </a:pPr>
+            <a:r>
+              <a:rPr sz="1000" b="0">
+                <a:solidFill>
+                  <a:srgbClr val="35424F"/>
+                </a:solidFill>
+                <a:latin typeface="Microsoft YaHei"/>
+                <a:ea typeface="Microsoft YaHei"/>
+                <a:cs typeface="Microsoft YaHei"/>
+              </a:rPr>
+              <a:t>分组关掉后 cos 0.000，算出来直接是错的</a:t>
+            </a:r>
+          </a:p>
+        </p:txBody>
+      </p:sp>
+      <p:sp>
+        <p:nvSpPr>
+          <p:cNvPr id="39" name="Oval 38"/>
+          <p:cNvSpPr/>
+          <p:nvPr/>
+        </p:nvSpPr>
+        <p:spPr>
+          <a:xfrm>
+            <a:off x="7308799" y="3118103"/>
+            <a:ext cx="274320" cy="274320"/>
+          </a:xfrm>
+          <a:prstGeom prst="ellipse">
+            <a:avLst/>
+          </a:prstGeom>
+          <a:solidFill>
+            <a:srgbClr val="C0612C"/>
+          </a:solidFill>
+          <a:ln>
+            <a:noFill/>
+          </a:ln>
+        </p:spPr>
+        <p:txBody>
+          <a:bodyPr rtlCol="0" anchor="ctr" wrap="square" lIns="0" tIns="0" rIns="0" bIns="0">
+            <a:noAutofit/>
+          </a:bodyPr>
+          <a:lstStyle/>
+          <a:p>
+            <a:pPr algn="ctr" latinLnBrk="0">
+              <a:lnSpc>
+                <a:spcPct val="100000"/>
+              </a:lnSpc>
+              <a:spcBef>
+                <a:spcPts val="0"/>
+              </a:spcBef>
+              <a:spcAft>
+                <a:spcPts val="0"/>
+              </a:spcAft>
+            </a:pPr>
+            <a:r>
+              <a:rPr sz="1100" b="1">
+                <a:solidFill>
+                  <a:srgbClr val="FFFFFF"/>
+                </a:solidFill>
+                <a:latin typeface="Arial"/>
+                <a:ea typeface="Microsoft YaHei"/>
+                <a:cs typeface="Microsoft YaHei"/>
+              </a:rPr>
+              <a:t>②</a:t>
+            </a:r>
+          </a:p>
+        </p:txBody>
+      </p:sp>
+      <p:sp>
+        <p:nvSpPr>
+          <p:cNvPr id="40" name="TextBox 39"/>
+          <p:cNvSpPr txBox="1"/>
+          <p:nvPr/>
+        </p:nvSpPr>
+        <p:spPr>
+          <a:xfrm>
+            <a:off x="7674559" y="3090672"/>
+            <a:ext cx="1188720" cy="256032"/>
+          </a:xfrm>
+          <a:prstGeom prst="rect">
+            <a:avLst/>
+          </a:prstGeom>
+          <a:noFill/>
+        </p:spPr>
+        <p:txBody>
+          <a:bodyPr wrap="square" anchor="ctr" lIns="0" tIns="0" rIns="0" bIns="0">
+            <a:noAutofit/>
+          </a:bodyPr>
+          <a:lstStyle/>
+          <a:p>
+            <a:pPr algn="l" latinLnBrk="0">
+              <a:lnSpc>
+                <a:spcPct val="100000"/>
+              </a:lnSpc>
+              <a:spcBef>
+                <a:spcPts val="0"/>
+              </a:spcBef>
+              <a:spcAft>
+                <a:spcPts val="0"/>
+              </a:spcAft>
+            </a:pPr>
+            <a:r>
+              <a:rPr sz="1150" b="1">
+                <a:solidFill>
+                  <a:srgbClr val="16202A"/>
+                </a:solidFill>
+                <a:latin typeface="Microsoft YaHei"/>
+                <a:ea typeface="Microsoft YaHei"/>
+                <a:cs typeface="Microsoft YaHei"/>
+              </a:rPr>
+              <a:t>质量达标</a:t>
+            </a:r>
+          </a:p>
+        </p:txBody>
+      </p:sp>
+      <p:sp>
+        <p:nvSpPr>
+          <p:cNvPr id="41" name="TextBox 40"/>
+          <p:cNvSpPr txBox="1"/>
+          <p:nvPr/>
+        </p:nvSpPr>
+        <p:spPr>
+          <a:xfrm>
+            <a:off x="10070287" y="3090672"/>
+            <a:ext cx="1371600" cy="256032"/>
+          </a:xfrm>
+          <a:prstGeom prst="rect">
+            <a:avLst/>
+          </a:prstGeom>
+          <a:noFill/>
+        </p:spPr>
+        <p:txBody>
+          <a:bodyPr wrap="square" anchor="ctr" lIns="0" tIns="0" rIns="0" bIns="0">
+            <a:noAutofit/>
+          </a:bodyPr>
+          <a:lstStyle/>
+          <a:p>
+            <a:pPr algn="r" latinLnBrk="0">
+              <a:lnSpc>
+                <a:spcPct val="100000"/>
+              </a:lnSpc>
+              <a:spcBef>
+                <a:spcPts val="0"/>
+              </a:spcBef>
+              <a:spcAft>
+                <a:spcPts val="0"/>
+              </a:spcAft>
+            </a:pPr>
+            <a:r>
+              <a:rPr sz="1100" b="0">
                 <a:solidFill>
                   <a:srgbClr val="66727F"/>
                 </a:solidFill>
@@ -16968,9 +17428,84 @@
                 <a:ea typeface="Microsoft YaHei"/>
                 <a:cs typeface="Microsoft YaHei"/>
               </a:rPr>
-              <a:t>待补充实际效果</a:t>
-            </a:r>
-          </a:p>
+              <a:t>本轮没拦下</a:t>
+            </a:r>
+          </a:p>
+        </p:txBody>
+      </p:sp>
+      <p:sp>
+        <p:nvSpPr>
+          <p:cNvPr id="42" name="TextBox 41"/>
+          <p:cNvSpPr txBox="1"/>
+          <p:nvPr/>
+        </p:nvSpPr>
+        <p:spPr>
+          <a:xfrm>
+            <a:off x="7674559" y="3346704"/>
+            <a:ext cx="3767328" cy="365760"/>
+          </a:xfrm>
+          <a:prstGeom prst="rect">
+            <a:avLst/>
+          </a:prstGeom>
+          <a:noFill/>
+        </p:spPr>
+        <p:txBody>
+          <a:bodyPr wrap="square" anchor="ctr" lIns="0" tIns="0" rIns="0" bIns="0">
+            <a:noAutofit/>
+          </a:bodyPr>
+          <a:lstStyle/>
+          <a:p>
+            <a:pPr algn="l" latinLnBrk="0">
+              <a:lnSpc>
+                <a:spcPct val="100000"/>
+              </a:lnSpc>
+              <a:spcBef>
+                <a:spcPts val="0"/>
+              </a:spcBef>
+              <a:spcAft>
+                <a:spcPts val="0"/>
+              </a:spcAft>
+            </a:pPr>
+            <a:r>
+              <a:rPr sz="1000" b="0">
+                <a:solidFill>
+                  <a:srgbClr val="66727F"/>
+                </a:solidFill>
+                <a:latin typeface="Microsoft YaHei"/>
+                <a:ea typeface="Microsoft YaHei"/>
+                <a:cs typeface="Microsoft YaHei"/>
+              </a:rPr>
+              <a:t>过了 ① 的候选输出逐位一致，不必再看质量</a:t>
+            </a:r>
+          </a:p>
+        </p:txBody>
+      </p:sp>
+      <p:sp>
+        <p:nvSpPr>
+          <p:cNvPr id="43" name="Oval 42"/>
+          <p:cNvSpPr/>
+          <p:nvPr/>
+        </p:nvSpPr>
+        <p:spPr>
+          <a:xfrm>
+            <a:off x="7308799" y="3776472"/>
+            <a:ext cx="274320" cy="274320"/>
+          </a:xfrm>
+          <a:prstGeom prst="ellipse">
+            <a:avLst/>
+          </a:prstGeom>
+          <a:solidFill>
+            <a:srgbClr val="C0612C"/>
+          </a:solidFill>
+          <a:ln>
+            <a:noFill/>
+          </a:ln>
+        </p:spPr>
+        <p:txBody>
+          <a:bodyPr rtlCol="0" anchor="ctr" wrap="square" lIns="0" tIns="0" rIns="0" bIns="0">
+            <a:noAutofit/>
+          </a:bodyPr>
+          <a:lstStyle/>
           <a:p>
             <a:pPr algn="ctr" latinLnBrk="0">
               <a:lnSpc>
@@ -16984,77 +17519,194 @@
               </a:spcAft>
             </a:pPr>
             <a:r>
-              <a:rPr sz="1050" b="0">
-                <a:solidFill>
-                  <a:srgbClr val="8C96A1"/>
-                </a:solidFill>
-                <a:latin typeface="Microsoft YaHei"/>
-                <a:ea typeface="Microsoft YaHei"/>
-                <a:cs typeface="Microsoft YaHei"/>
-              </a:rPr>
-              <a:t>建议：优化收益曲线</a:t>
-            </a:r>
-          </a:p>
-          <a:p>
-            <a:pPr algn="ctr" latinLnBrk="0">
-              <a:lnSpc>
-                <a:spcPct val="100000"/>
-              </a:lnSpc>
-              <a:spcBef>
-                <a:spcPts val="0"/>
-              </a:spcBef>
-              <a:spcAft>
-                <a:spcPts val="0"/>
-              </a:spcAft>
-            </a:pPr>
-            <a:r>
-              <a:rPr sz="1050" b="0">
-                <a:solidFill>
-                  <a:srgbClr val="8C96A1"/>
-                </a:solidFill>
-                <a:latin typeface="Microsoft YaHei"/>
-                <a:ea typeface="Microsoft YaHei"/>
-                <a:cs typeface="Microsoft YaHei"/>
-              </a:rPr>
-              <a:t>横轴为候选轮次，纵轴为收益；复验通过者单独标注</a:t>
-            </a:r>
-          </a:p>
-          <a:p>
-            <a:pPr algn="ctr" latinLnBrk="0">
-              <a:lnSpc>
-                <a:spcPct val="100000"/>
-              </a:lnSpc>
-              <a:spcBef>
-                <a:spcPts val="0"/>
-              </a:spcBef>
-              <a:spcAft>
-                <a:spcPts val="0"/>
-              </a:spcAft>
-            </a:pPr>
-            <a:r>
-              <a:rPr sz="950" b="0">
-                <a:solidFill>
-                  <a:srgbClr val="8C96A1"/>
-                </a:solidFill>
-                <a:latin typeface="Consolas"/>
-                <a:ea typeface="Microsoft YaHei"/>
-                <a:cs typeface="Microsoft YaHei"/>
-              </a:rPr>
-              <a:t>5.0 × 4.18 in</a:t>
-            </a:r>
-          </a:p>
-        </p:txBody>
-      </p:sp>
-      <p:sp>
-        <p:nvSpPr>
-          <p:cNvPr id="32" name="Rectangle 31"/>
+              <a:rPr sz="1100" b="1">
+                <a:solidFill>
+                  <a:srgbClr val="FFFFFF"/>
+                </a:solidFill>
+                <a:latin typeface="Arial"/>
+                <a:ea typeface="Microsoft YaHei"/>
+                <a:cs typeface="Microsoft YaHei"/>
+              </a:rPr>
+              <a:t>③</a:t>
+            </a:r>
+          </a:p>
+        </p:txBody>
+      </p:sp>
+      <p:sp>
+        <p:nvSpPr>
+          <p:cNvPr id="44" name="TextBox 43"/>
+          <p:cNvSpPr txBox="1"/>
+          <p:nvPr/>
+        </p:nvSpPr>
+        <p:spPr>
+          <a:xfrm>
+            <a:off x="7674559" y="3749039"/>
+            <a:ext cx="1188720" cy="256032"/>
+          </a:xfrm>
+          <a:prstGeom prst="rect">
+            <a:avLst/>
+          </a:prstGeom>
+          <a:noFill/>
+        </p:spPr>
+        <p:txBody>
+          <a:bodyPr wrap="square" anchor="ctr" lIns="0" tIns="0" rIns="0" bIns="0">
+            <a:noAutofit/>
+          </a:bodyPr>
+          <a:lstStyle/>
+          <a:p>
+            <a:pPr algn="l" latinLnBrk="0">
+              <a:lnSpc>
+                <a:spcPct val="100000"/>
+              </a:lnSpc>
+              <a:spcBef>
+                <a:spcPts val="0"/>
+              </a:spcBef>
+              <a:spcAft>
+                <a:spcPts val="0"/>
+              </a:spcAft>
+            </a:pPr>
+            <a:r>
+              <a:rPr sz="1150" b="1">
+                <a:solidFill>
+                  <a:srgbClr val="16202A"/>
+                </a:solidFill>
+                <a:latin typeface="Microsoft YaHei"/>
+                <a:ea typeface="Microsoft YaHei"/>
+                <a:cs typeface="Microsoft YaHei"/>
+              </a:rPr>
+              <a:t>确实更快</a:t>
+            </a:r>
+          </a:p>
+        </p:txBody>
+      </p:sp>
+      <p:sp>
+        <p:nvSpPr>
+          <p:cNvPr id="45" name="TextBox 44"/>
+          <p:cNvSpPr txBox="1"/>
+          <p:nvPr/>
+        </p:nvSpPr>
+        <p:spPr>
+          <a:xfrm>
+            <a:off x="10070287" y="3749039"/>
+            <a:ext cx="1371600" cy="256032"/>
+          </a:xfrm>
+          <a:prstGeom prst="rect">
+            <a:avLst/>
+          </a:prstGeom>
+          <a:noFill/>
+        </p:spPr>
+        <p:txBody>
+          <a:bodyPr wrap="square" anchor="ctr" lIns="0" tIns="0" rIns="0" bIns="0">
+            <a:noAutofit/>
+          </a:bodyPr>
+          <a:lstStyle/>
+          <a:p>
+            <a:pPr algn="r" latinLnBrk="0">
+              <a:lnSpc>
+                <a:spcPct val="100000"/>
+              </a:lnSpc>
+              <a:spcBef>
+                <a:spcPts val="0"/>
+              </a:spcBef>
+              <a:spcAft>
+                <a:spcPts val="0"/>
+              </a:spcAft>
+            </a:pPr>
+            <a:r>
+              <a:rPr sz="1100" b="1">
+                <a:solidFill>
+                  <a:srgbClr val="B4382F"/>
+                </a:solidFill>
+                <a:latin typeface="Microsoft YaHei"/>
+                <a:ea typeface="Microsoft YaHei"/>
+                <a:cs typeface="Microsoft YaHei"/>
+              </a:rPr>
+              <a:t>挡掉 3 组</a:t>
+            </a:r>
+          </a:p>
+        </p:txBody>
+      </p:sp>
+      <p:sp>
+        <p:nvSpPr>
+          <p:cNvPr id="46" name="TextBox 45"/>
+          <p:cNvSpPr txBox="1"/>
+          <p:nvPr/>
+        </p:nvSpPr>
+        <p:spPr>
+          <a:xfrm>
+            <a:off x="7674559" y="4005072"/>
+            <a:ext cx="3767328" cy="365760"/>
+          </a:xfrm>
+          <a:prstGeom prst="rect">
+            <a:avLst/>
+          </a:prstGeom>
+          <a:noFill/>
+        </p:spPr>
+        <p:txBody>
+          <a:bodyPr wrap="square" anchor="ctr" lIns="0" tIns="0" rIns="0" bIns="0">
+            <a:noAutofit/>
+          </a:bodyPr>
+          <a:lstStyle/>
+          <a:p>
+            <a:pPr algn="l" latinLnBrk="0">
+              <a:lnSpc>
+                <a:spcPct val="100000"/>
+              </a:lnSpc>
+              <a:spcBef>
+                <a:spcPts val="0"/>
+              </a:spcBef>
+              <a:spcAft>
+                <a:spcPts val="0"/>
+              </a:spcAft>
+            </a:pPr>
+            <a:r>
+              <a:rPr sz="1000" b="0">
+                <a:solidFill>
+                  <a:srgbClr val="35424F"/>
+                </a:solidFill>
+                <a:latin typeface="Microsoft YaHei"/>
+                <a:ea typeface="Microsoft YaHei"/>
+                <a:cs typeface="Microsoft YaHei"/>
+              </a:rPr>
+              <a:t>强制不分组 −20%；换现成核 0.61× 更慢；</a:t>
+            </a:r>
+          </a:p>
+          <a:p>
+            <a:pPr algn="l" latinLnBrk="0">
+              <a:lnSpc>
+                <a:spcPct val="100000"/>
+              </a:lnSpc>
+              <a:spcBef>
+                <a:spcPts val="0"/>
+              </a:spcBef>
+              <a:spcAft>
+                <a:spcPts val="0"/>
+              </a:spcAft>
+            </a:pPr>
+            <a:r>
+              <a:rPr sz="1000" b="0">
+                <a:solidFill>
+                  <a:srgbClr val="35424F"/>
+                </a:solidFill>
+                <a:latin typeface="Microsoft YaHei"/>
+                <a:ea typeface="Microsoft YaHei"/>
+                <a:cs typeface="Microsoft YaHei"/>
+              </a:rPr>
+              <a:t>路由融合最多只值 0.9%，够不着 3% 的门槛</a:t>
+            </a:r>
+          </a:p>
+        </p:txBody>
+      </p:sp>
+      <p:sp>
+        <p:nvSpPr>
+          <p:cNvPr id="47" name="Rectangle 46"/>
           <p:cNvSpPr/>
           <p:nvPr/>
         </p:nvSpPr>
         <p:spPr>
           <a:xfrm>
-            <a:off x="548640" y="5632704"/>
-            <a:ext cx="11094415" cy="475488"/>
+            <a:off x="7272223" y="4425696"/>
+            <a:ext cx="4169663" cy="713232"/>
           </a:xfrm>
           <a:prstGeom prst="rect">
             <a:avLst/>
@@ -17076,7 +17728,257 @@
       </p:sp>
       <p:sp>
         <p:nvSpPr>
-          <p:cNvPr id="33" name="Rectangle 32"/>
+          <p:cNvPr id="48" name="TextBox 47"/>
+          <p:cNvSpPr txBox="1"/>
+          <p:nvPr/>
+        </p:nvSpPr>
+        <p:spPr>
+          <a:xfrm>
+            <a:off x="7436815" y="4462272"/>
+            <a:ext cx="3840480" cy="237744"/>
+          </a:xfrm>
+          <a:prstGeom prst="rect">
+            <a:avLst/>
+          </a:prstGeom>
+          <a:noFill/>
+        </p:spPr>
+        <p:txBody>
+          <a:bodyPr wrap="square" anchor="ctr" lIns="0" tIns="0" rIns="0" bIns="0">
+            <a:noAutofit/>
+          </a:bodyPr>
+          <a:lstStyle/>
+          <a:p>
+            <a:pPr algn="l" latinLnBrk="0">
+              <a:lnSpc>
+                <a:spcPct val="100000"/>
+              </a:lnSpc>
+              <a:spcBef>
+                <a:spcPts val="0"/>
+              </a:spcBef>
+              <a:spcAft>
+                <a:spcPts val="0"/>
+              </a:spcAft>
+            </a:pPr>
+            <a:r>
+              <a:rPr sz="1100" b="1">
+                <a:solidFill>
+                  <a:srgbClr val="16202A"/>
+                </a:solidFill>
+                <a:latin typeface="Microsoft YaHei"/>
+                <a:ea typeface="Microsoft YaHei"/>
+                <a:cs typeface="Microsoft YaHei"/>
+              </a:rPr>
+              <a:t>三道全过</a:t>
+            </a:r>
+            <a:r>
+              <a:rPr sz="1100" b="1">
+                <a:solidFill>
+                  <a:srgbClr val="3F63A8"/>
+                </a:solidFill>
+                <a:latin typeface="Microsoft YaHei"/>
+                <a:ea typeface="Microsoft YaHei"/>
+                <a:cs typeface="Microsoft YaHei"/>
+              </a:rPr>
+              <a:t>　2 组 · 交付</a:t>
+            </a:r>
+          </a:p>
+        </p:txBody>
+      </p:sp>
+      <p:sp>
+        <p:nvSpPr>
+          <p:cNvPr id="49" name="TextBox 48"/>
+          <p:cNvSpPr txBox="1"/>
+          <p:nvPr/>
+        </p:nvSpPr>
+        <p:spPr>
+          <a:xfrm>
+            <a:off x="7436815" y="4700016"/>
+            <a:ext cx="3840480" cy="201168"/>
+          </a:xfrm>
+          <a:prstGeom prst="rect">
+            <a:avLst/>
+          </a:prstGeom>
+          <a:noFill/>
+        </p:spPr>
+        <p:txBody>
+          <a:bodyPr wrap="square" anchor="ctr" lIns="0" tIns="0" rIns="0" bIns="0">
+            <a:noAutofit/>
+          </a:bodyPr>
+          <a:lstStyle/>
+          <a:p>
+            <a:pPr algn="l" latinLnBrk="0">
+              <a:lnSpc>
+                <a:spcPct val="100000"/>
+              </a:lnSpc>
+              <a:spcBef>
+                <a:spcPts val="0"/>
+              </a:spcBef>
+              <a:spcAft>
+                <a:spcPts val="0"/>
+              </a:spcAft>
+            </a:pPr>
+            <a:r>
+              <a:rPr sz="1000" b="0">
+                <a:solidFill>
+                  <a:srgbClr val="35424F"/>
+                </a:solidFill>
+                <a:latin typeface="Microsoft YaHei"/>
+                <a:ea typeface="Microsoft YaHei"/>
+                <a:cs typeface="Microsoft YaHei"/>
+              </a:rPr>
+              <a:t>· 激活与量化合成一个核</a:t>
+            </a:r>
+          </a:p>
+        </p:txBody>
+      </p:sp>
+      <p:sp>
+        <p:nvSpPr>
+          <p:cNvPr id="50" name="TextBox 49"/>
+          <p:cNvSpPr txBox="1"/>
+          <p:nvPr/>
+        </p:nvSpPr>
+        <p:spPr>
+          <a:xfrm>
+            <a:off x="7436815" y="4901183"/>
+            <a:ext cx="3840480" cy="201168"/>
+          </a:xfrm>
+          <a:prstGeom prst="rect">
+            <a:avLst/>
+          </a:prstGeom>
+          <a:noFill/>
+        </p:spPr>
+        <p:txBody>
+          <a:bodyPr wrap="square" anchor="ctr" lIns="0" tIns="0" rIns="0" bIns="0">
+            <a:noAutofit/>
+          </a:bodyPr>
+          <a:lstStyle/>
+          <a:p>
+            <a:pPr algn="l" latinLnBrk="0">
+              <a:lnSpc>
+                <a:spcPct val="100000"/>
+              </a:lnSpc>
+              <a:spcBef>
+                <a:spcPts val="0"/>
+              </a:spcBef>
+              <a:spcAft>
+                <a:spcPts val="0"/>
+              </a:spcAft>
+            </a:pPr>
+            <a:r>
+              <a:rPr sz="1000" b="0">
+                <a:solidFill>
+                  <a:srgbClr val="35424F"/>
+                </a:solidFill>
+                <a:latin typeface="Microsoft YaHei"/>
+                <a:ea typeface="Microsoft YaHei"/>
+                <a:cs typeface="Microsoft YaHei"/>
+              </a:rPr>
+              <a:t>· 换成耗时不随规模涨的核</a:t>
+            </a:r>
+          </a:p>
+        </p:txBody>
+      </p:sp>
+      <p:sp>
+        <p:nvSpPr>
+          <p:cNvPr id="51" name="TextBox 50"/>
+          <p:cNvSpPr txBox="1"/>
+          <p:nvPr/>
+        </p:nvSpPr>
+        <p:spPr>
+          <a:xfrm>
+            <a:off x="7272223" y="5212079"/>
+            <a:ext cx="4169663" cy="237744"/>
+          </a:xfrm>
+          <a:prstGeom prst="rect">
+            <a:avLst/>
+          </a:prstGeom>
+          <a:noFill/>
+        </p:spPr>
+        <p:txBody>
+          <a:bodyPr wrap="square" anchor="ctr" lIns="0" tIns="0" rIns="0" bIns="0">
+            <a:noAutofit/>
+          </a:bodyPr>
+          <a:lstStyle/>
+          <a:p>
+            <a:pPr algn="l" latinLnBrk="0">
+              <a:lnSpc>
+                <a:spcPct val="100000"/>
+              </a:lnSpc>
+              <a:spcBef>
+                <a:spcPts val="0"/>
+              </a:spcBef>
+              <a:spcAft>
+                <a:spcPts val="0"/>
+              </a:spcAft>
+            </a:pPr>
+            <a:r>
+              <a:rPr sz="1000" b="0">
+                <a:solidFill>
+                  <a:srgbClr val="66727F"/>
+                </a:solidFill>
+                <a:latin typeface="Microsoft YaHei"/>
+                <a:ea typeface="Microsoft YaHei"/>
+                <a:cs typeface="Microsoft YaHei"/>
+              </a:rPr>
+              <a:t>峰值吞吐 </a:t>
+            </a:r>
+            <a:r>
+              <a:rPr sz="1000" b="1">
+                <a:solidFill>
+                  <a:srgbClr val="16202A"/>
+                </a:solidFill>
+                <a:latin typeface="Consolas"/>
+                <a:ea typeface="Microsoft YaHei"/>
+                <a:cs typeface="Microsoft YaHei"/>
+              </a:rPr>
+              <a:t>1370 → 1883 tok/s</a:t>
+            </a:r>
+            <a:r>
+              <a:rPr sz="1100" b="1">
+                <a:solidFill>
+                  <a:srgbClr val="3F63A8"/>
+                </a:solidFill>
+                <a:latin typeface="Consolas"/>
+                <a:ea typeface="Microsoft YaHei"/>
+                <a:cs typeface="Microsoft YaHei"/>
+              </a:rPr>
+              <a:t>　+37%</a:t>
+            </a:r>
+          </a:p>
+        </p:txBody>
+      </p:sp>
+      <p:sp>
+        <p:nvSpPr>
+          <p:cNvPr id="52" name="Rectangle 51"/>
+          <p:cNvSpPr/>
+          <p:nvPr/>
+        </p:nvSpPr>
+        <p:spPr>
+          <a:xfrm>
+            <a:off x="548640" y="5632704"/>
+            <a:ext cx="11094415" cy="475488"/>
+          </a:xfrm>
+          <a:prstGeom prst="rect">
+            <a:avLst/>
+          </a:prstGeom>
+          <a:solidFill>
+            <a:srgbClr val="F8EADF"/>
+          </a:solidFill>
+          <a:ln>
+            <a:noFill/>
+          </a:ln>
+        </p:spPr>
+        <p:txBody>
+          <a:bodyPr rtlCol="0" anchor="ctr"/>
+          <a:lstStyle/>
+          <a:p>
+            <a:pPr algn="ctr"/>
+          </a:p>
+        </p:txBody>
+      </p:sp>
+      <p:sp>
+        <p:nvSpPr>
+          <p:cNvPr id="53" name="Rectangle 52"/>
           <p:cNvSpPr/>
           <p:nvPr/>
         </p:nvSpPr>
@@ -17105,7 +18007,7 @@
       </p:sp>
       <p:sp>
         <p:nvSpPr>
-          <p:cNvPr id="34" name="TextBox 33"/>
+          <p:cNvPr id="54" name="TextBox 53"/>
           <p:cNvSpPr txBox="1"/>
           <p:nvPr/>
         </p:nvSpPr>
@@ -17163,7 +18065,7 @@
       </p:sp>
       <p:sp>
         <p:nvSpPr>
-          <p:cNvPr id="35" name="TextBox 34"/>
+          <p:cNvPr id="55" name="TextBox 54"/>
           <p:cNvSpPr txBox="1"/>
           <p:nvPr/>
         </p:nvSpPr>
@@ -17210,7 +18112,7 @@
       </p:sp>
       <p:sp>
         <p:nvSpPr>
-          <p:cNvPr id="36" name="TextBox 35"/>
+          <p:cNvPr id="56" name="TextBox 55"/>
           <p:cNvSpPr txBox="1"/>
           <p:nvPr/>
         </p:nvSpPr>
